--- a/assets/assets.pptx
+++ b/assets/assets.pptx
@@ -7,6 +7,7 @@
   <p:sldIdLst>
     <p:sldId id="257" r:id="rId2"/>
     <p:sldId id="258" r:id="rId3"/>
+    <p:sldId id="259" r:id="rId4"/>
   </p:sldIdLst>
   <p:sldSz cx="12192000" cy="6858000"/>
   <p:notesSz cx="6858000" cy="9144000"/>
@@ -105,6 +106,11 @@
       </a:defRPr>
     </a:lvl9pPr>
   </p:defaultTextStyle>
+  <p:extLst>
+    <p:ext uri="{EFAFB233-063F-42B5-8137-9DF3F51BA10A}">
+      <p15:sldGuideLst xmlns:p15="http://schemas.microsoft.com/office/powerpoint/2012/main"/>
+    </p:ext>
+  </p:extLst>
 </p:presentation>
 </file>
 
@@ -255,7 +261,7 @@
           <a:p>
             <a:fld id="{8ADA360F-AEB3-ED4F-A06C-859F2B7CCC29}" type="datetimeFigureOut">
               <a:rPr lang="en-US" smtClean="0"/>
-              <a:t>8/3/26</a:t>
+              <a:t>8/4/26</a:t>
             </a:fld>
             <a:endParaRPr lang="en-US"/>
           </a:p>
@@ -453,7 +459,7 @@
           <a:p>
             <a:fld id="{8ADA360F-AEB3-ED4F-A06C-859F2B7CCC29}" type="datetimeFigureOut">
               <a:rPr lang="en-US" smtClean="0"/>
-              <a:t>8/3/26</a:t>
+              <a:t>8/4/26</a:t>
             </a:fld>
             <a:endParaRPr lang="en-US"/>
           </a:p>
@@ -661,7 +667,7 @@
           <a:p>
             <a:fld id="{8ADA360F-AEB3-ED4F-A06C-859F2B7CCC29}" type="datetimeFigureOut">
               <a:rPr lang="en-US" smtClean="0"/>
-              <a:t>8/3/26</a:t>
+              <a:t>8/4/26</a:t>
             </a:fld>
             <a:endParaRPr lang="en-US"/>
           </a:p>
@@ -859,7 +865,7 @@
           <a:p>
             <a:fld id="{8ADA360F-AEB3-ED4F-A06C-859F2B7CCC29}" type="datetimeFigureOut">
               <a:rPr lang="en-US" smtClean="0"/>
-              <a:t>8/3/26</a:t>
+              <a:t>8/4/26</a:t>
             </a:fld>
             <a:endParaRPr lang="en-US"/>
           </a:p>
@@ -1134,7 +1140,7 @@
           <a:p>
             <a:fld id="{8ADA360F-AEB3-ED4F-A06C-859F2B7CCC29}" type="datetimeFigureOut">
               <a:rPr lang="en-US" smtClean="0"/>
-              <a:t>8/3/26</a:t>
+              <a:t>8/4/26</a:t>
             </a:fld>
             <a:endParaRPr lang="en-US"/>
           </a:p>
@@ -1399,7 +1405,7 @@
           <a:p>
             <a:fld id="{8ADA360F-AEB3-ED4F-A06C-859F2B7CCC29}" type="datetimeFigureOut">
               <a:rPr lang="en-US" smtClean="0"/>
-              <a:t>8/3/26</a:t>
+              <a:t>8/4/26</a:t>
             </a:fld>
             <a:endParaRPr lang="en-US"/>
           </a:p>
@@ -1811,7 +1817,7 @@
           <a:p>
             <a:fld id="{8ADA360F-AEB3-ED4F-A06C-859F2B7CCC29}" type="datetimeFigureOut">
               <a:rPr lang="en-US" smtClean="0"/>
-              <a:t>8/3/26</a:t>
+              <a:t>8/4/26</a:t>
             </a:fld>
             <a:endParaRPr lang="en-US"/>
           </a:p>
@@ -1952,7 +1958,7 @@
           <a:p>
             <a:fld id="{8ADA360F-AEB3-ED4F-A06C-859F2B7CCC29}" type="datetimeFigureOut">
               <a:rPr lang="en-US" smtClean="0"/>
-              <a:t>8/3/26</a:t>
+              <a:t>8/4/26</a:t>
             </a:fld>
             <a:endParaRPr lang="en-US"/>
           </a:p>
@@ -2065,7 +2071,7 @@
           <a:p>
             <a:fld id="{8ADA360F-AEB3-ED4F-A06C-859F2B7CCC29}" type="datetimeFigureOut">
               <a:rPr lang="en-US" smtClean="0"/>
-              <a:t>8/3/26</a:t>
+              <a:t>8/4/26</a:t>
             </a:fld>
             <a:endParaRPr lang="en-US"/>
           </a:p>
@@ -2376,7 +2382,7 @@
           <a:p>
             <a:fld id="{8ADA360F-AEB3-ED4F-A06C-859F2B7CCC29}" type="datetimeFigureOut">
               <a:rPr lang="en-US" smtClean="0"/>
-              <a:t>8/3/26</a:t>
+              <a:t>8/4/26</a:t>
             </a:fld>
             <a:endParaRPr lang="en-US"/>
           </a:p>
@@ -2664,7 +2670,7 @@
           <a:p>
             <a:fld id="{8ADA360F-AEB3-ED4F-A06C-859F2B7CCC29}" type="datetimeFigureOut">
               <a:rPr lang="en-US" smtClean="0"/>
-              <a:t>8/3/26</a:t>
+              <a:t>8/4/26</a:t>
             </a:fld>
             <a:endParaRPr lang="en-US"/>
           </a:p>
@@ -2905,7 +2911,7 @@
           <a:p>
             <a:fld id="{8ADA360F-AEB3-ED4F-A06C-859F2B7CCC29}" type="datetimeFigureOut">
               <a:rPr lang="en-US" smtClean="0"/>
-              <a:t>8/3/26</a:t>
+              <a:t>8/4/26</a:t>
             </a:fld>
             <a:endParaRPr lang="en-US"/>
           </a:p>
@@ -4420,6 +4426,832 @@
     <p:extLst>
       <p:ext uri="{BB962C8B-B14F-4D97-AF65-F5344CB8AC3E}">
         <p14:creationId xmlns:p14="http://schemas.microsoft.com/office/powerpoint/2010/main" val="1571297667"/>
+      </p:ext>
+    </p:extLst>
+  </p:cSld>
+  <p:clrMapOvr>
+    <a:masterClrMapping/>
+  </p:clrMapOvr>
+</p:sld>
+</file>
+
+<file path=ppt/slides/slide3.xml><?xml version="1.0" encoding="utf-8"?>
+<p:sld xmlns:a="http://schemas.openxmlformats.org/drawingml/2006/main" xmlns:r="http://schemas.openxmlformats.org/officeDocument/2006/relationships" xmlns:p="http://schemas.openxmlformats.org/presentationml/2006/main">
+  <p:cSld>
+    <p:spTree>
+      <p:nvGrpSpPr>
+        <p:cNvPr id="1" name="">
+          <a:extLst>
+            <a:ext uri="{FF2B5EF4-FFF2-40B4-BE49-F238E27FC236}">
+              <a16:creationId xmlns:a16="http://schemas.microsoft.com/office/drawing/2014/main" id="{97308736-F835-07F0-3DE4-4B329176F1FC}"/>
+            </a:ext>
+          </a:extLst>
+        </p:cNvPr>
+        <p:cNvGrpSpPr/>
+        <p:nvPr/>
+      </p:nvGrpSpPr>
+      <p:grpSpPr>
+        <a:xfrm>
+          <a:off x="0" y="0"/>
+          <a:ext cx="0" cy="0"/>
+          <a:chOff x="0" y="0"/>
+          <a:chExt cx="0" cy="0"/>
+        </a:xfrm>
+      </p:grpSpPr>
+      <p:sp>
+        <p:nvSpPr>
+          <p:cNvPr id="2" name="Oval 1">
+            <a:extLst>
+              <a:ext uri="{FF2B5EF4-FFF2-40B4-BE49-F238E27FC236}">
+                <a16:creationId xmlns:a16="http://schemas.microsoft.com/office/drawing/2014/main" id="{639DBF28-3959-0969-95F3-448EC5552A23}"/>
+              </a:ext>
+            </a:extLst>
+          </p:cNvPr>
+          <p:cNvSpPr/>
+          <p:nvPr/>
+        </p:nvSpPr>
+        <p:spPr>
+          <a:xfrm>
+            <a:off x="4034116" y="2456672"/>
+            <a:ext cx="559398" cy="559398"/>
+          </a:xfrm>
+          <a:prstGeom prst="ellipse">
+            <a:avLst/>
+          </a:prstGeom>
+        </p:spPr>
+        <p:style>
+          <a:lnRef idx="2">
+            <a:schemeClr val="accent1">
+              <a:shade val="15000"/>
+            </a:schemeClr>
+          </a:lnRef>
+          <a:fillRef idx="1">
+            <a:schemeClr val="accent1"/>
+          </a:fillRef>
+          <a:effectRef idx="0">
+            <a:schemeClr val="accent1"/>
+          </a:effectRef>
+          <a:fontRef idx="minor">
+            <a:schemeClr val="lt1"/>
+          </a:fontRef>
+        </p:style>
+        <p:txBody>
+          <a:bodyPr rtlCol="0" anchor="ctr"/>
+          <a:lstStyle/>
+          <a:p>
+            <a:pPr algn="ctr"/>
+            <a:r>
+              <a:rPr lang="en-US" dirty="0"/>
+              <a:t>1</a:t>
+            </a:r>
+          </a:p>
+        </p:txBody>
+      </p:sp>
+      <p:sp>
+        <p:nvSpPr>
+          <p:cNvPr id="3" name="Oval 2">
+            <a:extLst>
+              <a:ext uri="{FF2B5EF4-FFF2-40B4-BE49-F238E27FC236}">
+                <a16:creationId xmlns:a16="http://schemas.microsoft.com/office/drawing/2014/main" id="{662A9092-7CEA-D851-F06A-F19F4E1BAD01}"/>
+              </a:ext>
+            </a:extLst>
+          </p:cNvPr>
+          <p:cNvSpPr/>
+          <p:nvPr/>
+        </p:nvSpPr>
+        <p:spPr>
+          <a:xfrm>
+            <a:off x="7316994" y="1757425"/>
+            <a:ext cx="559398" cy="559398"/>
+          </a:xfrm>
+          <a:prstGeom prst="ellipse">
+            <a:avLst/>
+          </a:prstGeom>
+        </p:spPr>
+        <p:style>
+          <a:lnRef idx="2">
+            <a:schemeClr val="accent1">
+              <a:shade val="15000"/>
+            </a:schemeClr>
+          </a:lnRef>
+          <a:fillRef idx="1">
+            <a:schemeClr val="accent1"/>
+          </a:fillRef>
+          <a:effectRef idx="0">
+            <a:schemeClr val="accent1"/>
+          </a:effectRef>
+          <a:fontRef idx="minor">
+            <a:schemeClr val="lt1"/>
+          </a:fontRef>
+        </p:style>
+        <p:txBody>
+          <a:bodyPr rtlCol="0" anchor="ctr"/>
+          <a:lstStyle/>
+          <a:p>
+            <a:pPr algn="ctr"/>
+            <a:r>
+              <a:rPr lang="en-US" dirty="0"/>
+              <a:t>2</a:t>
+            </a:r>
+          </a:p>
+        </p:txBody>
+      </p:sp>
+      <p:sp>
+        <p:nvSpPr>
+          <p:cNvPr id="5" name="Rectangle 4">
+            <a:extLst>
+              <a:ext uri="{FF2B5EF4-FFF2-40B4-BE49-F238E27FC236}">
+                <a16:creationId xmlns:a16="http://schemas.microsoft.com/office/drawing/2014/main" id="{D871A55F-1497-15D2-AE71-C6EEA312A526}"/>
+              </a:ext>
+            </a:extLst>
+          </p:cNvPr>
+          <p:cNvSpPr/>
+          <p:nvPr/>
+        </p:nvSpPr>
+        <p:spPr>
+          <a:xfrm>
+            <a:off x="2369093" y="2456672"/>
+            <a:ext cx="559398" cy="559398"/>
+          </a:xfrm>
+          <a:prstGeom prst="rect">
+            <a:avLst/>
+          </a:prstGeom>
+        </p:spPr>
+        <p:style>
+          <a:lnRef idx="2">
+            <a:schemeClr val="accent2">
+              <a:shade val="15000"/>
+            </a:schemeClr>
+          </a:lnRef>
+          <a:fillRef idx="1">
+            <a:schemeClr val="accent2"/>
+          </a:fillRef>
+          <a:effectRef idx="0">
+            <a:schemeClr val="accent2"/>
+          </a:effectRef>
+          <a:fontRef idx="minor">
+            <a:schemeClr val="lt1"/>
+          </a:fontRef>
+        </p:style>
+        <p:txBody>
+          <a:bodyPr rtlCol="0" anchor="ctr"/>
+          <a:lstStyle/>
+          <a:p>
+            <a:pPr algn="ctr"/>
+            <a:r>
+              <a:rPr lang="en-US" dirty="0"/>
+              <a:t>1</a:t>
+            </a:r>
+          </a:p>
+        </p:txBody>
+      </p:sp>
+      <p:cxnSp>
+        <p:nvCxnSpPr>
+          <p:cNvPr id="10" name="Straight Arrow Connector 9">
+            <a:extLst>
+              <a:ext uri="{FF2B5EF4-FFF2-40B4-BE49-F238E27FC236}">
+                <a16:creationId xmlns:a16="http://schemas.microsoft.com/office/drawing/2014/main" id="{3444C305-BB53-2A6D-DED7-7D11C7F849C7}"/>
+              </a:ext>
+            </a:extLst>
+          </p:cNvPr>
+          <p:cNvCxnSpPr>
+            <a:stCxn id="5" idx="3"/>
+            <a:endCxn id="2" idx="2"/>
+          </p:cNvCxnSpPr>
+          <p:nvPr/>
+        </p:nvCxnSpPr>
+        <p:spPr>
+          <a:xfrm>
+            <a:off x="2928491" y="2736371"/>
+            <a:ext cx="1105625" cy="0"/>
+          </a:xfrm>
+          <a:prstGeom prst="straightConnector1">
+            <a:avLst/>
+          </a:prstGeom>
+          <a:ln>
+            <a:tailEnd type="triangle"/>
+          </a:ln>
+        </p:spPr>
+        <p:style>
+          <a:lnRef idx="2">
+            <a:schemeClr val="dk1"/>
+          </a:lnRef>
+          <a:fillRef idx="0">
+            <a:schemeClr val="dk1"/>
+          </a:fillRef>
+          <a:effectRef idx="1">
+            <a:schemeClr val="dk1"/>
+          </a:effectRef>
+          <a:fontRef idx="minor">
+            <a:schemeClr val="tx1"/>
+          </a:fontRef>
+        </p:style>
+      </p:cxnSp>
+      <p:cxnSp>
+        <p:nvCxnSpPr>
+          <p:cNvPr id="11" name="Straight Arrow Connector 10">
+            <a:extLst>
+              <a:ext uri="{FF2B5EF4-FFF2-40B4-BE49-F238E27FC236}">
+                <a16:creationId xmlns:a16="http://schemas.microsoft.com/office/drawing/2014/main" id="{5F53DA1F-00DD-2D9A-3024-113E60277EC6}"/>
+              </a:ext>
+            </a:extLst>
+          </p:cNvPr>
+          <p:cNvCxnSpPr>
+            <a:cxnSpLocks/>
+            <a:stCxn id="2" idx="7"/>
+          </p:cNvCxnSpPr>
+          <p:nvPr/>
+        </p:nvCxnSpPr>
+        <p:spPr>
+          <a:xfrm flipV="1">
+            <a:off x="4511592" y="2037124"/>
+            <a:ext cx="1123002" cy="501470"/>
+          </a:xfrm>
+          <a:prstGeom prst="straightConnector1">
+            <a:avLst/>
+          </a:prstGeom>
+          <a:ln>
+            <a:tailEnd type="triangle"/>
+          </a:ln>
+        </p:spPr>
+        <p:style>
+          <a:lnRef idx="2">
+            <a:schemeClr val="dk1"/>
+          </a:lnRef>
+          <a:fillRef idx="0">
+            <a:schemeClr val="dk1"/>
+          </a:fillRef>
+          <a:effectRef idx="1">
+            <a:schemeClr val="dk1"/>
+          </a:effectRef>
+          <a:fontRef idx="minor">
+            <a:schemeClr val="tx1"/>
+          </a:fontRef>
+        </p:style>
+      </p:cxnSp>
+      <p:sp>
+        <p:nvSpPr>
+          <p:cNvPr id="19" name="Oval 18">
+            <a:extLst>
+              <a:ext uri="{FF2B5EF4-FFF2-40B4-BE49-F238E27FC236}">
+                <a16:creationId xmlns:a16="http://schemas.microsoft.com/office/drawing/2014/main" id="{3C5E753C-2CC4-9CE6-D425-60FE74FFE647}"/>
+              </a:ext>
+            </a:extLst>
+          </p:cNvPr>
+          <p:cNvSpPr/>
+          <p:nvPr/>
+        </p:nvSpPr>
+        <p:spPr>
+          <a:xfrm>
+            <a:off x="7316994" y="3980052"/>
+            <a:ext cx="559398" cy="559398"/>
+          </a:xfrm>
+          <a:prstGeom prst="ellipse">
+            <a:avLst/>
+          </a:prstGeom>
+          <a:solidFill>
+            <a:schemeClr val="bg1">
+              <a:lumMod val="75000"/>
+            </a:schemeClr>
+          </a:solidFill>
+          <a:ln>
+            <a:solidFill>
+              <a:schemeClr val="bg1">
+                <a:lumMod val="65000"/>
+              </a:schemeClr>
+            </a:solidFill>
+          </a:ln>
+        </p:spPr>
+        <p:style>
+          <a:lnRef idx="2">
+            <a:schemeClr val="accent1">
+              <a:shade val="15000"/>
+            </a:schemeClr>
+          </a:lnRef>
+          <a:fillRef idx="1">
+            <a:schemeClr val="accent1"/>
+          </a:fillRef>
+          <a:effectRef idx="0">
+            <a:schemeClr val="accent1"/>
+          </a:effectRef>
+          <a:fontRef idx="minor">
+            <a:schemeClr val="lt1"/>
+          </a:fontRef>
+        </p:style>
+        <p:txBody>
+          <a:bodyPr rtlCol="0" anchor="ctr"/>
+          <a:lstStyle/>
+          <a:p>
+            <a:pPr algn="ctr"/>
+            <a:r>
+              <a:rPr lang="en-US" dirty="0"/>
+              <a:t>3</a:t>
+            </a:r>
+          </a:p>
+        </p:txBody>
+      </p:sp>
+      <p:sp>
+        <p:nvSpPr>
+          <p:cNvPr id="20" name="Rectangle 19">
+            <a:extLst>
+              <a:ext uri="{FF2B5EF4-FFF2-40B4-BE49-F238E27FC236}">
+                <a16:creationId xmlns:a16="http://schemas.microsoft.com/office/drawing/2014/main" id="{C9169425-873E-80D1-23EC-A483D28FF43C}"/>
+              </a:ext>
+            </a:extLst>
+          </p:cNvPr>
+          <p:cNvSpPr/>
+          <p:nvPr/>
+        </p:nvSpPr>
+        <p:spPr>
+          <a:xfrm>
+            <a:off x="5634594" y="1757425"/>
+            <a:ext cx="559398" cy="559398"/>
+          </a:xfrm>
+          <a:prstGeom prst="rect">
+            <a:avLst/>
+          </a:prstGeom>
+        </p:spPr>
+        <p:style>
+          <a:lnRef idx="2">
+            <a:schemeClr val="accent2">
+              <a:shade val="15000"/>
+            </a:schemeClr>
+          </a:lnRef>
+          <a:fillRef idx="1">
+            <a:schemeClr val="accent2"/>
+          </a:fillRef>
+          <a:effectRef idx="0">
+            <a:schemeClr val="accent2"/>
+          </a:effectRef>
+          <a:fontRef idx="minor">
+            <a:schemeClr val="lt1"/>
+          </a:fontRef>
+        </p:style>
+        <p:txBody>
+          <a:bodyPr rtlCol="0" anchor="ctr"/>
+          <a:lstStyle/>
+          <a:p>
+            <a:pPr algn="ctr"/>
+            <a:r>
+              <a:rPr lang="en-US" dirty="0"/>
+              <a:t>2</a:t>
+            </a:r>
+          </a:p>
+        </p:txBody>
+      </p:sp>
+      <p:sp>
+        <p:nvSpPr>
+          <p:cNvPr id="21" name="Rectangle 20">
+            <a:extLst>
+              <a:ext uri="{FF2B5EF4-FFF2-40B4-BE49-F238E27FC236}">
+                <a16:creationId xmlns:a16="http://schemas.microsoft.com/office/drawing/2014/main" id="{4556C224-718D-C66C-D9E1-5A91CED84DAB}"/>
+              </a:ext>
+            </a:extLst>
+          </p:cNvPr>
+          <p:cNvSpPr/>
+          <p:nvPr/>
+        </p:nvSpPr>
+        <p:spPr>
+          <a:xfrm>
+            <a:off x="5634594" y="3258118"/>
+            <a:ext cx="559398" cy="559398"/>
+          </a:xfrm>
+          <a:prstGeom prst="rect">
+            <a:avLst/>
+          </a:prstGeom>
+          <a:solidFill>
+            <a:schemeClr val="bg1">
+              <a:lumMod val="75000"/>
+            </a:schemeClr>
+          </a:solidFill>
+          <a:ln>
+            <a:solidFill>
+              <a:schemeClr val="bg1">
+                <a:lumMod val="65000"/>
+              </a:schemeClr>
+            </a:solidFill>
+          </a:ln>
+        </p:spPr>
+        <p:style>
+          <a:lnRef idx="2">
+            <a:schemeClr val="accent2">
+              <a:shade val="15000"/>
+            </a:schemeClr>
+          </a:lnRef>
+          <a:fillRef idx="1">
+            <a:schemeClr val="accent2"/>
+          </a:fillRef>
+          <a:effectRef idx="0">
+            <a:schemeClr val="accent2"/>
+          </a:effectRef>
+          <a:fontRef idx="minor">
+            <a:schemeClr val="lt1"/>
+          </a:fontRef>
+        </p:style>
+        <p:txBody>
+          <a:bodyPr rtlCol="0" anchor="ctr"/>
+          <a:lstStyle/>
+          <a:p>
+            <a:pPr algn="ctr"/>
+            <a:r>
+              <a:rPr lang="en-US" dirty="0"/>
+              <a:t>3</a:t>
+            </a:r>
+          </a:p>
+        </p:txBody>
+      </p:sp>
+      <p:cxnSp>
+        <p:nvCxnSpPr>
+          <p:cNvPr id="22" name="Straight Arrow Connector 21">
+            <a:extLst>
+              <a:ext uri="{FF2B5EF4-FFF2-40B4-BE49-F238E27FC236}">
+                <a16:creationId xmlns:a16="http://schemas.microsoft.com/office/drawing/2014/main" id="{D75E1E52-EBD3-826F-2ACB-343B17C388D4}"/>
+              </a:ext>
+            </a:extLst>
+          </p:cNvPr>
+          <p:cNvCxnSpPr>
+            <a:cxnSpLocks/>
+            <a:stCxn id="2" idx="5"/>
+            <a:endCxn id="21" idx="1"/>
+          </p:cNvCxnSpPr>
+          <p:nvPr/>
+        </p:nvCxnSpPr>
+        <p:spPr>
+          <a:xfrm>
+            <a:off x="4511592" y="2934148"/>
+            <a:ext cx="1123002" cy="603669"/>
+          </a:xfrm>
+          <a:prstGeom prst="straightConnector1">
+            <a:avLst/>
+          </a:prstGeom>
+          <a:ln>
+            <a:solidFill>
+              <a:schemeClr val="bg1">
+                <a:lumMod val="65000"/>
+              </a:schemeClr>
+            </a:solidFill>
+            <a:tailEnd type="triangle"/>
+          </a:ln>
+        </p:spPr>
+        <p:style>
+          <a:lnRef idx="2">
+            <a:schemeClr val="dk1"/>
+          </a:lnRef>
+          <a:fillRef idx="0">
+            <a:schemeClr val="dk1"/>
+          </a:fillRef>
+          <a:effectRef idx="1">
+            <a:schemeClr val="dk1"/>
+          </a:effectRef>
+          <a:fontRef idx="minor">
+            <a:schemeClr val="tx1"/>
+          </a:fontRef>
+        </p:style>
+      </p:cxnSp>
+      <p:sp>
+        <p:nvSpPr>
+          <p:cNvPr id="27" name="Rectangle 26">
+            <a:extLst>
+              <a:ext uri="{FF2B5EF4-FFF2-40B4-BE49-F238E27FC236}">
+                <a16:creationId xmlns:a16="http://schemas.microsoft.com/office/drawing/2014/main" id="{7E1FC43C-0485-A9B4-7961-B0AEAD5D6B23}"/>
+              </a:ext>
+            </a:extLst>
+          </p:cNvPr>
+          <p:cNvSpPr/>
+          <p:nvPr/>
+        </p:nvSpPr>
+        <p:spPr>
+          <a:xfrm>
+            <a:off x="5634594" y="4758811"/>
+            <a:ext cx="559398" cy="559398"/>
+          </a:xfrm>
+          <a:prstGeom prst="rect">
+            <a:avLst/>
+          </a:prstGeom>
+          <a:solidFill>
+            <a:schemeClr val="bg1">
+              <a:lumMod val="75000"/>
+            </a:schemeClr>
+          </a:solidFill>
+          <a:ln>
+            <a:solidFill>
+              <a:schemeClr val="bg1">
+                <a:lumMod val="65000"/>
+              </a:schemeClr>
+            </a:solidFill>
+          </a:ln>
+        </p:spPr>
+        <p:style>
+          <a:lnRef idx="2">
+            <a:schemeClr val="accent2">
+              <a:shade val="15000"/>
+            </a:schemeClr>
+          </a:lnRef>
+          <a:fillRef idx="1">
+            <a:schemeClr val="accent2"/>
+          </a:fillRef>
+          <a:effectRef idx="0">
+            <a:schemeClr val="accent2"/>
+          </a:effectRef>
+          <a:fontRef idx="minor">
+            <a:schemeClr val="lt1"/>
+          </a:fontRef>
+        </p:style>
+        <p:txBody>
+          <a:bodyPr rtlCol="0" anchor="ctr"/>
+          <a:lstStyle/>
+          <a:p>
+            <a:pPr algn="ctr"/>
+            <a:r>
+              <a:rPr lang="en-US" dirty="0"/>
+              <a:t>4</a:t>
+            </a:r>
+          </a:p>
+        </p:txBody>
+      </p:sp>
+      <p:cxnSp>
+        <p:nvCxnSpPr>
+          <p:cNvPr id="28" name="Straight Arrow Connector 27">
+            <a:extLst>
+              <a:ext uri="{FF2B5EF4-FFF2-40B4-BE49-F238E27FC236}">
+                <a16:creationId xmlns:a16="http://schemas.microsoft.com/office/drawing/2014/main" id="{468044A7-4910-FCC2-C711-1A64681FBCFB}"/>
+              </a:ext>
+            </a:extLst>
+          </p:cNvPr>
+          <p:cNvCxnSpPr>
+            <a:cxnSpLocks/>
+            <a:stCxn id="20" idx="3"/>
+            <a:endCxn id="3" idx="2"/>
+          </p:cNvCxnSpPr>
+          <p:nvPr/>
+        </p:nvCxnSpPr>
+        <p:spPr>
+          <a:xfrm>
+            <a:off x="6193992" y="2037124"/>
+            <a:ext cx="1123002" cy="0"/>
+          </a:xfrm>
+          <a:prstGeom prst="straightConnector1">
+            <a:avLst/>
+          </a:prstGeom>
+          <a:ln>
+            <a:tailEnd type="triangle"/>
+          </a:ln>
+        </p:spPr>
+        <p:style>
+          <a:lnRef idx="2">
+            <a:schemeClr val="dk1"/>
+          </a:lnRef>
+          <a:fillRef idx="0">
+            <a:schemeClr val="dk1"/>
+          </a:fillRef>
+          <a:effectRef idx="1">
+            <a:schemeClr val="dk1"/>
+          </a:effectRef>
+          <a:fontRef idx="minor">
+            <a:schemeClr val="tx1"/>
+          </a:fontRef>
+        </p:style>
+      </p:cxnSp>
+      <p:cxnSp>
+        <p:nvCxnSpPr>
+          <p:cNvPr id="33" name="Straight Arrow Connector 32">
+            <a:extLst>
+              <a:ext uri="{FF2B5EF4-FFF2-40B4-BE49-F238E27FC236}">
+                <a16:creationId xmlns:a16="http://schemas.microsoft.com/office/drawing/2014/main" id="{D20B5430-C4FC-3998-46C2-C20833A158A0}"/>
+              </a:ext>
+            </a:extLst>
+          </p:cNvPr>
+          <p:cNvCxnSpPr>
+            <a:cxnSpLocks/>
+            <a:stCxn id="27" idx="3"/>
+            <a:endCxn id="19" idx="3"/>
+          </p:cNvCxnSpPr>
+          <p:nvPr/>
+        </p:nvCxnSpPr>
+        <p:spPr>
+          <a:xfrm flipV="1">
+            <a:off x="6193992" y="4457528"/>
+            <a:ext cx="1204924" cy="580982"/>
+          </a:xfrm>
+          <a:prstGeom prst="straightConnector1">
+            <a:avLst/>
+          </a:prstGeom>
+          <a:ln>
+            <a:solidFill>
+              <a:schemeClr val="bg1">
+                <a:lumMod val="65000"/>
+              </a:schemeClr>
+            </a:solidFill>
+            <a:tailEnd type="triangle"/>
+          </a:ln>
+        </p:spPr>
+        <p:style>
+          <a:lnRef idx="2">
+            <a:schemeClr val="dk1"/>
+          </a:lnRef>
+          <a:fillRef idx="0">
+            <a:schemeClr val="dk1"/>
+          </a:fillRef>
+          <a:effectRef idx="1">
+            <a:schemeClr val="dk1"/>
+          </a:effectRef>
+          <a:fontRef idx="minor">
+            <a:schemeClr val="tx1"/>
+          </a:fontRef>
+        </p:style>
+      </p:cxnSp>
+      <p:cxnSp>
+        <p:nvCxnSpPr>
+          <p:cNvPr id="36" name="Straight Arrow Connector 35">
+            <a:extLst>
+              <a:ext uri="{FF2B5EF4-FFF2-40B4-BE49-F238E27FC236}">
+                <a16:creationId xmlns:a16="http://schemas.microsoft.com/office/drawing/2014/main" id="{8406B670-4D06-BCF7-78DB-D966EFEEA1BD}"/>
+              </a:ext>
+            </a:extLst>
+          </p:cNvPr>
+          <p:cNvCxnSpPr>
+            <a:cxnSpLocks/>
+            <a:stCxn id="21" idx="3"/>
+            <a:endCxn id="19" idx="1"/>
+          </p:cNvCxnSpPr>
+          <p:nvPr/>
+        </p:nvCxnSpPr>
+        <p:spPr>
+          <a:xfrm>
+            <a:off x="6193992" y="3537817"/>
+            <a:ext cx="1204924" cy="524157"/>
+          </a:xfrm>
+          <a:prstGeom prst="straightConnector1">
+            <a:avLst/>
+          </a:prstGeom>
+          <a:ln>
+            <a:solidFill>
+              <a:schemeClr val="bg1">
+                <a:lumMod val="65000"/>
+              </a:schemeClr>
+            </a:solidFill>
+            <a:tailEnd type="triangle"/>
+          </a:ln>
+        </p:spPr>
+        <p:style>
+          <a:lnRef idx="2">
+            <a:schemeClr val="dk1"/>
+          </a:lnRef>
+          <a:fillRef idx="0">
+            <a:schemeClr val="dk1"/>
+          </a:fillRef>
+          <a:effectRef idx="1">
+            <a:schemeClr val="dk1"/>
+          </a:effectRef>
+          <a:fontRef idx="minor">
+            <a:schemeClr val="tx1"/>
+          </a:fontRef>
+        </p:style>
+      </p:cxnSp>
+      <p:cxnSp>
+        <p:nvCxnSpPr>
+          <p:cNvPr id="41" name="Straight Arrow Connector 40">
+            <a:extLst>
+              <a:ext uri="{FF2B5EF4-FFF2-40B4-BE49-F238E27FC236}">
+                <a16:creationId xmlns:a16="http://schemas.microsoft.com/office/drawing/2014/main" id="{1A04D4BB-2213-3CF8-6BDD-06BF5FAB1EDE}"/>
+              </a:ext>
+            </a:extLst>
+          </p:cNvPr>
+          <p:cNvCxnSpPr>
+            <a:cxnSpLocks/>
+            <a:stCxn id="3" idx="5"/>
+            <a:endCxn id="44" idx="1"/>
+          </p:cNvCxnSpPr>
+          <p:nvPr/>
+        </p:nvCxnSpPr>
+        <p:spPr>
+          <a:xfrm>
+            <a:off x="7794470" y="2234901"/>
+            <a:ext cx="1299332" cy="914400"/>
+          </a:xfrm>
+          <a:prstGeom prst="straightConnector1">
+            <a:avLst/>
+          </a:prstGeom>
+          <a:ln>
+            <a:tailEnd type="triangle"/>
+          </a:ln>
+        </p:spPr>
+        <p:style>
+          <a:lnRef idx="2">
+            <a:schemeClr val="dk1"/>
+          </a:lnRef>
+          <a:fillRef idx="0">
+            <a:schemeClr val="dk1"/>
+          </a:fillRef>
+          <a:effectRef idx="1">
+            <a:schemeClr val="dk1"/>
+          </a:effectRef>
+          <a:fontRef idx="minor">
+            <a:schemeClr val="tx1"/>
+          </a:fontRef>
+        </p:style>
+      </p:cxnSp>
+      <p:sp>
+        <p:nvSpPr>
+          <p:cNvPr id="44" name="Rectangle 43">
+            <a:extLst>
+              <a:ext uri="{FF2B5EF4-FFF2-40B4-BE49-F238E27FC236}">
+                <a16:creationId xmlns:a16="http://schemas.microsoft.com/office/drawing/2014/main" id="{958CA984-5288-4CE3-93E0-5512C45EB3A7}"/>
+              </a:ext>
+            </a:extLst>
+          </p:cNvPr>
+          <p:cNvSpPr/>
+          <p:nvPr/>
+        </p:nvSpPr>
+        <p:spPr>
+          <a:xfrm>
+            <a:off x="9093802" y="2869602"/>
+            <a:ext cx="559398" cy="559398"/>
+          </a:xfrm>
+          <a:prstGeom prst="rect">
+            <a:avLst/>
+          </a:prstGeom>
+        </p:spPr>
+        <p:style>
+          <a:lnRef idx="2">
+            <a:schemeClr val="accent2">
+              <a:shade val="15000"/>
+            </a:schemeClr>
+          </a:lnRef>
+          <a:fillRef idx="1">
+            <a:schemeClr val="accent2"/>
+          </a:fillRef>
+          <a:effectRef idx="0">
+            <a:schemeClr val="accent2"/>
+          </a:effectRef>
+          <a:fontRef idx="minor">
+            <a:schemeClr val="lt1"/>
+          </a:fontRef>
+        </p:style>
+        <p:txBody>
+          <a:bodyPr rtlCol="0" anchor="ctr"/>
+          <a:lstStyle/>
+          <a:p>
+            <a:pPr algn="ctr"/>
+            <a:r>
+              <a:rPr lang="en-US" dirty="0"/>
+              <a:t>5</a:t>
+            </a:r>
+          </a:p>
+        </p:txBody>
+      </p:sp>
+      <p:cxnSp>
+        <p:nvCxnSpPr>
+          <p:cNvPr id="45" name="Straight Arrow Connector 44">
+            <a:extLst>
+              <a:ext uri="{FF2B5EF4-FFF2-40B4-BE49-F238E27FC236}">
+                <a16:creationId xmlns:a16="http://schemas.microsoft.com/office/drawing/2014/main" id="{62F5C1D7-D834-7EA0-8C0A-87E72A768A33}"/>
+              </a:ext>
+            </a:extLst>
+          </p:cNvPr>
+          <p:cNvCxnSpPr>
+            <a:cxnSpLocks/>
+            <a:stCxn id="19" idx="7"/>
+            <a:endCxn id="44" idx="1"/>
+          </p:cNvCxnSpPr>
+          <p:nvPr/>
+        </p:nvCxnSpPr>
+        <p:spPr>
+          <a:xfrm flipV="1">
+            <a:off x="7794470" y="3149301"/>
+            <a:ext cx="1299332" cy="912673"/>
+          </a:xfrm>
+          <a:prstGeom prst="straightConnector1">
+            <a:avLst/>
+          </a:prstGeom>
+          <a:ln>
+            <a:solidFill>
+              <a:schemeClr val="bg1">
+                <a:lumMod val="65000"/>
+              </a:schemeClr>
+            </a:solidFill>
+            <a:tailEnd type="triangle"/>
+          </a:ln>
+        </p:spPr>
+        <p:style>
+          <a:lnRef idx="2">
+            <a:schemeClr val="dk1"/>
+          </a:lnRef>
+          <a:fillRef idx="0">
+            <a:schemeClr val="dk1"/>
+          </a:fillRef>
+          <a:effectRef idx="1">
+            <a:schemeClr val="dk1"/>
+          </a:effectRef>
+          <a:fontRef idx="minor">
+            <a:schemeClr val="tx1"/>
+          </a:fontRef>
+        </p:style>
+      </p:cxnSp>
+    </p:spTree>
+    <p:extLst>
+      <p:ext uri="{BB962C8B-B14F-4D97-AF65-F5344CB8AC3E}">
+        <p14:creationId xmlns:p14="http://schemas.microsoft.com/office/powerpoint/2010/main" val="3967485050"/>
       </p:ext>
     </p:extLst>
   </p:cSld>

--- a/assets/assets.pptx
+++ b/assets/assets.pptx
@@ -4,10 +4,18 @@
   <p:sldMasterIdLst>
     <p:sldMasterId id="2147483648" r:id="rId1"/>
   </p:sldMasterIdLst>
+  <p:notesMasterIdLst>
+    <p:notesMasterId r:id="rId10"/>
+  </p:notesMasterIdLst>
   <p:sldIdLst>
     <p:sldId id="257" r:id="rId2"/>
     <p:sldId id="258" r:id="rId3"/>
-    <p:sldId id="259" r:id="rId4"/>
+    <p:sldId id="265" r:id="rId4"/>
+    <p:sldId id="259" r:id="rId5"/>
+    <p:sldId id="261" r:id="rId6"/>
+    <p:sldId id="262" r:id="rId7"/>
+    <p:sldId id="263" r:id="rId8"/>
+    <p:sldId id="264" r:id="rId9"/>
   </p:sldIdLst>
   <p:sldSz cx="12192000" cy="6858000"/>
   <p:notesSz cx="6858000" cy="9144000"/>
@@ -114,6 +122,1175 @@
 </p:presentation>
 </file>
 
+<file path=ppt/notesMasters/notesMaster1.xml><?xml version="1.0" encoding="utf-8"?>
+<p:notesMaster xmlns:a="http://schemas.openxmlformats.org/drawingml/2006/main" xmlns:r="http://schemas.openxmlformats.org/officeDocument/2006/relationships" xmlns:p="http://schemas.openxmlformats.org/presentationml/2006/main">
+  <p:cSld>
+    <p:bg>
+      <p:bgRef idx="1001">
+        <a:schemeClr val="bg1"/>
+      </p:bgRef>
+    </p:bg>
+    <p:spTree>
+      <p:nvGrpSpPr>
+        <p:cNvPr id="1" name=""/>
+        <p:cNvGrpSpPr/>
+        <p:nvPr/>
+      </p:nvGrpSpPr>
+      <p:grpSpPr>
+        <a:xfrm>
+          <a:off x="0" y="0"/>
+          <a:ext cx="0" cy="0"/>
+          <a:chOff x="0" y="0"/>
+          <a:chExt cx="0" cy="0"/>
+        </a:xfrm>
+      </p:grpSpPr>
+      <p:sp>
+        <p:nvSpPr>
+          <p:cNvPr id="2" name="Header Placeholder 1"/>
+          <p:cNvSpPr>
+            <a:spLocks noGrp="1"/>
+          </p:cNvSpPr>
+          <p:nvPr>
+            <p:ph type="hdr" sz="quarter"/>
+          </p:nvPr>
+        </p:nvSpPr>
+        <p:spPr>
+          <a:xfrm>
+            <a:off x="0" y="0"/>
+            <a:ext cx="2971800" cy="458788"/>
+          </a:xfrm>
+          <a:prstGeom prst="rect">
+            <a:avLst/>
+          </a:prstGeom>
+        </p:spPr>
+        <p:txBody>
+          <a:bodyPr vert="horz" lIns="91440" tIns="45720" rIns="91440" bIns="45720" rtlCol="0"/>
+          <a:lstStyle>
+            <a:lvl1pPr algn="l">
+              <a:defRPr sz="1200"/>
+            </a:lvl1pPr>
+          </a:lstStyle>
+          <a:p>
+            <a:endParaRPr lang="en-US"/>
+          </a:p>
+        </p:txBody>
+      </p:sp>
+      <p:sp>
+        <p:nvSpPr>
+          <p:cNvPr id="3" name="Date Placeholder 2"/>
+          <p:cNvSpPr>
+            <a:spLocks noGrp="1"/>
+          </p:cNvSpPr>
+          <p:nvPr>
+            <p:ph type="dt" idx="1"/>
+          </p:nvPr>
+        </p:nvSpPr>
+        <p:spPr>
+          <a:xfrm>
+            <a:off x="3884613" y="0"/>
+            <a:ext cx="2971800" cy="458788"/>
+          </a:xfrm>
+          <a:prstGeom prst="rect">
+            <a:avLst/>
+          </a:prstGeom>
+        </p:spPr>
+        <p:txBody>
+          <a:bodyPr vert="horz" lIns="91440" tIns="45720" rIns="91440" bIns="45720" rtlCol="0"/>
+          <a:lstStyle>
+            <a:lvl1pPr algn="r">
+              <a:defRPr sz="1200"/>
+            </a:lvl1pPr>
+          </a:lstStyle>
+          <a:p>
+            <a:fld id="{19AEFDCD-AE0B-1646-8877-3CDD2F5E1237}" type="datetimeFigureOut">
+              <a:rPr lang="en-US" smtClean="0"/>
+              <a:t>8/5/26</a:t>
+            </a:fld>
+            <a:endParaRPr lang="en-US"/>
+          </a:p>
+        </p:txBody>
+      </p:sp>
+      <p:sp>
+        <p:nvSpPr>
+          <p:cNvPr id="4" name="Slide Image Placeholder 3"/>
+          <p:cNvSpPr>
+            <a:spLocks noGrp="1" noRot="1" noChangeAspect="1"/>
+          </p:cNvSpPr>
+          <p:nvPr>
+            <p:ph type="sldImg" idx="2"/>
+          </p:nvPr>
+        </p:nvSpPr>
+        <p:spPr>
+          <a:xfrm>
+            <a:off x="685800" y="1143000"/>
+            <a:ext cx="5486400" cy="3086100"/>
+          </a:xfrm>
+          <a:prstGeom prst="rect">
+            <a:avLst/>
+          </a:prstGeom>
+          <a:noFill/>
+          <a:ln w="12700">
+            <a:solidFill>
+              <a:prstClr val="black"/>
+            </a:solidFill>
+          </a:ln>
+        </p:spPr>
+        <p:txBody>
+          <a:bodyPr vert="horz" lIns="91440" tIns="45720" rIns="91440" bIns="45720" rtlCol="0" anchor="ctr"/>
+          <a:lstStyle/>
+          <a:p>
+            <a:endParaRPr lang="en-US"/>
+          </a:p>
+        </p:txBody>
+      </p:sp>
+      <p:sp>
+        <p:nvSpPr>
+          <p:cNvPr id="5" name="Notes Placeholder 4"/>
+          <p:cNvSpPr>
+            <a:spLocks noGrp="1"/>
+          </p:cNvSpPr>
+          <p:nvPr>
+            <p:ph type="body" sz="quarter" idx="3"/>
+          </p:nvPr>
+        </p:nvSpPr>
+        <p:spPr>
+          <a:xfrm>
+            <a:off x="685800" y="4400550"/>
+            <a:ext cx="5486400" cy="3600450"/>
+          </a:xfrm>
+          <a:prstGeom prst="rect">
+            <a:avLst/>
+          </a:prstGeom>
+        </p:spPr>
+        <p:txBody>
+          <a:bodyPr vert="horz" lIns="91440" tIns="45720" rIns="91440" bIns="45720" rtlCol="0"/>
+          <a:lstStyle/>
+          <a:p>
+            <a:pPr lvl="0"/>
+            <a:r>
+              <a:rPr lang="en-US"/>
+              <a:t>Click to edit Master text styles</a:t>
+            </a:r>
+          </a:p>
+          <a:p>
+            <a:pPr lvl="1"/>
+            <a:r>
+              <a:rPr lang="en-US"/>
+              <a:t>Second level</a:t>
+            </a:r>
+          </a:p>
+          <a:p>
+            <a:pPr lvl="2"/>
+            <a:r>
+              <a:rPr lang="en-US"/>
+              <a:t>Third level</a:t>
+            </a:r>
+          </a:p>
+          <a:p>
+            <a:pPr lvl="3"/>
+            <a:r>
+              <a:rPr lang="en-US"/>
+              <a:t>Fourth level</a:t>
+            </a:r>
+          </a:p>
+          <a:p>
+            <a:pPr lvl="4"/>
+            <a:r>
+              <a:rPr lang="en-US"/>
+              <a:t>Fifth level</a:t>
+            </a:r>
+          </a:p>
+        </p:txBody>
+      </p:sp>
+      <p:sp>
+        <p:nvSpPr>
+          <p:cNvPr id="6" name="Footer Placeholder 5"/>
+          <p:cNvSpPr>
+            <a:spLocks noGrp="1"/>
+          </p:cNvSpPr>
+          <p:nvPr>
+            <p:ph type="ftr" sz="quarter" idx="4"/>
+          </p:nvPr>
+        </p:nvSpPr>
+        <p:spPr>
+          <a:xfrm>
+            <a:off x="0" y="8685213"/>
+            <a:ext cx="2971800" cy="458787"/>
+          </a:xfrm>
+          <a:prstGeom prst="rect">
+            <a:avLst/>
+          </a:prstGeom>
+        </p:spPr>
+        <p:txBody>
+          <a:bodyPr vert="horz" lIns="91440" tIns="45720" rIns="91440" bIns="45720" rtlCol="0" anchor="b"/>
+          <a:lstStyle>
+            <a:lvl1pPr algn="l">
+              <a:defRPr sz="1200"/>
+            </a:lvl1pPr>
+          </a:lstStyle>
+          <a:p>
+            <a:endParaRPr lang="en-US"/>
+          </a:p>
+        </p:txBody>
+      </p:sp>
+      <p:sp>
+        <p:nvSpPr>
+          <p:cNvPr id="7" name="Slide Number Placeholder 6"/>
+          <p:cNvSpPr>
+            <a:spLocks noGrp="1"/>
+          </p:cNvSpPr>
+          <p:nvPr>
+            <p:ph type="sldNum" sz="quarter" idx="5"/>
+          </p:nvPr>
+        </p:nvSpPr>
+        <p:spPr>
+          <a:xfrm>
+            <a:off x="3884613" y="8685213"/>
+            <a:ext cx="2971800" cy="458787"/>
+          </a:xfrm>
+          <a:prstGeom prst="rect">
+            <a:avLst/>
+          </a:prstGeom>
+        </p:spPr>
+        <p:txBody>
+          <a:bodyPr vert="horz" lIns="91440" tIns="45720" rIns="91440" bIns="45720" rtlCol="0" anchor="b"/>
+          <a:lstStyle>
+            <a:lvl1pPr algn="r">
+              <a:defRPr sz="1200"/>
+            </a:lvl1pPr>
+          </a:lstStyle>
+          <a:p>
+            <a:fld id="{B106BD36-D029-FD48-90BB-5960D8DA54C0}" type="slidenum">
+              <a:rPr lang="en-US" smtClean="0"/>
+              <a:t>‹#›</a:t>
+            </a:fld>
+            <a:endParaRPr lang="en-US"/>
+          </a:p>
+        </p:txBody>
+      </p:sp>
+    </p:spTree>
+    <p:extLst>
+      <p:ext uri="{BB962C8B-B14F-4D97-AF65-F5344CB8AC3E}">
+        <p14:creationId xmlns:p14="http://schemas.microsoft.com/office/powerpoint/2010/main" val="720567636"/>
+      </p:ext>
+    </p:extLst>
+  </p:cSld>
+  <p:clrMap bg1="lt1" tx1="dk1" bg2="lt2" tx2="dk2" accent1="accent1" accent2="accent2" accent3="accent3" accent4="accent4" accent5="accent5" accent6="accent6" hlink="hlink" folHlink="folHlink"/>
+  <p:notesStyle>
+    <a:lvl1pPr marL="0" algn="l" defTabSz="914400" rtl="0" eaLnBrk="1" latinLnBrk="0" hangingPunct="1">
+      <a:defRPr sz="1200" kern="1200">
+        <a:solidFill>
+          <a:schemeClr val="tx1"/>
+        </a:solidFill>
+        <a:latin typeface="+mn-lt"/>
+        <a:ea typeface="+mn-ea"/>
+        <a:cs typeface="+mn-cs"/>
+      </a:defRPr>
+    </a:lvl1pPr>
+    <a:lvl2pPr marL="457200" algn="l" defTabSz="914400" rtl="0" eaLnBrk="1" latinLnBrk="0" hangingPunct="1">
+      <a:defRPr sz="1200" kern="1200">
+        <a:solidFill>
+          <a:schemeClr val="tx1"/>
+        </a:solidFill>
+        <a:latin typeface="+mn-lt"/>
+        <a:ea typeface="+mn-ea"/>
+        <a:cs typeface="+mn-cs"/>
+      </a:defRPr>
+    </a:lvl2pPr>
+    <a:lvl3pPr marL="914400" algn="l" defTabSz="914400" rtl="0" eaLnBrk="1" latinLnBrk="0" hangingPunct="1">
+      <a:defRPr sz="1200" kern="1200">
+        <a:solidFill>
+          <a:schemeClr val="tx1"/>
+        </a:solidFill>
+        <a:latin typeface="+mn-lt"/>
+        <a:ea typeface="+mn-ea"/>
+        <a:cs typeface="+mn-cs"/>
+      </a:defRPr>
+    </a:lvl3pPr>
+    <a:lvl4pPr marL="1371600" algn="l" defTabSz="914400" rtl="0" eaLnBrk="1" latinLnBrk="0" hangingPunct="1">
+      <a:defRPr sz="1200" kern="1200">
+        <a:solidFill>
+          <a:schemeClr val="tx1"/>
+        </a:solidFill>
+        <a:latin typeface="+mn-lt"/>
+        <a:ea typeface="+mn-ea"/>
+        <a:cs typeface="+mn-cs"/>
+      </a:defRPr>
+    </a:lvl4pPr>
+    <a:lvl5pPr marL="1828800" algn="l" defTabSz="914400" rtl="0" eaLnBrk="1" latinLnBrk="0" hangingPunct="1">
+      <a:defRPr sz="1200" kern="1200">
+        <a:solidFill>
+          <a:schemeClr val="tx1"/>
+        </a:solidFill>
+        <a:latin typeface="+mn-lt"/>
+        <a:ea typeface="+mn-ea"/>
+        <a:cs typeface="+mn-cs"/>
+      </a:defRPr>
+    </a:lvl5pPr>
+    <a:lvl6pPr marL="2286000" algn="l" defTabSz="914400" rtl="0" eaLnBrk="1" latinLnBrk="0" hangingPunct="1">
+      <a:defRPr sz="1200" kern="1200">
+        <a:solidFill>
+          <a:schemeClr val="tx1"/>
+        </a:solidFill>
+        <a:latin typeface="+mn-lt"/>
+        <a:ea typeface="+mn-ea"/>
+        <a:cs typeface="+mn-cs"/>
+      </a:defRPr>
+    </a:lvl6pPr>
+    <a:lvl7pPr marL="2743200" algn="l" defTabSz="914400" rtl="0" eaLnBrk="1" latinLnBrk="0" hangingPunct="1">
+      <a:defRPr sz="1200" kern="1200">
+        <a:solidFill>
+          <a:schemeClr val="tx1"/>
+        </a:solidFill>
+        <a:latin typeface="+mn-lt"/>
+        <a:ea typeface="+mn-ea"/>
+        <a:cs typeface="+mn-cs"/>
+      </a:defRPr>
+    </a:lvl7pPr>
+    <a:lvl8pPr marL="3200400" algn="l" defTabSz="914400" rtl="0" eaLnBrk="1" latinLnBrk="0" hangingPunct="1">
+      <a:defRPr sz="1200" kern="1200">
+        <a:solidFill>
+          <a:schemeClr val="tx1"/>
+        </a:solidFill>
+        <a:latin typeface="+mn-lt"/>
+        <a:ea typeface="+mn-ea"/>
+        <a:cs typeface="+mn-cs"/>
+      </a:defRPr>
+    </a:lvl8pPr>
+    <a:lvl9pPr marL="3657600" algn="l" defTabSz="914400" rtl="0" eaLnBrk="1" latinLnBrk="0" hangingPunct="1">
+      <a:defRPr sz="1200" kern="1200">
+        <a:solidFill>
+          <a:schemeClr val="tx1"/>
+        </a:solidFill>
+        <a:latin typeface="+mn-lt"/>
+        <a:ea typeface="+mn-ea"/>
+        <a:cs typeface="+mn-cs"/>
+      </a:defRPr>
+    </a:lvl9pPr>
+  </p:notesStyle>
+</p:notesMaster>
+</file>
+
+<file path=ppt/notesSlides/notesSlide1.xml><?xml version="1.0" encoding="utf-8"?>
+<p:notes xmlns:a="http://schemas.openxmlformats.org/drawingml/2006/main" xmlns:r="http://schemas.openxmlformats.org/officeDocument/2006/relationships" xmlns:p="http://schemas.openxmlformats.org/presentationml/2006/main">
+  <p:cSld>
+    <p:spTree>
+      <p:nvGrpSpPr>
+        <p:cNvPr id="1" name=""/>
+        <p:cNvGrpSpPr/>
+        <p:nvPr/>
+      </p:nvGrpSpPr>
+      <p:grpSpPr>
+        <a:xfrm>
+          <a:off x="0" y="0"/>
+          <a:ext cx="0" cy="0"/>
+          <a:chOff x="0" y="0"/>
+          <a:chExt cx="0" cy="0"/>
+        </a:xfrm>
+      </p:grpSpPr>
+      <p:sp>
+        <p:nvSpPr>
+          <p:cNvPr id="2" name="Slide Image Placeholder 1"/>
+          <p:cNvSpPr>
+            <a:spLocks noGrp="1" noRot="1" noChangeAspect="1"/>
+          </p:cNvSpPr>
+          <p:nvPr>
+            <p:ph type="sldImg"/>
+          </p:nvPr>
+        </p:nvSpPr>
+        <p:spPr/>
+      </p:sp>
+      <p:sp>
+        <p:nvSpPr>
+          <p:cNvPr id="3" name="Notes Placeholder 2"/>
+          <p:cNvSpPr>
+            <a:spLocks noGrp="1"/>
+          </p:cNvSpPr>
+          <p:nvPr>
+            <p:ph type="body" idx="1"/>
+          </p:nvPr>
+        </p:nvSpPr>
+        <p:spPr/>
+        <p:txBody>
+          <a:bodyPr/>
+          <a:lstStyle/>
+          <a:p>
+            <a:r>
+              <a:rPr lang="en-US" dirty="0"/>
+              <a:t>Tool and Artifacts</a:t>
+            </a:r>
+          </a:p>
+        </p:txBody>
+      </p:sp>
+      <p:sp>
+        <p:nvSpPr>
+          <p:cNvPr id="4" name="Slide Number Placeholder 3"/>
+          <p:cNvSpPr>
+            <a:spLocks noGrp="1"/>
+          </p:cNvSpPr>
+          <p:nvPr>
+            <p:ph type="sldNum" sz="quarter" idx="5"/>
+          </p:nvPr>
+        </p:nvSpPr>
+        <p:spPr/>
+        <p:txBody>
+          <a:bodyPr/>
+          <a:lstStyle/>
+          <a:p>
+            <a:fld id="{B106BD36-D029-FD48-90BB-5960D8DA54C0}" type="slidenum">
+              <a:rPr lang="en-US" smtClean="0"/>
+              <a:t>1</a:t>
+            </a:fld>
+            <a:endParaRPr lang="en-US"/>
+          </a:p>
+        </p:txBody>
+      </p:sp>
+    </p:spTree>
+    <p:extLst>
+      <p:ext uri="{BB962C8B-B14F-4D97-AF65-F5344CB8AC3E}">
+        <p14:creationId xmlns:p14="http://schemas.microsoft.com/office/powerpoint/2010/main" val="1013957392"/>
+      </p:ext>
+    </p:extLst>
+  </p:cSld>
+  <p:clrMapOvr>
+    <a:masterClrMapping/>
+  </p:clrMapOvr>
+</p:notes>
+</file>
+
+<file path=ppt/notesSlides/notesSlide2.xml><?xml version="1.0" encoding="utf-8"?>
+<p:notes xmlns:a="http://schemas.openxmlformats.org/drawingml/2006/main" xmlns:r="http://schemas.openxmlformats.org/officeDocument/2006/relationships" xmlns:p="http://schemas.openxmlformats.org/presentationml/2006/main">
+  <p:cSld>
+    <p:spTree>
+      <p:nvGrpSpPr>
+        <p:cNvPr id="1" name=""/>
+        <p:cNvGrpSpPr/>
+        <p:nvPr/>
+      </p:nvGrpSpPr>
+      <p:grpSpPr>
+        <a:xfrm>
+          <a:off x="0" y="0"/>
+          <a:ext cx="0" cy="0"/>
+          <a:chOff x="0" y="0"/>
+          <a:chExt cx="0" cy="0"/>
+        </a:xfrm>
+      </p:grpSpPr>
+      <p:sp>
+        <p:nvSpPr>
+          <p:cNvPr id="2" name="Slide Image Placeholder 1"/>
+          <p:cNvSpPr>
+            <a:spLocks noGrp="1" noRot="1" noChangeAspect="1"/>
+          </p:cNvSpPr>
+          <p:nvPr>
+            <p:ph type="sldImg"/>
+          </p:nvPr>
+        </p:nvSpPr>
+        <p:spPr/>
+      </p:sp>
+      <p:sp>
+        <p:nvSpPr>
+          <p:cNvPr id="3" name="Notes Placeholder 2"/>
+          <p:cNvSpPr>
+            <a:spLocks noGrp="1"/>
+          </p:cNvSpPr>
+          <p:nvPr>
+            <p:ph type="body" idx="1"/>
+          </p:nvPr>
+        </p:nvSpPr>
+        <p:spPr/>
+        <p:txBody>
+          <a:bodyPr/>
+          <a:lstStyle/>
+          <a:p>
+            <a:r>
+              <a:rPr lang="en-US" dirty="0"/>
+              <a:t>Tool Network</a:t>
+            </a:r>
+          </a:p>
+        </p:txBody>
+      </p:sp>
+      <p:sp>
+        <p:nvSpPr>
+          <p:cNvPr id="4" name="Slide Number Placeholder 3"/>
+          <p:cNvSpPr>
+            <a:spLocks noGrp="1"/>
+          </p:cNvSpPr>
+          <p:nvPr>
+            <p:ph type="sldNum" sz="quarter" idx="5"/>
+          </p:nvPr>
+        </p:nvSpPr>
+        <p:spPr/>
+        <p:txBody>
+          <a:bodyPr/>
+          <a:lstStyle/>
+          <a:p>
+            <a:fld id="{B106BD36-D029-FD48-90BB-5960D8DA54C0}" type="slidenum">
+              <a:rPr lang="en-US" smtClean="0"/>
+              <a:t>2</a:t>
+            </a:fld>
+            <a:endParaRPr lang="en-US"/>
+          </a:p>
+        </p:txBody>
+      </p:sp>
+    </p:spTree>
+    <p:extLst>
+      <p:ext uri="{BB962C8B-B14F-4D97-AF65-F5344CB8AC3E}">
+        <p14:creationId xmlns:p14="http://schemas.microsoft.com/office/powerpoint/2010/main" val="1459498751"/>
+      </p:ext>
+    </p:extLst>
+  </p:cSld>
+  <p:clrMapOvr>
+    <a:masterClrMapping/>
+  </p:clrMapOvr>
+</p:notes>
+</file>
+
+<file path=ppt/notesSlides/notesSlide3.xml><?xml version="1.0" encoding="utf-8"?>
+<p:notes xmlns:a="http://schemas.openxmlformats.org/drawingml/2006/main" xmlns:r="http://schemas.openxmlformats.org/officeDocument/2006/relationships" xmlns:p="http://schemas.openxmlformats.org/presentationml/2006/main">
+  <p:cSld>
+    <p:spTree>
+      <p:nvGrpSpPr>
+        <p:cNvPr id="1" name="">
+          <a:extLst>
+            <a:ext uri="{FF2B5EF4-FFF2-40B4-BE49-F238E27FC236}">
+              <a16:creationId xmlns:a16="http://schemas.microsoft.com/office/drawing/2014/main" id="{DA3CF9F9-6A99-E6BA-4E8A-1ED03D17988C}"/>
+            </a:ext>
+          </a:extLst>
+        </p:cNvPr>
+        <p:cNvGrpSpPr/>
+        <p:nvPr/>
+      </p:nvGrpSpPr>
+      <p:grpSpPr>
+        <a:xfrm>
+          <a:off x="0" y="0"/>
+          <a:ext cx="0" cy="0"/>
+          <a:chOff x="0" y="0"/>
+          <a:chExt cx="0" cy="0"/>
+        </a:xfrm>
+      </p:grpSpPr>
+      <p:sp>
+        <p:nvSpPr>
+          <p:cNvPr id="2" name="Slide Image Placeholder 1">
+            <a:extLst>
+              <a:ext uri="{FF2B5EF4-FFF2-40B4-BE49-F238E27FC236}">
+                <a16:creationId xmlns:a16="http://schemas.microsoft.com/office/drawing/2014/main" id="{4CE9D2FE-D0EF-A3D0-876A-019E4C89B568}"/>
+              </a:ext>
+            </a:extLst>
+          </p:cNvPr>
+          <p:cNvSpPr>
+            <a:spLocks noGrp="1" noRot="1" noChangeAspect="1"/>
+          </p:cNvSpPr>
+          <p:nvPr>
+            <p:ph type="sldImg"/>
+          </p:nvPr>
+        </p:nvSpPr>
+        <p:spPr/>
+      </p:sp>
+      <p:sp>
+        <p:nvSpPr>
+          <p:cNvPr id="3" name="Notes Placeholder 2">
+            <a:extLst>
+              <a:ext uri="{FF2B5EF4-FFF2-40B4-BE49-F238E27FC236}">
+                <a16:creationId xmlns:a16="http://schemas.microsoft.com/office/drawing/2014/main" id="{7F86AC52-122C-78CC-45D3-262440FB6961}"/>
+              </a:ext>
+            </a:extLst>
+          </p:cNvPr>
+          <p:cNvSpPr>
+            <a:spLocks noGrp="1"/>
+          </p:cNvSpPr>
+          <p:nvPr>
+            <p:ph type="body" idx="1"/>
+          </p:nvPr>
+        </p:nvSpPr>
+        <p:spPr/>
+        <p:txBody>
+          <a:bodyPr/>
+          <a:lstStyle/>
+          <a:p>
+            <a:r>
+              <a:rPr lang="en-US"/>
+              <a:t>Workflow </a:t>
+            </a:r>
+            <a:r>
+              <a:rPr lang="en-US" dirty="0"/>
+              <a:t>0</a:t>
+            </a:r>
+          </a:p>
+        </p:txBody>
+      </p:sp>
+      <p:sp>
+        <p:nvSpPr>
+          <p:cNvPr id="4" name="Slide Number Placeholder 3">
+            <a:extLst>
+              <a:ext uri="{FF2B5EF4-FFF2-40B4-BE49-F238E27FC236}">
+                <a16:creationId xmlns:a16="http://schemas.microsoft.com/office/drawing/2014/main" id="{C5B6B3DA-8A00-382A-4837-C492DC7A2A78}"/>
+              </a:ext>
+            </a:extLst>
+          </p:cNvPr>
+          <p:cNvSpPr>
+            <a:spLocks noGrp="1"/>
+          </p:cNvSpPr>
+          <p:nvPr>
+            <p:ph type="sldNum" sz="quarter" idx="5"/>
+          </p:nvPr>
+        </p:nvSpPr>
+        <p:spPr/>
+        <p:txBody>
+          <a:bodyPr/>
+          <a:lstStyle/>
+          <a:p>
+            <a:fld id="{B106BD36-D029-FD48-90BB-5960D8DA54C0}" type="slidenum">
+              <a:rPr lang="en-US" smtClean="0"/>
+              <a:t>3</a:t>
+            </a:fld>
+            <a:endParaRPr lang="en-US"/>
+          </a:p>
+        </p:txBody>
+      </p:sp>
+    </p:spTree>
+    <p:extLst>
+      <p:ext uri="{BB962C8B-B14F-4D97-AF65-F5344CB8AC3E}">
+        <p14:creationId xmlns:p14="http://schemas.microsoft.com/office/powerpoint/2010/main" val="2830336211"/>
+      </p:ext>
+    </p:extLst>
+  </p:cSld>
+  <p:clrMapOvr>
+    <a:masterClrMapping/>
+  </p:clrMapOvr>
+</p:notes>
+</file>
+
+<file path=ppt/notesSlides/notesSlide4.xml><?xml version="1.0" encoding="utf-8"?>
+<p:notes xmlns:a="http://schemas.openxmlformats.org/drawingml/2006/main" xmlns:r="http://schemas.openxmlformats.org/officeDocument/2006/relationships" xmlns:p="http://schemas.openxmlformats.org/presentationml/2006/main">
+  <p:cSld>
+    <p:spTree>
+      <p:nvGrpSpPr>
+        <p:cNvPr id="1" name=""/>
+        <p:cNvGrpSpPr/>
+        <p:nvPr/>
+      </p:nvGrpSpPr>
+      <p:grpSpPr>
+        <a:xfrm>
+          <a:off x="0" y="0"/>
+          <a:ext cx="0" cy="0"/>
+          <a:chOff x="0" y="0"/>
+          <a:chExt cx="0" cy="0"/>
+        </a:xfrm>
+      </p:grpSpPr>
+      <p:sp>
+        <p:nvSpPr>
+          <p:cNvPr id="2" name="Slide Image Placeholder 1"/>
+          <p:cNvSpPr>
+            <a:spLocks noGrp="1" noRot="1" noChangeAspect="1"/>
+          </p:cNvSpPr>
+          <p:nvPr>
+            <p:ph type="sldImg"/>
+          </p:nvPr>
+        </p:nvSpPr>
+        <p:spPr/>
+      </p:sp>
+      <p:sp>
+        <p:nvSpPr>
+          <p:cNvPr id="3" name="Notes Placeholder 2"/>
+          <p:cNvSpPr>
+            <a:spLocks noGrp="1"/>
+          </p:cNvSpPr>
+          <p:nvPr>
+            <p:ph type="body" idx="1"/>
+          </p:nvPr>
+        </p:nvSpPr>
+        <p:spPr/>
+        <p:txBody>
+          <a:bodyPr/>
+          <a:lstStyle/>
+          <a:p>
+            <a:r>
+              <a:rPr lang="en-US" dirty="0"/>
+              <a:t>Workflow 1</a:t>
+            </a:r>
+          </a:p>
+        </p:txBody>
+      </p:sp>
+      <p:sp>
+        <p:nvSpPr>
+          <p:cNvPr id="4" name="Slide Number Placeholder 3"/>
+          <p:cNvSpPr>
+            <a:spLocks noGrp="1"/>
+          </p:cNvSpPr>
+          <p:nvPr>
+            <p:ph type="sldNum" sz="quarter" idx="5"/>
+          </p:nvPr>
+        </p:nvSpPr>
+        <p:spPr/>
+        <p:txBody>
+          <a:bodyPr/>
+          <a:lstStyle/>
+          <a:p>
+            <a:fld id="{B106BD36-D029-FD48-90BB-5960D8DA54C0}" type="slidenum">
+              <a:rPr lang="en-US" smtClean="0"/>
+              <a:t>4</a:t>
+            </a:fld>
+            <a:endParaRPr lang="en-US"/>
+          </a:p>
+        </p:txBody>
+      </p:sp>
+    </p:spTree>
+    <p:extLst>
+      <p:ext uri="{BB962C8B-B14F-4D97-AF65-F5344CB8AC3E}">
+        <p14:creationId xmlns:p14="http://schemas.microsoft.com/office/powerpoint/2010/main" val="449057162"/>
+      </p:ext>
+    </p:extLst>
+  </p:cSld>
+  <p:clrMapOvr>
+    <a:masterClrMapping/>
+  </p:clrMapOvr>
+</p:notes>
+</file>
+
+<file path=ppt/notesSlides/notesSlide5.xml><?xml version="1.0" encoding="utf-8"?>
+<p:notes xmlns:a="http://schemas.openxmlformats.org/drawingml/2006/main" xmlns:r="http://schemas.openxmlformats.org/officeDocument/2006/relationships" xmlns:p="http://schemas.openxmlformats.org/presentationml/2006/main">
+  <p:cSld>
+    <p:spTree>
+      <p:nvGrpSpPr>
+        <p:cNvPr id="1" name=""/>
+        <p:cNvGrpSpPr/>
+        <p:nvPr/>
+      </p:nvGrpSpPr>
+      <p:grpSpPr>
+        <a:xfrm>
+          <a:off x="0" y="0"/>
+          <a:ext cx="0" cy="0"/>
+          <a:chOff x="0" y="0"/>
+          <a:chExt cx="0" cy="0"/>
+        </a:xfrm>
+      </p:grpSpPr>
+      <p:sp>
+        <p:nvSpPr>
+          <p:cNvPr id="2" name="Slide Image Placeholder 1"/>
+          <p:cNvSpPr>
+            <a:spLocks noGrp="1" noRot="1" noChangeAspect="1"/>
+          </p:cNvSpPr>
+          <p:nvPr>
+            <p:ph type="sldImg"/>
+          </p:nvPr>
+        </p:nvSpPr>
+        <p:spPr/>
+      </p:sp>
+      <p:sp>
+        <p:nvSpPr>
+          <p:cNvPr id="3" name="Notes Placeholder 2"/>
+          <p:cNvSpPr>
+            <a:spLocks noGrp="1"/>
+          </p:cNvSpPr>
+          <p:nvPr>
+            <p:ph type="body" idx="1"/>
+          </p:nvPr>
+        </p:nvSpPr>
+        <p:spPr/>
+        <p:txBody>
+          <a:bodyPr/>
+          <a:lstStyle/>
+          <a:p>
+            <a:pPr marL="0" marR="0" lvl="0" indent="0" algn="l" defTabSz="914400" rtl="0" eaLnBrk="1" fontAlgn="auto" latinLnBrk="0" hangingPunct="1">
+              <a:lnSpc>
+                <a:spcPct val="100000"/>
+              </a:lnSpc>
+              <a:spcBef>
+                <a:spcPts val="0"/>
+              </a:spcBef>
+              <a:spcAft>
+                <a:spcPts val="0"/>
+              </a:spcAft>
+              <a:buClrTx/>
+              <a:buSzTx/>
+              <a:buFontTx/>
+              <a:buNone/>
+              <a:tabLst/>
+              <a:defRPr/>
+            </a:pPr>
+            <a:r>
+              <a:rPr lang="en-US" dirty="0"/>
+              <a:t>Workflow 2</a:t>
+            </a:r>
+          </a:p>
+          <a:p>
+            <a:endParaRPr lang="en-US" dirty="0"/>
+          </a:p>
+        </p:txBody>
+      </p:sp>
+      <p:sp>
+        <p:nvSpPr>
+          <p:cNvPr id="4" name="Slide Number Placeholder 3"/>
+          <p:cNvSpPr>
+            <a:spLocks noGrp="1"/>
+          </p:cNvSpPr>
+          <p:nvPr>
+            <p:ph type="sldNum" sz="quarter" idx="5"/>
+          </p:nvPr>
+        </p:nvSpPr>
+        <p:spPr/>
+        <p:txBody>
+          <a:bodyPr/>
+          <a:lstStyle/>
+          <a:p>
+            <a:fld id="{B106BD36-D029-FD48-90BB-5960D8DA54C0}" type="slidenum">
+              <a:rPr lang="en-US" smtClean="0"/>
+              <a:t>5</a:t>
+            </a:fld>
+            <a:endParaRPr lang="en-US"/>
+          </a:p>
+        </p:txBody>
+      </p:sp>
+    </p:spTree>
+    <p:extLst>
+      <p:ext uri="{BB962C8B-B14F-4D97-AF65-F5344CB8AC3E}">
+        <p14:creationId xmlns:p14="http://schemas.microsoft.com/office/powerpoint/2010/main" val="157974044"/>
+      </p:ext>
+    </p:extLst>
+  </p:cSld>
+  <p:clrMapOvr>
+    <a:masterClrMapping/>
+  </p:clrMapOvr>
+</p:notes>
+</file>
+
+<file path=ppt/notesSlides/notesSlide6.xml><?xml version="1.0" encoding="utf-8"?>
+<p:notes xmlns:a="http://schemas.openxmlformats.org/drawingml/2006/main" xmlns:r="http://schemas.openxmlformats.org/officeDocument/2006/relationships" xmlns:p="http://schemas.openxmlformats.org/presentationml/2006/main">
+  <p:cSld>
+    <p:spTree>
+      <p:nvGrpSpPr>
+        <p:cNvPr id="1" name=""/>
+        <p:cNvGrpSpPr/>
+        <p:nvPr/>
+      </p:nvGrpSpPr>
+      <p:grpSpPr>
+        <a:xfrm>
+          <a:off x="0" y="0"/>
+          <a:ext cx="0" cy="0"/>
+          <a:chOff x="0" y="0"/>
+          <a:chExt cx="0" cy="0"/>
+        </a:xfrm>
+      </p:grpSpPr>
+      <p:sp>
+        <p:nvSpPr>
+          <p:cNvPr id="2" name="Slide Image Placeholder 1"/>
+          <p:cNvSpPr>
+            <a:spLocks noGrp="1" noRot="1" noChangeAspect="1"/>
+          </p:cNvSpPr>
+          <p:nvPr>
+            <p:ph type="sldImg"/>
+          </p:nvPr>
+        </p:nvSpPr>
+        <p:spPr/>
+      </p:sp>
+      <p:sp>
+        <p:nvSpPr>
+          <p:cNvPr id="3" name="Notes Placeholder 2"/>
+          <p:cNvSpPr>
+            <a:spLocks noGrp="1"/>
+          </p:cNvSpPr>
+          <p:nvPr>
+            <p:ph type="body" idx="1"/>
+          </p:nvPr>
+        </p:nvSpPr>
+        <p:spPr/>
+        <p:txBody>
+          <a:bodyPr/>
+          <a:lstStyle/>
+          <a:p>
+            <a:r>
+              <a:rPr lang="en-US" dirty="0"/>
+              <a:t>Bootstrap Artifacts 1</a:t>
+            </a:r>
+          </a:p>
+          <a:p>
+            <a:r>
+              <a:rPr lang="en-US" dirty="0"/>
+              <a:t>Mandatory Bootstrap Artifacts</a:t>
+            </a:r>
+          </a:p>
+        </p:txBody>
+      </p:sp>
+      <p:sp>
+        <p:nvSpPr>
+          <p:cNvPr id="4" name="Slide Number Placeholder 3"/>
+          <p:cNvSpPr>
+            <a:spLocks noGrp="1"/>
+          </p:cNvSpPr>
+          <p:nvPr>
+            <p:ph type="sldNum" sz="quarter" idx="5"/>
+          </p:nvPr>
+        </p:nvSpPr>
+        <p:spPr/>
+        <p:txBody>
+          <a:bodyPr/>
+          <a:lstStyle/>
+          <a:p>
+            <a:fld id="{B106BD36-D029-FD48-90BB-5960D8DA54C0}" type="slidenum">
+              <a:rPr lang="en-US" smtClean="0"/>
+              <a:t>6</a:t>
+            </a:fld>
+            <a:endParaRPr lang="en-US"/>
+          </a:p>
+        </p:txBody>
+      </p:sp>
+    </p:spTree>
+    <p:extLst>
+      <p:ext uri="{BB962C8B-B14F-4D97-AF65-F5344CB8AC3E}">
+        <p14:creationId xmlns:p14="http://schemas.microsoft.com/office/powerpoint/2010/main" val="849797705"/>
+      </p:ext>
+    </p:extLst>
+  </p:cSld>
+  <p:clrMapOvr>
+    <a:masterClrMapping/>
+  </p:clrMapOvr>
+</p:notes>
+</file>
+
+<file path=ppt/notesSlides/notesSlide7.xml><?xml version="1.0" encoding="utf-8"?>
+<p:notes xmlns:a="http://schemas.openxmlformats.org/drawingml/2006/main" xmlns:r="http://schemas.openxmlformats.org/officeDocument/2006/relationships" xmlns:p="http://schemas.openxmlformats.org/presentationml/2006/main">
+  <p:cSld>
+    <p:spTree>
+      <p:nvGrpSpPr>
+        <p:cNvPr id="1" name=""/>
+        <p:cNvGrpSpPr/>
+        <p:nvPr/>
+      </p:nvGrpSpPr>
+      <p:grpSpPr>
+        <a:xfrm>
+          <a:off x="0" y="0"/>
+          <a:ext cx="0" cy="0"/>
+          <a:chOff x="0" y="0"/>
+          <a:chExt cx="0" cy="0"/>
+        </a:xfrm>
+      </p:grpSpPr>
+      <p:sp>
+        <p:nvSpPr>
+          <p:cNvPr id="2" name="Slide Image Placeholder 1"/>
+          <p:cNvSpPr>
+            <a:spLocks noGrp="1" noRot="1" noChangeAspect="1"/>
+          </p:cNvSpPr>
+          <p:nvPr>
+            <p:ph type="sldImg"/>
+          </p:nvPr>
+        </p:nvSpPr>
+        <p:spPr/>
+      </p:sp>
+      <p:sp>
+        <p:nvSpPr>
+          <p:cNvPr id="3" name="Notes Placeholder 2"/>
+          <p:cNvSpPr>
+            <a:spLocks noGrp="1"/>
+          </p:cNvSpPr>
+          <p:nvPr>
+            <p:ph type="body" idx="1"/>
+          </p:nvPr>
+        </p:nvSpPr>
+        <p:spPr/>
+        <p:txBody>
+          <a:bodyPr/>
+          <a:lstStyle/>
+          <a:p>
+            <a:pPr marL="0" marR="0" lvl="0" indent="0" algn="l" defTabSz="914400" rtl="0" eaLnBrk="1" fontAlgn="auto" latinLnBrk="0" hangingPunct="1">
+              <a:lnSpc>
+                <a:spcPct val="100000"/>
+              </a:lnSpc>
+              <a:spcBef>
+                <a:spcPts val="0"/>
+              </a:spcBef>
+              <a:spcAft>
+                <a:spcPts val="0"/>
+              </a:spcAft>
+              <a:buClrTx/>
+              <a:buSzTx/>
+              <a:buFontTx/>
+              <a:buNone/>
+              <a:tabLst/>
+              <a:defRPr/>
+            </a:pPr>
+            <a:r>
+              <a:rPr lang="en-US" dirty="0"/>
+              <a:t>Bootstrap Artifacts 2</a:t>
+            </a:r>
+          </a:p>
+          <a:p>
+            <a:r>
+              <a:rPr lang="en-US" dirty="0"/>
+              <a:t>Mandatory Bootstrap Artifacts</a:t>
+            </a:r>
+          </a:p>
+        </p:txBody>
+      </p:sp>
+      <p:sp>
+        <p:nvSpPr>
+          <p:cNvPr id="4" name="Slide Number Placeholder 3"/>
+          <p:cNvSpPr>
+            <a:spLocks noGrp="1"/>
+          </p:cNvSpPr>
+          <p:nvPr>
+            <p:ph type="sldNum" sz="quarter" idx="5"/>
+          </p:nvPr>
+        </p:nvSpPr>
+        <p:spPr/>
+        <p:txBody>
+          <a:bodyPr/>
+          <a:lstStyle/>
+          <a:p>
+            <a:fld id="{B106BD36-D029-FD48-90BB-5960D8DA54C0}" type="slidenum">
+              <a:rPr lang="en-US" smtClean="0"/>
+              <a:t>7</a:t>
+            </a:fld>
+            <a:endParaRPr lang="en-US"/>
+          </a:p>
+        </p:txBody>
+      </p:sp>
+    </p:spTree>
+    <p:extLst>
+      <p:ext uri="{BB962C8B-B14F-4D97-AF65-F5344CB8AC3E}">
+        <p14:creationId xmlns:p14="http://schemas.microsoft.com/office/powerpoint/2010/main" val="909727614"/>
+      </p:ext>
+    </p:extLst>
+  </p:cSld>
+  <p:clrMapOvr>
+    <a:masterClrMapping/>
+  </p:clrMapOvr>
+</p:notes>
+</file>
+
+<file path=ppt/notesSlides/notesSlide8.xml><?xml version="1.0" encoding="utf-8"?>
+<p:notes xmlns:a="http://schemas.openxmlformats.org/drawingml/2006/main" xmlns:r="http://schemas.openxmlformats.org/officeDocument/2006/relationships" xmlns:p="http://schemas.openxmlformats.org/presentationml/2006/main">
+  <p:cSld>
+    <p:spTree>
+      <p:nvGrpSpPr>
+        <p:cNvPr id="1" name="">
+          <a:extLst>
+            <a:ext uri="{FF2B5EF4-FFF2-40B4-BE49-F238E27FC236}">
+              <a16:creationId xmlns:a16="http://schemas.microsoft.com/office/drawing/2014/main" id="{0007F2A0-0EBA-9446-3C55-EA40872938E3}"/>
+            </a:ext>
+          </a:extLst>
+        </p:cNvPr>
+        <p:cNvGrpSpPr/>
+        <p:nvPr/>
+      </p:nvGrpSpPr>
+      <p:grpSpPr>
+        <a:xfrm>
+          <a:off x="0" y="0"/>
+          <a:ext cx="0" cy="0"/>
+          <a:chOff x="0" y="0"/>
+          <a:chExt cx="0" cy="0"/>
+        </a:xfrm>
+      </p:grpSpPr>
+      <p:sp>
+        <p:nvSpPr>
+          <p:cNvPr id="2" name="Slide Image Placeholder 1">
+            <a:extLst>
+              <a:ext uri="{FF2B5EF4-FFF2-40B4-BE49-F238E27FC236}">
+                <a16:creationId xmlns:a16="http://schemas.microsoft.com/office/drawing/2014/main" id="{7036D9FF-5439-01F5-8E68-E57F2D662409}"/>
+              </a:ext>
+            </a:extLst>
+          </p:cNvPr>
+          <p:cNvSpPr>
+            <a:spLocks noGrp="1" noRot="1" noChangeAspect="1"/>
+          </p:cNvSpPr>
+          <p:nvPr>
+            <p:ph type="sldImg"/>
+          </p:nvPr>
+        </p:nvSpPr>
+        <p:spPr/>
+      </p:sp>
+      <p:sp>
+        <p:nvSpPr>
+          <p:cNvPr id="3" name="Notes Placeholder 2">
+            <a:extLst>
+              <a:ext uri="{FF2B5EF4-FFF2-40B4-BE49-F238E27FC236}">
+                <a16:creationId xmlns:a16="http://schemas.microsoft.com/office/drawing/2014/main" id="{4FBF5E4D-B467-6F80-F7A9-D18E3DA1E37C}"/>
+              </a:ext>
+            </a:extLst>
+          </p:cNvPr>
+          <p:cNvSpPr>
+            <a:spLocks noGrp="1"/>
+          </p:cNvSpPr>
+          <p:nvPr>
+            <p:ph type="body" idx="1"/>
+          </p:nvPr>
+        </p:nvSpPr>
+        <p:spPr/>
+        <p:txBody>
+          <a:bodyPr/>
+          <a:lstStyle/>
+          <a:p>
+            <a:r>
+              <a:rPr lang="en-US" dirty="0"/>
+              <a:t>Workflow 0</a:t>
+            </a:r>
+          </a:p>
+          <a:p>
+            <a:pPr marL="0" marR="0" lvl="0" indent="0" algn="l" defTabSz="914400" rtl="0" eaLnBrk="1" fontAlgn="auto" latinLnBrk="0" hangingPunct="1">
+              <a:lnSpc>
+                <a:spcPct val="100000"/>
+              </a:lnSpc>
+              <a:spcBef>
+                <a:spcPts val="0"/>
+              </a:spcBef>
+              <a:spcAft>
+                <a:spcPts val="0"/>
+              </a:spcAft>
+              <a:buClrTx/>
+              <a:buSzTx/>
+              <a:buFontTx/>
+              <a:buNone/>
+              <a:tabLst/>
+              <a:defRPr/>
+            </a:pPr>
+            <a:r>
+              <a:rPr lang="en-US" dirty="0"/>
+              <a:t>Conditional Bootstrap Artifacts and Mandatory Bootstrap Artifacts</a:t>
+            </a:r>
+          </a:p>
+        </p:txBody>
+      </p:sp>
+      <p:sp>
+        <p:nvSpPr>
+          <p:cNvPr id="4" name="Slide Number Placeholder 3">
+            <a:extLst>
+              <a:ext uri="{FF2B5EF4-FFF2-40B4-BE49-F238E27FC236}">
+                <a16:creationId xmlns:a16="http://schemas.microsoft.com/office/drawing/2014/main" id="{799130DD-A6D6-0A28-0950-B5206A898671}"/>
+              </a:ext>
+            </a:extLst>
+          </p:cNvPr>
+          <p:cNvSpPr>
+            <a:spLocks noGrp="1"/>
+          </p:cNvSpPr>
+          <p:nvPr>
+            <p:ph type="sldNum" sz="quarter" idx="5"/>
+          </p:nvPr>
+        </p:nvSpPr>
+        <p:spPr/>
+        <p:txBody>
+          <a:bodyPr/>
+          <a:lstStyle/>
+          <a:p>
+            <a:fld id="{B106BD36-D029-FD48-90BB-5960D8DA54C0}" type="slidenum">
+              <a:rPr lang="en-US" smtClean="0"/>
+              <a:t>8</a:t>
+            </a:fld>
+            <a:endParaRPr lang="en-US"/>
+          </a:p>
+        </p:txBody>
+      </p:sp>
+    </p:spTree>
+    <p:extLst>
+      <p:ext uri="{BB962C8B-B14F-4D97-AF65-F5344CB8AC3E}">
+        <p14:creationId xmlns:p14="http://schemas.microsoft.com/office/powerpoint/2010/main" val="4005232864"/>
+      </p:ext>
+    </p:extLst>
+  </p:cSld>
+  <p:clrMapOvr>
+    <a:masterClrMapping/>
+  </p:clrMapOvr>
+</p:notes>
+</file>
+
 <file path=ppt/slideLayouts/slideLayout1.xml><?xml version="1.0" encoding="utf-8"?>
 <p:sldLayout xmlns:a="http://schemas.openxmlformats.org/drawingml/2006/main" xmlns:r="http://schemas.openxmlformats.org/officeDocument/2006/relationships" xmlns:p="http://schemas.openxmlformats.org/presentationml/2006/main" type="title" preserve="1">
   <p:cSld name="Title Slide">
@@ -261,7 +1438,7 @@
           <a:p>
             <a:fld id="{8ADA360F-AEB3-ED4F-A06C-859F2B7CCC29}" type="datetimeFigureOut">
               <a:rPr lang="en-US" smtClean="0"/>
-              <a:t>8/4/26</a:t>
+              <a:t>8/5/26</a:t>
             </a:fld>
             <a:endParaRPr lang="en-US"/>
           </a:p>
@@ -459,7 +1636,7 @@
           <a:p>
             <a:fld id="{8ADA360F-AEB3-ED4F-A06C-859F2B7CCC29}" type="datetimeFigureOut">
               <a:rPr lang="en-US" smtClean="0"/>
-              <a:t>8/4/26</a:t>
+              <a:t>8/5/26</a:t>
             </a:fld>
             <a:endParaRPr lang="en-US"/>
           </a:p>
@@ -667,7 +1844,7 @@
           <a:p>
             <a:fld id="{8ADA360F-AEB3-ED4F-A06C-859F2B7CCC29}" type="datetimeFigureOut">
               <a:rPr lang="en-US" smtClean="0"/>
-              <a:t>8/4/26</a:t>
+              <a:t>8/5/26</a:t>
             </a:fld>
             <a:endParaRPr lang="en-US"/>
           </a:p>
@@ -865,7 +2042,7 @@
           <a:p>
             <a:fld id="{8ADA360F-AEB3-ED4F-A06C-859F2B7CCC29}" type="datetimeFigureOut">
               <a:rPr lang="en-US" smtClean="0"/>
-              <a:t>8/4/26</a:t>
+              <a:t>8/5/26</a:t>
             </a:fld>
             <a:endParaRPr lang="en-US"/>
           </a:p>
@@ -1140,7 +2317,7 @@
           <a:p>
             <a:fld id="{8ADA360F-AEB3-ED4F-A06C-859F2B7CCC29}" type="datetimeFigureOut">
               <a:rPr lang="en-US" smtClean="0"/>
-              <a:t>8/4/26</a:t>
+              <a:t>8/5/26</a:t>
             </a:fld>
             <a:endParaRPr lang="en-US"/>
           </a:p>
@@ -1405,7 +2582,7 @@
           <a:p>
             <a:fld id="{8ADA360F-AEB3-ED4F-A06C-859F2B7CCC29}" type="datetimeFigureOut">
               <a:rPr lang="en-US" smtClean="0"/>
-              <a:t>8/4/26</a:t>
+              <a:t>8/5/26</a:t>
             </a:fld>
             <a:endParaRPr lang="en-US"/>
           </a:p>
@@ -1817,7 +2994,7 @@
           <a:p>
             <a:fld id="{8ADA360F-AEB3-ED4F-A06C-859F2B7CCC29}" type="datetimeFigureOut">
               <a:rPr lang="en-US" smtClean="0"/>
-              <a:t>8/4/26</a:t>
+              <a:t>8/5/26</a:t>
             </a:fld>
             <a:endParaRPr lang="en-US"/>
           </a:p>
@@ -1958,7 +3135,7 @@
           <a:p>
             <a:fld id="{8ADA360F-AEB3-ED4F-A06C-859F2B7CCC29}" type="datetimeFigureOut">
               <a:rPr lang="en-US" smtClean="0"/>
-              <a:t>8/4/26</a:t>
+              <a:t>8/5/26</a:t>
             </a:fld>
             <a:endParaRPr lang="en-US"/>
           </a:p>
@@ -2071,7 +3248,7 @@
           <a:p>
             <a:fld id="{8ADA360F-AEB3-ED4F-A06C-859F2B7CCC29}" type="datetimeFigureOut">
               <a:rPr lang="en-US" smtClean="0"/>
-              <a:t>8/4/26</a:t>
+              <a:t>8/5/26</a:t>
             </a:fld>
             <a:endParaRPr lang="en-US"/>
           </a:p>
@@ -2382,7 +3559,7 @@
           <a:p>
             <a:fld id="{8ADA360F-AEB3-ED4F-A06C-859F2B7CCC29}" type="datetimeFigureOut">
               <a:rPr lang="en-US" smtClean="0"/>
-              <a:t>8/4/26</a:t>
+              <a:t>8/5/26</a:t>
             </a:fld>
             <a:endParaRPr lang="en-US"/>
           </a:p>
@@ -2670,7 +3847,7 @@
           <a:p>
             <a:fld id="{8ADA360F-AEB3-ED4F-A06C-859F2B7CCC29}" type="datetimeFigureOut">
               <a:rPr lang="en-US" smtClean="0"/>
-              <a:t>8/4/26</a:t>
+              <a:t>8/5/26</a:t>
             </a:fld>
             <a:endParaRPr lang="en-US"/>
           </a:p>
@@ -2911,7 +4088,7 @@
           <a:p>
             <a:fld id="{8ADA360F-AEB3-ED4F-A06C-859F2B7CCC29}" type="datetimeFigureOut">
               <a:rPr lang="en-US" smtClean="0"/>
-              <a:t>8/4/26</a:t>
+              <a:t>8/5/26</a:t>
             </a:fld>
             <a:endParaRPr lang="en-US"/>
           </a:p>
@@ -4443,6 +5620,776 @@
         <p:cNvPr id="1" name="">
           <a:extLst>
             <a:ext uri="{FF2B5EF4-FFF2-40B4-BE49-F238E27FC236}">
+              <a16:creationId xmlns:a16="http://schemas.microsoft.com/office/drawing/2014/main" id="{7D96ABE1-FB03-7ED7-AC4E-797D2A418493}"/>
+            </a:ext>
+          </a:extLst>
+        </p:cNvPr>
+        <p:cNvGrpSpPr/>
+        <p:nvPr/>
+      </p:nvGrpSpPr>
+      <p:grpSpPr>
+        <a:xfrm>
+          <a:off x="0" y="0"/>
+          <a:ext cx="0" cy="0"/>
+          <a:chOff x="0" y="0"/>
+          <a:chExt cx="0" cy="0"/>
+        </a:xfrm>
+      </p:grpSpPr>
+      <p:sp>
+        <p:nvSpPr>
+          <p:cNvPr id="2" name="Oval 1">
+            <a:extLst>
+              <a:ext uri="{FF2B5EF4-FFF2-40B4-BE49-F238E27FC236}">
+                <a16:creationId xmlns:a16="http://schemas.microsoft.com/office/drawing/2014/main" id="{328C7092-84B8-23FB-8956-5B5E8C7F8B69}"/>
+              </a:ext>
+            </a:extLst>
+          </p:cNvPr>
+          <p:cNvSpPr/>
+          <p:nvPr/>
+        </p:nvSpPr>
+        <p:spPr>
+          <a:xfrm>
+            <a:off x="4034116" y="2456672"/>
+            <a:ext cx="559398" cy="559398"/>
+          </a:xfrm>
+          <a:prstGeom prst="ellipse">
+            <a:avLst/>
+          </a:prstGeom>
+        </p:spPr>
+        <p:style>
+          <a:lnRef idx="2">
+            <a:schemeClr val="accent1">
+              <a:shade val="15000"/>
+            </a:schemeClr>
+          </a:lnRef>
+          <a:fillRef idx="1">
+            <a:schemeClr val="accent1"/>
+          </a:fillRef>
+          <a:effectRef idx="0">
+            <a:schemeClr val="accent1"/>
+          </a:effectRef>
+          <a:fontRef idx="minor">
+            <a:schemeClr val="lt1"/>
+          </a:fontRef>
+        </p:style>
+        <p:txBody>
+          <a:bodyPr rtlCol="0" anchor="ctr"/>
+          <a:lstStyle/>
+          <a:p>
+            <a:pPr algn="ctr"/>
+            <a:r>
+              <a:rPr lang="en-US" dirty="0"/>
+              <a:t>1</a:t>
+            </a:r>
+          </a:p>
+        </p:txBody>
+      </p:sp>
+      <p:sp>
+        <p:nvSpPr>
+          <p:cNvPr id="3" name="Oval 2">
+            <a:extLst>
+              <a:ext uri="{FF2B5EF4-FFF2-40B4-BE49-F238E27FC236}">
+                <a16:creationId xmlns:a16="http://schemas.microsoft.com/office/drawing/2014/main" id="{8CAC8C00-0AA0-B170-FBEC-FA7BEB9F4E31}"/>
+              </a:ext>
+            </a:extLst>
+          </p:cNvPr>
+          <p:cNvSpPr/>
+          <p:nvPr/>
+        </p:nvSpPr>
+        <p:spPr>
+          <a:xfrm>
+            <a:off x="7316994" y="1757425"/>
+            <a:ext cx="559398" cy="559398"/>
+          </a:xfrm>
+          <a:prstGeom prst="ellipse">
+            <a:avLst/>
+          </a:prstGeom>
+        </p:spPr>
+        <p:style>
+          <a:lnRef idx="2">
+            <a:schemeClr val="accent1">
+              <a:shade val="15000"/>
+            </a:schemeClr>
+          </a:lnRef>
+          <a:fillRef idx="1">
+            <a:schemeClr val="accent1"/>
+          </a:fillRef>
+          <a:effectRef idx="0">
+            <a:schemeClr val="accent1"/>
+          </a:effectRef>
+          <a:fontRef idx="minor">
+            <a:schemeClr val="lt1"/>
+          </a:fontRef>
+        </p:style>
+        <p:txBody>
+          <a:bodyPr rtlCol="0" anchor="ctr"/>
+          <a:lstStyle/>
+          <a:p>
+            <a:pPr algn="ctr"/>
+            <a:r>
+              <a:rPr lang="en-US" dirty="0"/>
+              <a:t>2</a:t>
+            </a:r>
+          </a:p>
+        </p:txBody>
+      </p:sp>
+      <p:sp>
+        <p:nvSpPr>
+          <p:cNvPr id="5" name="Rectangle 4">
+            <a:extLst>
+              <a:ext uri="{FF2B5EF4-FFF2-40B4-BE49-F238E27FC236}">
+                <a16:creationId xmlns:a16="http://schemas.microsoft.com/office/drawing/2014/main" id="{C502FD1A-9935-FE63-4430-D4E1BF2E7538}"/>
+              </a:ext>
+            </a:extLst>
+          </p:cNvPr>
+          <p:cNvSpPr/>
+          <p:nvPr/>
+        </p:nvSpPr>
+        <p:spPr>
+          <a:xfrm>
+            <a:off x="2369093" y="2456672"/>
+            <a:ext cx="559398" cy="559398"/>
+          </a:xfrm>
+          <a:prstGeom prst="rect">
+            <a:avLst/>
+          </a:prstGeom>
+        </p:spPr>
+        <p:style>
+          <a:lnRef idx="2">
+            <a:schemeClr val="accent2">
+              <a:shade val="15000"/>
+            </a:schemeClr>
+          </a:lnRef>
+          <a:fillRef idx="1">
+            <a:schemeClr val="accent2"/>
+          </a:fillRef>
+          <a:effectRef idx="0">
+            <a:schemeClr val="accent2"/>
+          </a:effectRef>
+          <a:fontRef idx="minor">
+            <a:schemeClr val="lt1"/>
+          </a:fontRef>
+        </p:style>
+        <p:txBody>
+          <a:bodyPr rtlCol="0" anchor="ctr"/>
+          <a:lstStyle/>
+          <a:p>
+            <a:pPr algn="ctr"/>
+            <a:r>
+              <a:rPr lang="en-US" dirty="0"/>
+              <a:t>1</a:t>
+            </a:r>
+          </a:p>
+        </p:txBody>
+      </p:sp>
+      <p:cxnSp>
+        <p:nvCxnSpPr>
+          <p:cNvPr id="10" name="Straight Arrow Connector 9">
+            <a:extLst>
+              <a:ext uri="{FF2B5EF4-FFF2-40B4-BE49-F238E27FC236}">
+                <a16:creationId xmlns:a16="http://schemas.microsoft.com/office/drawing/2014/main" id="{97610BBB-0A1C-34E4-2D42-0A120EC777A9}"/>
+              </a:ext>
+            </a:extLst>
+          </p:cNvPr>
+          <p:cNvCxnSpPr>
+            <a:stCxn id="5" idx="3"/>
+            <a:endCxn id="2" idx="2"/>
+          </p:cNvCxnSpPr>
+          <p:nvPr/>
+        </p:nvCxnSpPr>
+        <p:spPr>
+          <a:xfrm>
+            <a:off x="2928491" y="2736371"/>
+            <a:ext cx="1105625" cy="0"/>
+          </a:xfrm>
+          <a:prstGeom prst="straightConnector1">
+            <a:avLst/>
+          </a:prstGeom>
+          <a:ln>
+            <a:tailEnd type="triangle"/>
+          </a:ln>
+        </p:spPr>
+        <p:style>
+          <a:lnRef idx="2">
+            <a:schemeClr val="dk1"/>
+          </a:lnRef>
+          <a:fillRef idx="0">
+            <a:schemeClr val="dk1"/>
+          </a:fillRef>
+          <a:effectRef idx="1">
+            <a:schemeClr val="dk1"/>
+          </a:effectRef>
+          <a:fontRef idx="minor">
+            <a:schemeClr val="tx1"/>
+          </a:fontRef>
+        </p:style>
+      </p:cxnSp>
+      <p:cxnSp>
+        <p:nvCxnSpPr>
+          <p:cNvPr id="11" name="Straight Arrow Connector 10">
+            <a:extLst>
+              <a:ext uri="{FF2B5EF4-FFF2-40B4-BE49-F238E27FC236}">
+                <a16:creationId xmlns:a16="http://schemas.microsoft.com/office/drawing/2014/main" id="{7D22B8EB-D067-6D16-3883-CA8DBE42F61B}"/>
+              </a:ext>
+            </a:extLst>
+          </p:cNvPr>
+          <p:cNvCxnSpPr>
+            <a:cxnSpLocks/>
+            <a:stCxn id="2" idx="7"/>
+          </p:cNvCxnSpPr>
+          <p:nvPr/>
+        </p:nvCxnSpPr>
+        <p:spPr>
+          <a:xfrm flipV="1">
+            <a:off x="4511592" y="2037124"/>
+            <a:ext cx="1123002" cy="501470"/>
+          </a:xfrm>
+          <a:prstGeom prst="straightConnector1">
+            <a:avLst/>
+          </a:prstGeom>
+          <a:ln>
+            <a:tailEnd type="triangle"/>
+          </a:ln>
+        </p:spPr>
+        <p:style>
+          <a:lnRef idx="2">
+            <a:schemeClr val="dk1"/>
+          </a:lnRef>
+          <a:fillRef idx="0">
+            <a:schemeClr val="dk1"/>
+          </a:fillRef>
+          <a:effectRef idx="1">
+            <a:schemeClr val="dk1"/>
+          </a:effectRef>
+          <a:fontRef idx="minor">
+            <a:schemeClr val="tx1"/>
+          </a:fontRef>
+        </p:style>
+      </p:cxnSp>
+      <p:sp>
+        <p:nvSpPr>
+          <p:cNvPr id="19" name="Oval 18">
+            <a:extLst>
+              <a:ext uri="{FF2B5EF4-FFF2-40B4-BE49-F238E27FC236}">
+                <a16:creationId xmlns:a16="http://schemas.microsoft.com/office/drawing/2014/main" id="{5CDF0C4C-591C-8E88-E85B-F3153B4FC9E2}"/>
+              </a:ext>
+            </a:extLst>
+          </p:cNvPr>
+          <p:cNvSpPr/>
+          <p:nvPr/>
+        </p:nvSpPr>
+        <p:spPr>
+          <a:xfrm>
+            <a:off x="7316994" y="3980052"/>
+            <a:ext cx="559398" cy="559398"/>
+          </a:xfrm>
+          <a:prstGeom prst="ellipse">
+            <a:avLst/>
+          </a:prstGeom>
+        </p:spPr>
+        <p:style>
+          <a:lnRef idx="2">
+            <a:schemeClr val="accent1">
+              <a:shade val="15000"/>
+            </a:schemeClr>
+          </a:lnRef>
+          <a:fillRef idx="1">
+            <a:schemeClr val="accent1"/>
+          </a:fillRef>
+          <a:effectRef idx="0">
+            <a:schemeClr val="accent1"/>
+          </a:effectRef>
+          <a:fontRef idx="minor">
+            <a:schemeClr val="lt1"/>
+          </a:fontRef>
+        </p:style>
+        <p:txBody>
+          <a:bodyPr rtlCol="0" anchor="ctr"/>
+          <a:lstStyle/>
+          <a:p>
+            <a:pPr algn="ctr"/>
+            <a:r>
+              <a:rPr lang="en-US" dirty="0"/>
+              <a:t>3</a:t>
+            </a:r>
+          </a:p>
+        </p:txBody>
+      </p:sp>
+      <p:sp>
+        <p:nvSpPr>
+          <p:cNvPr id="20" name="Rectangle 19">
+            <a:extLst>
+              <a:ext uri="{FF2B5EF4-FFF2-40B4-BE49-F238E27FC236}">
+                <a16:creationId xmlns:a16="http://schemas.microsoft.com/office/drawing/2014/main" id="{3BDFEC93-3AA9-ED01-3AD4-652283E5CCFB}"/>
+              </a:ext>
+            </a:extLst>
+          </p:cNvPr>
+          <p:cNvSpPr/>
+          <p:nvPr/>
+        </p:nvSpPr>
+        <p:spPr>
+          <a:xfrm>
+            <a:off x="5634594" y="1757425"/>
+            <a:ext cx="559398" cy="559398"/>
+          </a:xfrm>
+          <a:prstGeom prst="rect">
+            <a:avLst/>
+          </a:prstGeom>
+        </p:spPr>
+        <p:style>
+          <a:lnRef idx="2">
+            <a:schemeClr val="accent2">
+              <a:shade val="15000"/>
+            </a:schemeClr>
+          </a:lnRef>
+          <a:fillRef idx="1">
+            <a:schemeClr val="accent2"/>
+          </a:fillRef>
+          <a:effectRef idx="0">
+            <a:schemeClr val="accent2"/>
+          </a:effectRef>
+          <a:fontRef idx="minor">
+            <a:schemeClr val="lt1"/>
+          </a:fontRef>
+        </p:style>
+        <p:txBody>
+          <a:bodyPr rtlCol="0" anchor="ctr"/>
+          <a:lstStyle/>
+          <a:p>
+            <a:pPr algn="ctr"/>
+            <a:r>
+              <a:rPr lang="en-US" dirty="0"/>
+              <a:t>2</a:t>
+            </a:r>
+          </a:p>
+        </p:txBody>
+      </p:sp>
+      <p:sp>
+        <p:nvSpPr>
+          <p:cNvPr id="21" name="Rectangle 20">
+            <a:extLst>
+              <a:ext uri="{FF2B5EF4-FFF2-40B4-BE49-F238E27FC236}">
+                <a16:creationId xmlns:a16="http://schemas.microsoft.com/office/drawing/2014/main" id="{9F82E526-5099-0D3D-9289-106897639660}"/>
+              </a:ext>
+            </a:extLst>
+          </p:cNvPr>
+          <p:cNvSpPr/>
+          <p:nvPr/>
+        </p:nvSpPr>
+        <p:spPr>
+          <a:xfrm>
+            <a:off x="5634594" y="3258118"/>
+            <a:ext cx="559398" cy="559398"/>
+          </a:xfrm>
+          <a:prstGeom prst="rect">
+            <a:avLst/>
+          </a:prstGeom>
+        </p:spPr>
+        <p:style>
+          <a:lnRef idx="2">
+            <a:schemeClr val="accent2">
+              <a:shade val="15000"/>
+            </a:schemeClr>
+          </a:lnRef>
+          <a:fillRef idx="1">
+            <a:schemeClr val="accent2"/>
+          </a:fillRef>
+          <a:effectRef idx="0">
+            <a:schemeClr val="accent2"/>
+          </a:effectRef>
+          <a:fontRef idx="minor">
+            <a:schemeClr val="lt1"/>
+          </a:fontRef>
+        </p:style>
+        <p:txBody>
+          <a:bodyPr rtlCol="0" anchor="ctr"/>
+          <a:lstStyle/>
+          <a:p>
+            <a:pPr algn="ctr"/>
+            <a:r>
+              <a:rPr lang="en-US" dirty="0"/>
+              <a:t>3</a:t>
+            </a:r>
+          </a:p>
+        </p:txBody>
+      </p:sp>
+      <p:cxnSp>
+        <p:nvCxnSpPr>
+          <p:cNvPr id="22" name="Straight Arrow Connector 21">
+            <a:extLst>
+              <a:ext uri="{FF2B5EF4-FFF2-40B4-BE49-F238E27FC236}">
+                <a16:creationId xmlns:a16="http://schemas.microsoft.com/office/drawing/2014/main" id="{277104C0-EBB3-CE9E-848C-5F1F55F91720}"/>
+              </a:ext>
+            </a:extLst>
+          </p:cNvPr>
+          <p:cNvCxnSpPr>
+            <a:cxnSpLocks/>
+            <a:stCxn id="2" idx="5"/>
+            <a:endCxn id="21" idx="1"/>
+          </p:cNvCxnSpPr>
+          <p:nvPr/>
+        </p:nvCxnSpPr>
+        <p:spPr>
+          <a:xfrm>
+            <a:off x="4511592" y="2934148"/>
+            <a:ext cx="1123002" cy="603669"/>
+          </a:xfrm>
+          <a:prstGeom prst="straightConnector1">
+            <a:avLst/>
+          </a:prstGeom>
+          <a:ln>
+            <a:tailEnd type="triangle"/>
+          </a:ln>
+        </p:spPr>
+        <p:style>
+          <a:lnRef idx="2">
+            <a:schemeClr val="dk1"/>
+          </a:lnRef>
+          <a:fillRef idx="0">
+            <a:schemeClr val="dk1"/>
+          </a:fillRef>
+          <a:effectRef idx="1">
+            <a:schemeClr val="dk1"/>
+          </a:effectRef>
+          <a:fontRef idx="minor">
+            <a:schemeClr val="tx1"/>
+          </a:fontRef>
+        </p:style>
+      </p:cxnSp>
+      <p:sp>
+        <p:nvSpPr>
+          <p:cNvPr id="27" name="Rectangle 26">
+            <a:extLst>
+              <a:ext uri="{FF2B5EF4-FFF2-40B4-BE49-F238E27FC236}">
+                <a16:creationId xmlns:a16="http://schemas.microsoft.com/office/drawing/2014/main" id="{29366F6F-75FA-7603-C755-98534208A7CB}"/>
+              </a:ext>
+            </a:extLst>
+          </p:cNvPr>
+          <p:cNvSpPr/>
+          <p:nvPr/>
+        </p:nvSpPr>
+        <p:spPr>
+          <a:xfrm>
+            <a:off x="5634594" y="4758811"/>
+            <a:ext cx="559398" cy="559398"/>
+          </a:xfrm>
+          <a:prstGeom prst="rect">
+            <a:avLst/>
+          </a:prstGeom>
+        </p:spPr>
+        <p:style>
+          <a:lnRef idx="2">
+            <a:schemeClr val="accent2">
+              <a:shade val="15000"/>
+            </a:schemeClr>
+          </a:lnRef>
+          <a:fillRef idx="1">
+            <a:schemeClr val="accent2"/>
+          </a:fillRef>
+          <a:effectRef idx="0">
+            <a:schemeClr val="accent2"/>
+          </a:effectRef>
+          <a:fontRef idx="minor">
+            <a:schemeClr val="lt1"/>
+          </a:fontRef>
+        </p:style>
+        <p:txBody>
+          <a:bodyPr rtlCol="0" anchor="ctr"/>
+          <a:lstStyle/>
+          <a:p>
+            <a:pPr algn="ctr"/>
+            <a:r>
+              <a:rPr lang="en-US" dirty="0"/>
+              <a:t>4</a:t>
+            </a:r>
+          </a:p>
+        </p:txBody>
+      </p:sp>
+      <p:cxnSp>
+        <p:nvCxnSpPr>
+          <p:cNvPr id="28" name="Straight Arrow Connector 27">
+            <a:extLst>
+              <a:ext uri="{FF2B5EF4-FFF2-40B4-BE49-F238E27FC236}">
+                <a16:creationId xmlns:a16="http://schemas.microsoft.com/office/drawing/2014/main" id="{6B1DD543-2CE6-3AEB-25F2-E01B186288DD}"/>
+              </a:ext>
+            </a:extLst>
+          </p:cNvPr>
+          <p:cNvCxnSpPr>
+            <a:cxnSpLocks/>
+            <a:stCxn id="20" idx="3"/>
+            <a:endCxn id="3" idx="2"/>
+          </p:cNvCxnSpPr>
+          <p:nvPr/>
+        </p:nvCxnSpPr>
+        <p:spPr>
+          <a:xfrm>
+            <a:off x="6193992" y="2037124"/>
+            <a:ext cx="1123002" cy="0"/>
+          </a:xfrm>
+          <a:prstGeom prst="straightConnector1">
+            <a:avLst/>
+          </a:prstGeom>
+          <a:ln>
+            <a:tailEnd type="triangle"/>
+          </a:ln>
+        </p:spPr>
+        <p:style>
+          <a:lnRef idx="2">
+            <a:schemeClr val="dk1"/>
+          </a:lnRef>
+          <a:fillRef idx="0">
+            <a:schemeClr val="dk1"/>
+          </a:fillRef>
+          <a:effectRef idx="1">
+            <a:schemeClr val="dk1"/>
+          </a:effectRef>
+          <a:fontRef idx="minor">
+            <a:schemeClr val="tx1"/>
+          </a:fontRef>
+        </p:style>
+      </p:cxnSp>
+      <p:cxnSp>
+        <p:nvCxnSpPr>
+          <p:cNvPr id="33" name="Straight Arrow Connector 32">
+            <a:extLst>
+              <a:ext uri="{FF2B5EF4-FFF2-40B4-BE49-F238E27FC236}">
+                <a16:creationId xmlns:a16="http://schemas.microsoft.com/office/drawing/2014/main" id="{0B56B67E-748F-87B3-78F7-3D88EAE6C173}"/>
+              </a:ext>
+            </a:extLst>
+          </p:cNvPr>
+          <p:cNvCxnSpPr>
+            <a:cxnSpLocks/>
+            <a:stCxn id="27" idx="3"/>
+            <a:endCxn id="19" idx="3"/>
+          </p:cNvCxnSpPr>
+          <p:nvPr/>
+        </p:nvCxnSpPr>
+        <p:spPr>
+          <a:xfrm flipV="1">
+            <a:off x="6193992" y="4457528"/>
+            <a:ext cx="1204924" cy="580982"/>
+          </a:xfrm>
+          <a:prstGeom prst="straightConnector1">
+            <a:avLst/>
+          </a:prstGeom>
+          <a:ln>
+            <a:tailEnd type="triangle"/>
+          </a:ln>
+        </p:spPr>
+        <p:style>
+          <a:lnRef idx="2">
+            <a:schemeClr val="dk1"/>
+          </a:lnRef>
+          <a:fillRef idx="0">
+            <a:schemeClr val="dk1"/>
+          </a:fillRef>
+          <a:effectRef idx="1">
+            <a:schemeClr val="dk1"/>
+          </a:effectRef>
+          <a:fontRef idx="minor">
+            <a:schemeClr val="tx1"/>
+          </a:fontRef>
+        </p:style>
+      </p:cxnSp>
+      <p:cxnSp>
+        <p:nvCxnSpPr>
+          <p:cNvPr id="36" name="Straight Arrow Connector 35">
+            <a:extLst>
+              <a:ext uri="{FF2B5EF4-FFF2-40B4-BE49-F238E27FC236}">
+                <a16:creationId xmlns:a16="http://schemas.microsoft.com/office/drawing/2014/main" id="{1C0E9AAC-36C5-1448-D412-B47345A70D66}"/>
+              </a:ext>
+            </a:extLst>
+          </p:cNvPr>
+          <p:cNvCxnSpPr>
+            <a:cxnSpLocks/>
+            <a:stCxn id="21" idx="3"/>
+            <a:endCxn id="19" idx="1"/>
+          </p:cNvCxnSpPr>
+          <p:nvPr/>
+        </p:nvCxnSpPr>
+        <p:spPr>
+          <a:xfrm>
+            <a:off x="6193992" y="3537817"/>
+            <a:ext cx="1204924" cy="524157"/>
+          </a:xfrm>
+          <a:prstGeom prst="straightConnector1">
+            <a:avLst/>
+          </a:prstGeom>
+          <a:ln>
+            <a:tailEnd type="triangle"/>
+          </a:ln>
+        </p:spPr>
+        <p:style>
+          <a:lnRef idx="2">
+            <a:schemeClr val="dk1"/>
+          </a:lnRef>
+          <a:fillRef idx="0">
+            <a:schemeClr val="dk1"/>
+          </a:fillRef>
+          <a:effectRef idx="1">
+            <a:schemeClr val="dk1"/>
+          </a:effectRef>
+          <a:fontRef idx="minor">
+            <a:schemeClr val="tx1"/>
+          </a:fontRef>
+        </p:style>
+      </p:cxnSp>
+      <p:cxnSp>
+        <p:nvCxnSpPr>
+          <p:cNvPr id="41" name="Straight Arrow Connector 40">
+            <a:extLst>
+              <a:ext uri="{FF2B5EF4-FFF2-40B4-BE49-F238E27FC236}">
+                <a16:creationId xmlns:a16="http://schemas.microsoft.com/office/drawing/2014/main" id="{F0F6F07B-2247-CCAB-31ED-068F4514E58D}"/>
+              </a:ext>
+            </a:extLst>
+          </p:cNvPr>
+          <p:cNvCxnSpPr>
+            <a:cxnSpLocks/>
+            <a:stCxn id="3" idx="5"/>
+            <a:endCxn id="44" idx="1"/>
+          </p:cNvCxnSpPr>
+          <p:nvPr/>
+        </p:nvCxnSpPr>
+        <p:spPr>
+          <a:xfrm>
+            <a:off x="7794470" y="2234901"/>
+            <a:ext cx="1299332" cy="914400"/>
+          </a:xfrm>
+          <a:prstGeom prst="straightConnector1">
+            <a:avLst/>
+          </a:prstGeom>
+          <a:ln>
+            <a:tailEnd type="triangle"/>
+          </a:ln>
+        </p:spPr>
+        <p:style>
+          <a:lnRef idx="2">
+            <a:schemeClr val="dk1"/>
+          </a:lnRef>
+          <a:fillRef idx="0">
+            <a:schemeClr val="dk1"/>
+          </a:fillRef>
+          <a:effectRef idx="1">
+            <a:schemeClr val="dk1"/>
+          </a:effectRef>
+          <a:fontRef idx="minor">
+            <a:schemeClr val="tx1"/>
+          </a:fontRef>
+        </p:style>
+      </p:cxnSp>
+      <p:sp>
+        <p:nvSpPr>
+          <p:cNvPr id="44" name="Rectangle 43">
+            <a:extLst>
+              <a:ext uri="{FF2B5EF4-FFF2-40B4-BE49-F238E27FC236}">
+                <a16:creationId xmlns:a16="http://schemas.microsoft.com/office/drawing/2014/main" id="{F0D042C0-8163-36C2-EDA5-E13F7FA74DE4}"/>
+              </a:ext>
+            </a:extLst>
+          </p:cNvPr>
+          <p:cNvSpPr/>
+          <p:nvPr/>
+        </p:nvSpPr>
+        <p:spPr>
+          <a:xfrm>
+            <a:off x="9093802" y="2869602"/>
+            <a:ext cx="559398" cy="559398"/>
+          </a:xfrm>
+          <a:prstGeom prst="rect">
+            <a:avLst/>
+          </a:prstGeom>
+        </p:spPr>
+        <p:style>
+          <a:lnRef idx="2">
+            <a:schemeClr val="accent2">
+              <a:shade val="15000"/>
+            </a:schemeClr>
+          </a:lnRef>
+          <a:fillRef idx="1">
+            <a:schemeClr val="accent2"/>
+          </a:fillRef>
+          <a:effectRef idx="0">
+            <a:schemeClr val="accent2"/>
+          </a:effectRef>
+          <a:fontRef idx="minor">
+            <a:schemeClr val="lt1"/>
+          </a:fontRef>
+        </p:style>
+        <p:txBody>
+          <a:bodyPr rtlCol="0" anchor="ctr"/>
+          <a:lstStyle/>
+          <a:p>
+            <a:pPr algn="ctr"/>
+            <a:r>
+              <a:rPr lang="en-US" dirty="0"/>
+              <a:t>5</a:t>
+            </a:r>
+          </a:p>
+        </p:txBody>
+      </p:sp>
+      <p:cxnSp>
+        <p:nvCxnSpPr>
+          <p:cNvPr id="45" name="Straight Arrow Connector 44">
+            <a:extLst>
+              <a:ext uri="{FF2B5EF4-FFF2-40B4-BE49-F238E27FC236}">
+                <a16:creationId xmlns:a16="http://schemas.microsoft.com/office/drawing/2014/main" id="{C7C099FD-B126-E1C2-7CBF-08728730EF04}"/>
+              </a:ext>
+            </a:extLst>
+          </p:cNvPr>
+          <p:cNvCxnSpPr>
+            <a:cxnSpLocks/>
+            <a:stCxn id="19" idx="7"/>
+            <a:endCxn id="44" idx="1"/>
+          </p:cNvCxnSpPr>
+          <p:nvPr/>
+        </p:nvCxnSpPr>
+        <p:spPr>
+          <a:xfrm flipV="1">
+            <a:off x="7794470" y="3149301"/>
+            <a:ext cx="1299332" cy="912673"/>
+          </a:xfrm>
+          <a:prstGeom prst="straightConnector1">
+            <a:avLst/>
+          </a:prstGeom>
+          <a:ln>
+            <a:tailEnd type="triangle"/>
+          </a:ln>
+        </p:spPr>
+        <p:style>
+          <a:lnRef idx="2">
+            <a:schemeClr val="dk1"/>
+          </a:lnRef>
+          <a:fillRef idx="0">
+            <a:schemeClr val="dk1"/>
+          </a:fillRef>
+          <a:effectRef idx="1">
+            <a:schemeClr val="dk1"/>
+          </a:effectRef>
+          <a:fontRef idx="minor">
+            <a:schemeClr val="tx1"/>
+          </a:fontRef>
+        </p:style>
+      </p:cxnSp>
+    </p:spTree>
+    <p:extLst>
+      <p:ext uri="{BB962C8B-B14F-4D97-AF65-F5344CB8AC3E}">
+        <p14:creationId xmlns:p14="http://schemas.microsoft.com/office/powerpoint/2010/main" val="1101866130"/>
+      </p:ext>
+    </p:extLst>
+  </p:cSld>
+  <p:clrMapOvr>
+    <a:masterClrMapping/>
+  </p:clrMapOvr>
+</p:sld>
+</file>
+
+<file path=ppt/slides/slide4.xml><?xml version="1.0" encoding="utf-8"?>
+<p:sld xmlns:a="http://schemas.openxmlformats.org/drawingml/2006/main" xmlns:r="http://schemas.openxmlformats.org/officeDocument/2006/relationships" xmlns:p="http://schemas.openxmlformats.org/presentationml/2006/main">
+  <p:cSld>
+    <p:spTree>
+      <p:nvGrpSpPr>
+        <p:cNvPr id="1" name="">
+          <a:extLst>
+            <a:ext uri="{FF2B5EF4-FFF2-40B4-BE49-F238E27FC236}">
               <a16:creationId xmlns:a16="http://schemas.microsoft.com/office/drawing/2014/main" id="{97308736-F835-07F0-3DE4-4B329176F1FC}"/>
             </a:ext>
           </a:extLst>
@@ -4460,55 +6407,6 @@
       </p:grpSpPr>
       <p:sp>
         <p:nvSpPr>
-          <p:cNvPr id="2" name="Oval 1">
-            <a:extLst>
-              <a:ext uri="{FF2B5EF4-FFF2-40B4-BE49-F238E27FC236}">
-                <a16:creationId xmlns:a16="http://schemas.microsoft.com/office/drawing/2014/main" id="{639DBF28-3959-0969-95F3-448EC5552A23}"/>
-              </a:ext>
-            </a:extLst>
-          </p:cNvPr>
-          <p:cNvSpPr/>
-          <p:nvPr/>
-        </p:nvSpPr>
-        <p:spPr>
-          <a:xfrm>
-            <a:off x="4034116" y="2456672"/>
-            <a:ext cx="559398" cy="559398"/>
-          </a:xfrm>
-          <a:prstGeom prst="ellipse">
-            <a:avLst/>
-          </a:prstGeom>
-        </p:spPr>
-        <p:style>
-          <a:lnRef idx="2">
-            <a:schemeClr val="accent1">
-              <a:shade val="15000"/>
-            </a:schemeClr>
-          </a:lnRef>
-          <a:fillRef idx="1">
-            <a:schemeClr val="accent1"/>
-          </a:fillRef>
-          <a:effectRef idx="0">
-            <a:schemeClr val="accent1"/>
-          </a:effectRef>
-          <a:fontRef idx="minor">
-            <a:schemeClr val="lt1"/>
-          </a:fontRef>
-        </p:style>
-        <p:txBody>
-          <a:bodyPr rtlCol="0" anchor="ctr"/>
-          <a:lstStyle/>
-          <a:p>
-            <a:pPr algn="ctr"/>
-            <a:r>
-              <a:rPr lang="en-US" dirty="0"/>
-              <a:t>1</a:t>
-            </a:r>
-          </a:p>
-        </p:txBody>
-      </p:sp>
-      <p:sp>
-        <p:nvSpPr>
           <p:cNvPr id="3" name="Oval 2">
             <a:extLst>
               <a:ext uri="{FF2B5EF4-FFF2-40B4-BE49-F238E27FC236}">
@@ -4801,10 +6699,10 @@
       </p:sp>
       <p:sp>
         <p:nvSpPr>
-          <p:cNvPr id="21" name="Rectangle 20">
-            <a:extLst>
-              <a:ext uri="{FF2B5EF4-FFF2-40B4-BE49-F238E27FC236}">
-                <a16:creationId xmlns:a16="http://schemas.microsoft.com/office/drawing/2014/main" id="{4556C224-718D-C66C-D9E1-5A91CED84DAB}"/>
+          <p:cNvPr id="27" name="Rectangle 26">
+            <a:extLst>
+              <a:ext uri="{FF2B5EF4-FFF2-40B4-BE49-F238E27FC236}">
+                <a16:creationId xmlns:a16="http://schemas.microsoft.com/office/drawing/2014/main" id="{7E1FC43C-0485-A9B4-7961-B0AEAD5D6B23}"/>
               </a:ext>
             </a:extLst>
           </p:cNvPr>
@@ -4813,7 +6711,7 @@
         </p:nvSpPr>
         <p:spPr>
           <a:xfrm>
-            <a:off x="5634594" y="3258118"/>
+            <a:off x="5634594" y="4758811"/>
             <a:ext cx="559398" cy="559398"/>
           </a:xfrm>
           <a:prstGeom prst="rect">
@@ -4855,31 +6753,74 @@
             <a:pPr algn="ctr"/>
             <a:r>
               <a:rPr lang="en-US" dirty="0"/>
-              <a:t>3</a:t>
+              <a:t>4</a:t>
             </a:r>
           </a:p>
         </p:txBody>
       </p:sp>
       <p:cxnSp>
         <p:nvCxnSpPr>
-          <p:cNvPr id="22" name="Straight Arrow Connector 21">
-            <a:extLst>
-              <a:ext uri="{FF2B5EF4-FFF2-40B4-BE49-F238E27FC236}">
-                <a16:creationId xmlns:a16="http://schemas.microsoft.com/office/drawing/2014/main" id="{D75E1E52-EBD3-826F-2ACB-343B17C388D4}"/>
+          <p:cNvPr id="28" name="Straight Arrow Connector 27">
+            <a:extLst>
+              <a:ext uri="{FF2B5EF4-FFF2-40B4-BE49-F238E27FC236}">
+                <a16:creationId xmlns:a16="http://schemas.microsoft.com/office/drawing/2014/main" id="{468044A7-4910-FCC2-C711-1A64681FBCFB}"/>
               </a:ext>
             </a:extLst>
           </p:cNvPr>
           <p:cNvCxnSpPr>
             <a:cxnSpLocks/>
-            <a:stCxn id="2" idx="5"/>
-            <a:endCxn id="21" idx="1"/>
+            <a:stCxn id="20" idx="3"/>
+            <a:endCxn id="3" idx="2"/>
           </p:cNvCxnSpPr>
           <p:nvPr/>
         </p:nvCxnSpPr>
         <p:spPr>
           <a:xfrm>
-            <a:off x="4511592" y="2934148"/>
-            <a:ext cx="1123002" cy="603669"/>
+            <a:off x="6193992" y="2037124"/>
+            <a:ext cx="1123002" cy="0"/>
+          </a:xfrm>
+          <a:prstGeom prst="straightConnector1">
+            <a:avLst/>
+          </a:prstGeom>
+          <a:ln>
+            <a:tailEnd type="triangle"/>
+          </a:ln>
+        </p:spPr>
+        <p:style>
+          <a:lnRef idx="2">
+            <a:schemeClr val="dk1"/>
+          </a:lnRef>
+          <a:fillRef idx="0">
+            <a:schemeClr val="dk1"/>
+          </a:fillRef>
+          <a:effectRef idx="1">
+            <a:schemeClr val="dk1"/>
+          </a:effectRef>
+          <a:fontRef idx="minor">
+            <a:schemeClr val="tx1"/>
+          </a:fontRef>
+        </p:style>
+      </p:cxnSp>
+      <p:cxnSp>
+        <p:nvCxnSpPr>
+          <p:cNvPr id="33" name="Straight Arrow Connector 32">
+            <a:extLst>
+              <a:ext uri="{FF2B5EF4-FFF2-40B4-BE49-F238E27FC236}">
+                <a16:creationId xmlns:a16="http://schemas.microsoft.com/office/drawing/2014/main" id="{D20B5430-C4FC-3998-46C2-C20833A158A0}"/>
+              </a:ext>
+            </a:extLst>
+          </p:cNvPr>
+          <p:cNvCxnSpPr>
+            <a:cxnSpLocks/>
+            <a:stCxn id="27" idx="3"/>
+            <a:endCxn id="19" idx="3"/>
+          </p:cNvCxnSpPr>
+          <p:nvPr/>
+        </p:nvCxnSpPr>
+        <p:spPr>
+          <a:xfrm flipV="1">
+            <a:off x="6193992" y="4457528"/>
+            <a:ext cx="1204924" cy="580982"/>
           </a:xfrm>
           <a:prstGeom prst="straightConnector1">
             <a:avLst/>
@@ -4908,12 +6849,150 @@
           </a:fontRef>
         </p:style>
       </p:cxnSp>
-      <p:sp>
-        <p:nvSpPr>
-          <p:cNvPr id="27" name="Rectangle 26">
-            <a:extLst>
-              <a:ext uri="{FF2B5EF4-FFF2-40B4-BE49-F238E27FC236}">
-                <a16:creationId xmlns:a16="http://schemas.microsoft.com/office/drawing/2014/main" id="{7E1FC43C-0485-A9B4-7961-B0AEAD5D6B23}"/>
+      <p:cxnSp>
+        <p:nvCxnSpPr>
+          <p:cNvPr id="36" name="Straight Arrow Connector 35">
+            <a:extLst>
+              <a:ext uri="{FF2B5EF4-FFF2-40B4-BE49-F238E27FC236}">
+                <a16:creationId xmlns:a16="http://schemas.microsoft.com/office/drawing/2014/main" id="{8406B670-4D06-BCF7-78DB-D966EFEEA1BD}"/>
+              </a:ext>
+            </a:extLst>
+          </p:cNvPr>
+          <p:cNvCxnSpPr>
+            <a:cxnSpLocks/>
+            <a:endCxn id="19" idx="1"/>
+          </p:cNvCxnSpPr>
+          <p:nvPr/>
+        </p:nvCxnSpPr>
+        <p:spPr>
+          <a:xfrm>
+            <a:off x="6193992" y="3537817"/>
+            <a:ext cx="1204924" cy="524157"/>
+          </a:xfrm>
+          <a:prstGeom prst="straightConnector1">
+            <a:avLst/>
+          </a:prstGeom>
+          <a:ln>
+            <a:solidFill>
+              <a:schemeClr val="bg1">
+                <a:lumMod val="65000"/>
+              </a:schemeClr>
+            </a:solidFill>
+            <a:tailEnd type="triangle"/>
+          </a:ln>
+        </p:spPr>
+        <p:style>
+          <a:lnRef idx="2">
+            <a:schemeClr val="dk1"/>
+          </a:lnRef>
+          <a:fillRef idx="0">
+            <a:schemeClr val="dk1"/>
+          </a:fillRef>
+          <a:effectRef idx="1">
+            <a:schemeClr val="dk1"/>
+          </a:effectRef>
+          <a:fontRef idx="minor">
+            <a:schemeClr val="tx1"/>
+          </a:fontRef>
+        </p:style>
+      </p:cxnSp>
+      <p:cxnSp>
+        <p:nvCxnSpPr>
+          <p:cNvPr id="41" name="Straight Arrow Connector 40">
+            <a:extLst>
+              <a:ext uri="{FF2B5EF4-FFF2-40B4-BE49-F238E27FC236}">
+                <a16:creationId xmlns:a16="http://schemas.microsoft.com/office/drawing/2014/main" id="{1A04D4BB-2213-3CF8-6BDD-06BF5FAB1EDE}"/>
+              </a:ext>
+            </a:extLst>
+          </p:cNvPr>
+          <p:cNvCxnSpPr>
+            <a:cxnSpLocks/>
+            <a:stCxn id="3" idx="5"/>
+            <a:endCxn id="44" idx="1"/>
+          </p:cNvCxnSpPr>
+          <p:nvPr/>
+        </p:nvCxnSpPr>
+        <p:spPr>
+          <a:xfrm>
+            <a:off x="7794470" y="2234901"/>
+            <a:ext cx="1299332" cy="914400"/>
+          </a:xfrm>
+          <a:prstGeom prst="straightConnector1">
+            <a:avLst/>
+          </a:prstGeom>
+          <a:ln>
+            <a:tailEnd type="triangle"/>
+          </a:ln>
+        </p:spPr>
+        <p:style>
+          <a:lnRef idx="2">
+            <a:schemeClr val="dk1"/>
+          </a:lnRef>
+          <a:fillRef idx="0">
+            <a:schemeClr val="dk1"/>
+          </a:fillRef>
+          <a:effectRef idx="1">
+            <a:schemeClr val="dk1"/>
+          </a:effectRef>
+          <a:fontRef idx="minor">
+            <a:schemeClr val="tx1"/>
+          </a:fontRef>
+        </p:style>
+      </p:cxnSp>
+      <p:cxnSp>
+        <p:nvCxnSpPr>
+          <p:cNvPr id="45" name="Straight Arrow Connector 44">
+            <a:extLst>
+              <a:ext uri="{FF2B5EF4-FFF2-40B4-BE49-F238E27FC236}">
+                <a16:creationId xmlns:a16="http://schemas.microsoft.com/office/drawing/2014/main" id="{62F5C1D7-D834-7EA0-8C0A-87E72A768A33}"/>
+              </a:ext>
+            </a:extLst>
+          </p:cNvPr>
+          <p:cNvCxnSpPr>
+            <a:cxnSpLocks/>
+            <a:stCxn id="19" idx="7"/>
+            <a:endCxn id="44" idx="1"/>
+          </p:cNvCxnSpPr>
+          <p:nvPr/>
+        </p:nvCxnSpPr>
+        <p:spPr>
+          <a:xfrm flipV="1">
+            <a:off x="7794470" y="3149301"/>
+            <a:ext cx="1299332" cy="912673"/>
+          </a:xfrm>
+          <a:prstGeom prst="straightConnector1">
+            <a:avLst/>
+          </a:prstGeom>
+          <a:ln>
+            <a:solidFill>
+              <a:schemeClr val="bg1">
+                <a:lumMod val="65000"/>
+              </a:schemeClr>
+            </a:solidFill>
+            <a:tailEnd type="triangle"/>
+          </a:ln>
+        </p:spPr>
+        <p:style>
+          <a:lnRef idx="2">
+            <a:schemeClr val="dk1"/>
+          </a:lnRef>
+          <a:fillRef idx="0">
+            <a:schemeClr val="dk1"/>
+          </a:fillRef>
+          <a:effectRef idx="1">
+            <a:schemeClr val="dk1"/>
+          </a:effectRef>
+          <a:fontRef idx="minor">
+            <a:schemeClr val="tx1"/>
+          </a:fontRef>
+        </p:style>
+      </p:cxnSp>
+      <p:sp>
+        <p:nvSpPr>
+          <p:cNvPr id="2" name="Oval 1">
+            <a:extLst>
+              <a:ext uri="{FF2B5EF4-FFF2-40B4-BE49-F238E27FC236}">
+                <a16:creationId xmlns:a16="http://schemas.microsoft.com/office/drawing/2014/main" id="{639DBF28-3959-0969-95F3-448EC5552A23}"/>
               </a:ext>
             </a:extLst>
           </p:cNvPr>
@@ -4922,10 +7001,284 @@
         </p:nvSpPr>
         <p:spPr>
           <a:xfrm>
-            <a:off x="5634594" y="4758811"/>
+            <a:off x="4034116" y="2456672"/>
             <a:ext cx="559398" cy="559398"/>
           </a:xfrm>
+          <a:prstGeom prst="ellipse">
+            <a:avLst/>
+          </a:prstGeom>
+        </p:spPr>
+        <p:style>
+          <a:lnRef idx="2">
+            <a:schemeClr val="accent1">
+              <a:shade val="15000"/>
+            </a:schemeClr>
+          </a:lnRef>
+          <a:fillRef idx="1">
+            <a:schemeClr val="accent1"/>
+          </a:fillRef>
+          <a:effectRef idx="0">
+            <a:schemeClr val="accent1"/>
+          </a:effectRef>
+          <a:fontRef idx="minor">
+            <a:schemeClr val="lt1"/>
+          </a:fontRef>
+        </p:style>
+        <p:txBody>
+          <a:bodyPr rtlCol="0" anchor="ctr"/>
+          <a:lstStyle/>
+          <a:p>
+            <a:pPr algn="ctr"/>
+            <a:r>
+              <a:rPr lang="en-US" dirty="0"/>
+              <a:t>1</a:t>
+            </a:r>
+          </a:p>
+        </p:txBody>
+      </p:sp>
+      <p:sp>
+        <p:nvSpPr>
+          <p:cNvPr id="44" name="Rectangle 43">
+            <a:extLst>
+              <a:ext uri="{FF2B5EF4-FFF2-40B4-BE49-F238E27FC236}">
+                <a16:creationId xmlns:a16="http://schemas.microsoft.com/office/drawing/2014/main" id="{958CA984-5288-4CE3-93E0-5512C45EB3A7}"/>
+              </a:ext>
+            </a:extLst>
+          </p:cNvPr>
+          <p:cNvSpPr/>
+          <p:nvPr/>
+        </p:nvSpPr>
+        <p:spPr>
+          <a:xfrm>
+            <a:off x="9093802" y="2869602"/>
+            <a:ext cx="559398" cy="559398"/>
+          </a:xfrm>
           <a:prstGeom prst="rect">
+            <a:avLst/>
+          </a:prstGeom>
+        </p:spPr>
+        <p:style>
+          <a:lnRef idx="2">
+            <a:schemeClr val="accent2">
+              <a:shade val="15000"/>
+            </a:schemeClr>
+          </a:lnRef>
+          <a:fillRef idx="1">
+            <a:schemeClr val="accent2"/>
+          </a:fillRef>
+          <a:effectRef idx="0">
+            <a:schemeClr val="accent2"/>
+          </a:effectRef>
+          <a:fontRef idx="minor">
+            <a:schemeClr val="lt1"/>
+          </a:fontRef>
+        </p:style>
+        <p:txBody>
+          <a:bodyPr rtlCol="0" anchor="ctr"/>
+          <a:lstStyle/>
+          <a:p>
+            <a:pPr algn="ctr"/>
+            <a:r>
+              <a:rPr lang="en-US" dirty="0"/>
+              <a:t>5</a:t>
+            </a:r>
+          </a:p>
+        </p:txBody>
+      </p:sp>
+      <p:sp>
+        <p:nvSpPr>
+          <p:cNvPr id="4" name="Rectangle 3">
+            <a:extLst>
+              <a:ext uri="{FF2B5EF4-FFF2-40B4-BE49-F238E27FC236}">
+                <a16:creationId xmlns:a16="http://schemas.microsoft.com/office/drawing/2014/main" id="{C89320D0-90CE-A5B8-D827-67F133D07EA9}"/>
+              </a:ext>
+            </a:extLst>
+          </p:cNvPr>
+          <p:cNvSpPr/>
+          <p:nvPr/>
+        </p:nvSpPr>
+        <p:spPr>
+          <a:xfrm>
+            <a:off x="5634594" y="3258118"/>
+            <a:ext cx="559398" cy="559398"/>
+          </a:xfrm>
+          <a:prstGeom prst="rect">
+            <a:avLst/>
+          </a:prstGeom>
+        </p:spPr>
+        <p:style>
+          <a:lnRef idx="2">
+            <a:schemeClr val="accent2">
+              <a:shade val="15000"/>
+            </a:schemeClr>
+          </a:lnRef>
+          <a:fillRef idx="1">
+            <a:schemeClr val="accent2"/>
+          </a:fillRef>
+          <a:effectRef idx="0">
+            <a:schemeClr val="accent2"/>
+          </a:effectRef>
+          <a:fontRef idx="minor">
+            <a:schemeClr val="lt1"/>
+          </a:fontRef>
+        </p:style>
+        <p:txBody>
+          <a:bodyPr rtlCol="0" anchor="ctr"/>
+          <a:lstStyle/>
+          <a:p>
+            <a:pPr algn="ctr"/>
+            <a:r>
+              <a:rPr lang="en-US" dirty="0"/>
+              <a:t>3</a:t>
+            </a:r>
+          </a:p>
+        </p:txBody>
+      </p:sp>
+      <p:cxnSp>
+        <p:nvCxnSpPr>
+          <p:cNvPr id="6" name="Straight Arrow Connector 5">
+            <a:extLst>
+              <a:ext uri="{FF2B5EF4-FFF2-40B4-BE49-F238E27FC236}">
+                <a16:creationId xmlns:a16="http://schemas.microsoft.com/office/drawing/2014/main" id="{3CEFFF18-49B8-BE4D-098E-EDE64EC8B397}"/>
+              </a:ext>
+            </a:extLst>
+          </p:cNvPr>
+          <p:cNvCxnSpPr>
+            <a:cxnSpLocks/>
+            <a:endCxn id="4" idx="1"/>
+          </p:cNvCxnSpPr>
+          <p:nvPr/>
+        </p:nvCxnSpPr>
+        <p:spPr>
+          <a:xfrm>
+            <a:off x="4511592" y="2934148"/>
+            <a:ext cx="1123002" cy="603669"/>
+          </a:xfrm>
+          <a:prstGeom prst="straightConnector1">
+            <a:avLst/>
+          </a:prstGeom>
+          <a:ln>
+            <a:tailEnd type="triangle"/>
+          </a:ln>
+        </p:spPr>
+        <p:style>
+          <a:lnRef idx="2">
+            <a:schemeClr val="dk1"/>
+          </a:lnRef>
+          <a:fillRef idx="0">
+            <a:schemeClr val="dk1"/>
+          </a:fillRef>
+          <a:effectRef idx="1">
+            <a:schemeClr val="dk1"/>
+          </a:effectRef>
+          <a:fontRef idx="minor">
+            <a:schemeClr val="tx1"/>
+          </a:fontRef>
+        </p:style>
+      </p:cxnSp>
+    </p:spTree>
+    <p:extLst>
+      <p:ext uri="{BB962C8B-B14F-4D97-AF65-F5344CB8AC3E}">
+        <p14:creationId xmlns:p14="http://schemas.microsoft.com/office/powerpoint/2010/main" val="3967485050"/>
+      </p:ext>
+    </p:extLst>
+  </p:cSld>
+  <p:clrMapOvr>
+    <a:masterClrMapping/>
+  </p:clrMapOvr>
+</p:sld>
+</file>
+
+<file path=ppt/slides/slide5.xml><?xml version="1.0" encoding="utf-8"?>
+<p:sld xmlns:a="http://schemas.openxmlformats.org/drawingml/2006/main" xmlns:r="http://schemas.openxmlformats.org/officeDocument/2006/relationships" xmlns:p="http://schemas.openxmlformats.org/presentationml/2006/main">
+  <p:cSld>
+    <p:spTree>
+      <p:nvGrpSpPr>
+        <p:cNvPr id="1" name="">
+          <a:extLst>
+            <a:ext uri="{FF2B5EF4-FFF2-40B4-BE49-F238E27FC236}">
+              <a16:creationId xmlns:a16="http://schemas.microsoft.com/office/drawing/2014/main" id="{1C612312-FDC6-24AF-FECA-F9A85BF1CD6A}"/>
+            </a:ext>
+          </a:extLst>
+        </p:cNvPr>
+        <p:cNvGrpSpPr/>
+        <p:nvPr/>
+      </p:nvGrpSpPr>
+      <p:grpSpPr>
+        <a:xfrm>
+          <a:off x="0" y="0"/>
+          <a:ext cx="0" cy="0"/>
+          <a:chOff x="0" y="0"/>
+          <a:chExt cx="0" cy="0"/>
+        </a:xfrm>
+      </p:grpSpPr>
+      <p:sp>
+        <p:nvSpPr>
+          <p:cNvPr id="2" name="Oval 1">
+            <a:extLst>
+              <a:ext uri="{FF2B5EF4-FFF2-40B4-BE49-F238E27FC236}">
+                <a16:creationId xmlns:a16="http://schemas.microsoft.com/office/drawing/2014/main" id="{02652748-9987-6C93-8370-39FC52DE39C8}"/>
+              </a:ext>
+            </a:extLst>
+          </p:cNvPr>
+          <p:cNvSpPr/>
+          <p:nvPr/>
+        </p:nvSpPr>
+        <p:spPr>
+          <a:xfrm>
+            <a:off x="4034116" y="2456672"/>
+            <a:ext cx="559398" cy="559398"/>
+          </a:xfrm>
+          <a:prstGeom prst="ellipse">
+            <a:avLst/>
+          </a:prstGeom>
+        </p:spPr>
+        <p:style>
+          <a:lnRef idx="2">
+            <a:schemeClr val="accent1">
+              <a:shade val="15000"/>
+            </a:schemeClr>
+          </a:lnRef>
+          <a:fillRef idx="1">
+            <a:schemeClr val="accent1"/>
+          </a:fillRef>
+          <a:effectRef idx="0">
+            <a:schemeClr val="accent1"/>
+          </a:effectRef>
+          <a:fontRef idx="minor">
+            <a:schemeClr val="lt1"/>
+          </a:fontRef>
+        </p:style>
+        <p:txBody>
+          <a:bodyPr rtlCol="0" anchor="ctr"/>
+          <a:lstStyle/>
+          <a:p>
+            <a:pPr algn="ctr"/>
+            <a:r>
+              <a:rPr lang="en-US" dirty="0"/>
+              <a:t>1</a:t>
+            </a:r>
+          </a:p>
+        </p:txBody>
+      </p:sp>
+      <p:sp>
+        <p:nvSpPr>
+          <p:cNvPr id="3" name="Oval 2">
+            <a:extLst>
+              <a:ext uri="{FF2B5EF4-FFF2-40B4-BE49-F238E27FC236}">
+                <a16:creationId xmlns:a16="http://schemas.microsoft.com/office/drawing/2014/main" id="{1553CB0F-5521-AFB6-20DE-BC2E27506710}"/>
+              </a:ext>
+            </a:extLst>
+          </p:cNvPr>
+          <p:cNvSpPr/>
+          <p:nvPr/>
+        </p:nvSpPr>
+        <p:spPr>
+          <a:xfrm>
+            <a:off x="7316994" y="1757425"/>
+            <a:ext cx="559398" cy="559398"/>
+          </a:xfrm>
+          <a:prstGeom prst="ellipse">
             <a:avLst/>
           </a:prstGeom>
           <a:solidFill>
@@ -4943,6 +7296,55 @@
         </p:spPr>
         <p:style>
           <a:lnRef idx="2">
+            <a:schemeClr val="accent1">
+              <a:shade val="15000"/>
+            </a:schemeClr>
+          </a:lnRef>
+          <a:fillRef idx="1">
+            <a:schemeClr val="accent1"/>
+          </a:fillRef>
+          <a:effectRef idx="0">
+            <a:schemeClr val="accent1"/>
+          </a:effectRef>
+          <a:fontRef idx="minor">
+            <a:schemeClr val="lt1"/>
+          </a:fontRef>
+        </p:style>
+        <p:txBody>
+          <a:bodyPr rtlCol="0" anchor="ctr"/>
+          <a:lstStyle/>
+          <a:p>
+            <a:pPr algn="ctr"/>
+            <a:r>
+              <a:rPr lang="en-US" dirty="0"/>
+              <a:t>2</a:t>
+            </a:r>
+          </a:p>
+        </p:txBody>
+      </p:sp>
+      <p:sp>
+        <p:nvSpPr>
+          <p:cNvPr id="5" name="Rectangle 4">
+            <a:extLst>
+              <a:ext uri="{FF2B5EF4-FFF2-40B4-BE49-F238E27FC236}">
+                <a16:creationId xmlns:a16="http://schemas.microsoft.com/office/drawing/2014/main" id="{0D545A9E-A53C-6FE2-FC5D-CEA5E443BA9C}"/>
+              </a:ext>
+            </a:extLst>
+          </p:cNvPr>
+          <p:cNvSpPr/>
+          <p:nvPr/>
+        </p:nvSpPr>
+        <p:spPr>
+          <a:xfrm>
+            <a:off x="2369093" y="2456672"/>
+            <a:ext cx="559398" cy="559398"/>
+          </a:xfrm>
+          <a:prstGeom prst="rect">
+            <a:avLst/>
+          </a:prstGeom>
+        </p:spPr>
+        <p:style>
+          <a:lnRef idx="2">
             <a:schemeClr val="accent2">
               <a:shade val="15000"/>
             </a:schemeClr>
@@ -4964,6 +7366,238 @@
             <a:pPr algn="ctr"/>
             <a:r>
               <a:rPr lang="en-US" dirty="0"/>
+              <a:t>1</a:t>
+            </a:r>
+          </a:p>
+        </p:txBody>
+      </p:sp>
+      <p:cxnSp>
+        <p:nvCxnSpPr>
+          <p:cNvPr id="10" name="Straight Arrow Connector 9">
+            <a:extLst>
+              <a:ext uri="{FF2B5EF4-FFF2-40B4-BE49-F238E27FC236}">
+                <a16:creationId xmlns:a16="http://schemas.microsoft.com/office/drawing/2014/main" id="{A744CDF0-D61B-8798-A63B-6371DCF69F12}"/>
+              </a:ext>
+            </a:extLst>
+          </p:cNvPr>
+          <p:cNvCxnSpPr>
+            <a:stCxn id="5" idx="3"/>
+            <a:endCxn id="2" idx="2"/>
+          </p:cNvCxnSpPr>
+          <p:nvPr/>
+        </p:nvCxnSpPr>
+        <p:spPr>
+          <a:xfrm>
+            <a:off x="2928491" y="2736371"/>
+            <a:ext cx="1105625" cy="0"/>
+          </a:xfrm>
+          <a:prstGeom prst="straightConnector1">
+            <a:avLst/>
+          </a:prstGeom>
+          <a:ln>
+            <a:tailEnd type="triangle"/>
+          </a:ln>
+        </p:spPr>
+        <p:style>
+          <a:lnRef idx="2">
+            <a:schemeClr val="dk1"/>
+          </a:lnRef>
+          <a:fillRef idx="0">
+            <a:schemeClr val="dk1"/>
+          </a:fillRef>
+          <a:effectRef idx="1">
+            <a:schemeClr val="dk1"/>
+          </a:effectRef>
+          <a:fontRef idx="minor">
+            <a:schemeClr val="tx1"/>
+          </a:fontRef>
+        </p:style>
+      </p:cxnSp>
+      <p:sp>
+        <p:nvSpPr>
+          <p:cNvPr id="19" name="Oval 18">
+            <a:extLst>
+              <a:ext uri="{FF2B5EF4-FFF2-40B4-BE49-F238E27FC236}">
+                <a16:creationId xmlns:a16="http://schemas.microsoft.com/office/drawing/2014/main" id="{C3F4B150-385D-77BC-2FE0-88897C7E9CD0}"/>
+              </a:ext>
+            </a:extLst>
+          </p:cNvPr>
+          <p:cNvSpPr/>
+          <p:nvPr/>
+        </p:nvSpPr>
+        <p:spPr>
+          <a:xfrm>
+            <a:off x="7316994" y="3980052"/>
+            <a:ext cx="559398" cy="559398"/>
+          </a:xfrm>
+          <a:prstGeom prst="ellipse">
+            <a:avLst/>
+          </a:prstGeom>
+        </p:spPr>
+        <p:style>
+          <a:lnRef idx="2">
+            <a:schemeClr val="accent1">
+              <a:shade val="15000"/>
+            </a:schemeClr>
+          </a:lnRef>
+          <a:fillRef idx="1">
+            <a:schemeClr val="accent1"/>
+          </a:fillRef>
+          <a:effectRef idx="0">
+            <a:schemeClr val="accent1"/>
+          </a:effectRef>
+          <a:fontRef idx="minor">
+            <a:schemeClr val="lt1"/>
+          </a:fontRef>
+        </p:style>
+        <p:txBody>
+          <a:bodyPr rtlCol="0" anchor="ctr"/>
+          <a:lstStyle/>
+          <a:p>
+            <a:pPr algn="ctr"/>
+            <a:r>
+              <a:rPr lang="en-US" dirty="0"/>
+              <a:t>3</a:t>
+            </a:r>
+          </a:p>
+        </p:txBody>
+      </p:sp>
+      <p:sp>
+        <p:nvSpPr>
+          <p:cNvPr id="21" name="Rectangle 20">
+            <a:extLst>
+              <a:ext uri="{FF2B5EF4-FFF2-40B4-BE49-F238E27FC236}">
+                <a16:creationId xmlns:a16="http://schemas.microsoft.com/office/drawing/2014/main" id="{F0B7A160-3879-A4D6-A0D0-9B8154E288DE}"/>
+              </a:ext>
+            </a:extLst>
+          </p:cNvPr>
+          <p:cNvSpPr/>
+          <p:nvPr/>
+        </p:nvSpPr>
+        <p:spPr>
+          <a:xfrm>
+            <a:off x="5634594" y="3258118"/>
+            <a:ext cx="559398" cy="559398"/>
+          </a:xfrm>
+          <a:prstGeom prst="rect">
+            <a:avLst/>
+          </a:prstGeom>
+        </p:spPr>
+        <p:style>
+          <a:lnRef idx="2">
+            <a:schemeClr val="accent2">
+              <a:shade val="15000"/>
+            </a:schemeClr>
+          </a:lnRef>
+          <a:fillRef idx="1">
+            <a:schemeClr val="accent2"/>
+          </a:fillRef>
+          <a:effectRef idx="0">
+            <a:schemeClr val="accent2"/>
+          </a:effectRef>
+          <a:fontRef idx="minor">
+            <a:schemeClr val="lt1"/>
+          </a:fontRef>
+        </p:style>
+        <p:txBody>
+          <a:bodyPr rtlCol="0" anchor="ctr"/>
+          <a:lstStyle/>
+          <a:p>
+            <a:pPr algn="ctr"/>
+            <a:r>
+              <a:rPr lang="en-US" dirty="0"/>
+              <a:t>3</a:t>
+            </a:r>
+          </a:p>
+        </p:txBody>
+      </p:sp>
+      <p:cxnSp>
+        <p:nvCxnSpPr>
+          <p:cNvPr id="22" name="Straight Arrow Connector 21">
+            <a:extLst>
+              <a:ext uri="{FF2B5EF4-FFF2-40B4-BE49-F238E27FC236}">
+                <a16:creationId xmlns:a16="http://schemas.microsoft.com/office/drawing/2014/main" id="{4404FD3C-C638-84FF-5E94-0B197798644D}"/>
+              </a:ext>
+            </a:extLst>
+          </p:cNvPr>
+          <p:cNvCxnSpPr>
+            <a:cxnSpLocks/>
+            <a:stCxn id="2" idx="5"/>
+            <a:endCxn id="21" idx="1"/>
+          </p:cNvCxnSpPr>
+          <p:nvPr/>
+        </p:nvCxnSpPr>
+        <p:spPr>
+          <a:xfrm>
+            <a:off x="4511592" y="2934148"/>
+            <a:ext cx="1123002" cy="603669"/>
+          </a:xfrm>
+          <a:prstGeom prst="straightConnector1">
+            <a:avLst/>
+          </a:prstGeom>
+          <a:ln>
+            <a:tailEnd type="triangle"/>
+          </a:ln>
+        </p:spPr>
+        <p:style>
+          <a:lnRef idx="2">
+            <a:schemeClr val="dk1"/>
+          </a:lnRef>
+          <a:fillRef idx="0">
+            <a:schemeClr val="dk1"/>
+          </a:fillRef>
+          <a:effectRef idx="1">
+            <a:schemeClr val="dk1"/>
+          </a:effectRef>
+          <a:fontRef idx="minor">
+            <a:schemeClr val="tx1"/>
+          </a:fontRef>
+        </p:style>
+      </p:cxnSp>
+      <p:sp>
+        <p:nvSpPr>
+          <p:cNvPr id="27" name="Rectangle 26">
+            <a:extLst>
+              <a:ext uri="{FF2B5EF4-FFF2-40B4-BE49-F238E27FC236}">
+                <a16:creationId xmlns:a16="http://schemas.microsoft.com/office/drawing/2014/main" id="{1DF0182E-B2BC-33A5-BB9E-5E0EC46E03B2}"/>
+              </a:ext>
+            </a:extLst>
+          </p:cNvPr>
+          <p:cNvSpPr/>
+          <p:nvPr/>
+        </p:nvSpPr>
+        <p:spPr>
+          <a:xfrm>
+            <a:off x="5634594" y="4758811"/>
+            <a:ext cx="559398" cy="559398"/>
+          </a:xfrm>
+          <a:prstGeom prst="rect">
+            <a:avLst/>
+          </a:prstGeom>
+        </p:spPr>
+        <p:style>
+          <a:lnRef idx="2">
+            <a:schemeClr val="accent2">
+              <a:shade val="15000"/>
+            </a:schemeClr>
+          </a:lnRef>
+          <a:fillRef idx="1">
+            <a:schemeClr val="accent2"/>
+          </a:fillRef>
+          <a:effectRef idx="0">
+            <a:schemeClr val="accent2"/>
+          </a:effectRef>
+          <a:fontRef idx="minor">
+            <a:schemeClr val="lt1"/>
+          </a:fontRef>
+        </p:style>
+        <p:txBody>
+          <a:bodyPr rtlCol="0" anchor="ctr"/>
+          <a:lstStyle/>
+          <a:p>
+            <a:pPr algn="ctr"/>
+            <a:r>
+              <a:rPr lang="en-US" dirty="0"/>
               <a:t>4</a:t>
             </a:r>
           </a:p>
@@ -4974,13 +7608,12 @@
           <p:cNvPr id="28" name="Straight Arrow Connector 27">
             <a:extLst>
               <a:ext uri="{FF2B5EF4-FFF2-40B4-BE49-F238E27FC236}">
-                <a16:creationId xmlns:a16="http://schemas.microsoft.com/office/drawing/2014/main" id="{468044A7-4910-FCC2-C711-1A64681FBCFB}"/>
+                <a16:creationId xmlns:a16="http://schemas.microsoft.com/office/drawing/2014/main" id="{2C9D9486-13AC-AD52-5824-593EAEC06C9B}"/>
               </a:ext>
             </a:extLst>
           </p:cNvPr>
           <p:cNvCxnSpPr>
             <a:cxnSpLocks/>
-            <a:stCxn id="20" idx="3"/>
             <a:endCxn id="3" idx="2"/>
           </p:cNvCxnSpPr>
           <p:nvPr/>
@@ -4989,49 +7622,6 @@
           <a:xfrm>
             <a:off x="6193992" y="2037124"/>
             <a:ext cx="1123002" cy="0"/>
-          </a:xfrm>
-          <a:prstGeom prst="straightConnector1">
-            <a:avLst/>
-          </a:prstGeom>
-          <a:ln>
-            <a:tailEnd type="triangle"/>
-          </a:ln>
-        </p:spPr>
-        <p:style>
-          <a:lnRef idx="2">
-            <a:schemeClr val="dk1"/>
-          </a:lnRef>
-          <a:fillRef idx="0">
-            <a:schemeClr val="dk1"/>
-          </a:fillRef>
-          <a:effectRef idx="1">
-            <a:schemeClr val="dk1"/>
-          </a:effectRef>
-          <a:fontRef idx="minor">
-            <a:schemeClr val="tx1"/>
-          </a:fontRef>
-        </p:style>
-      </p:cxnSp>
-      <p:cxnSp>
-        <p:nvCxnSpPr>
-          <p:cNvPr id="33" name="Straight Arrow Connector 32">
-            <a:extLst>
-              <a:ext uri="{FF2B5EF4-FFF2-40B4-BE49-F238E27FC236}">
-                <a16:creationId xmlns:a16="http://schemas.microsoft.com/office/drawing/2014/main" id="{D20B5430-C4FC-3998-46C2-C20833A158A0}"/>
-              </a:ext>
-            </a:extLst>
-          </p:cNvPr>
-          <p:cNvCxnSpPr>
-            <a:cxnSpLocks/>
-            <a:stCxn id="27" idx="3"/>
-            <a:endCxn id="19" idx="3"/>
-          </p:cNvCxnSpPr>
-          <p:nvPr/>
-        </p:nvCxnSpPr>
-        <p:spPr>
-          <a:xfrm flipV="1">
-            <a:off x="6193992" y="4457528"/>
-            <a:ext cx="1204924" cy="580982"/>
           </a:xfrm>
           <a:prstGeom prst="straightConnector1">
             <a:avLst/>
@@ -5062,10 +7652,53 @@
       </p:cxnSp>
       <p:cxnSp>
         <p:nvCxnSpPr>
+          <p:cNvPr id="33" name="Straight Arrow Connector 32">
+            <a:extLst>
+              <a:ext uri="{FF2B5EF4-FFF2-40B4-BE49-F238E27FC236}">
+                <a16:creationId xmlns:a16="http://schemas.microsoft.com/office/drawing/2014/main" id="{9BADBD88-71DC-633C-275E-C05EC58A6EA5}"/>
+              </a:ext>
+            </a:extLst>
+          </p:cNvPr>
+          <p:cNvCxnSpPr>
+            <a:cxnSpLocks/>
+            <a:stCxn id="27" idx="3"/>
+            <a:endCxn id="19" idx="3"/>
+          </p:cNvCxnSpPr>
+          <p:nvPr/>
+        </p:nvCxnSpPr>
+        <p:spPr>
+          <a:xfrm flipV="1">
+            <a:off x="6193992" y="4457528"/>
+            <a:ext cx="1204924" cy="580982"/>
+          </a:xfrm>
+          <a:prstGeom prst="straightConnector1">
+            <a:avLst/>
+          </a:prstGeom>
+          <a:ln>
+            <a:tailEnd type="triangle"/>
+          </a:ln>
+        </p:spPr>
+        <p:style>
+          <a:lnRef idx="2">
+            <a:schemeClr val="dk1"/>
+          </a:lnRef>
+          <a:fillRef idx="0">
+            <a:schemeClr val="dk1"/>
+          </a:fillRef>
+          <a:effectRef idx="1">
+            <a:schemeClr val="dk1"/>
+          </a:effectRef>
+          <a:fontRef idx="minor">
+            <a:schemeClr val="tx1"/>
+          </a:fontRef>
+        </p:style>
+      </p:cxnSp>
+      <p:cxnSp>
+        <p:nvCxnSpPr>
           <p:cNvPr id="36" name="Straight Arrow Connector 35">
             <a:extLst>
               <a:ext uri="{FF2B5EF4-FFF2-40B4-BE49-F238E27FC236}">
-                <a16:creationId xmlns:a16="http://schemas.microsoft.com/office/drawing/2014/main" id="{8406B670-4D06-BCF7-78DB-D966EFEEA1BD}"/>
+                <a16:creationId xmlns:a16="http://schemas.microsoft.com/office/drawing/2014/main" id="{4199D43A-0E3D-B32A-50DD-552FD94E6064}"/>
               </a:ext>
             </a:extLst>
           </p:cNvPr>
@@ -5080,6 +7713,49 @@
           <a:xfrm>
             <a:off x="6193992" y="3537817"/>
             <a:ext cx="1204924" cy="524157"/>
+          </a:xfrm>
+          <a:prstGeom prst="straightConnector1">
+            <a:avLst/>
+          </a:prstGeom>
+          <a:ln>
+            <a:tailEnd type="triangle"/>
+          </a:ln>
+        </p:spPr>
+        <p:style>
+          <a:lnRef idx="2">
+            <a:schemeClr val="dk1"/>
+          </a:lnRef>
+          <a:fillRef idx="0">
+            <a:schemeClr val="dk1"/>
+          </a:fillRef>
+          <a:effectRef idx="1">
+            <a:schemeClr val="dk1"/>
+          </a:effectRef>
+          <a:fontRef idx="minor">
+            <a:schemeClr val="tx1"/>
+          </a:fontRef>
+        </p:style>
+      </p:cxnSp>
+      <p:cxnSp>
+        <p:nvCxnSpPr>
+          <p:cNvPr id="41" name="Straight Arrow Connector 40">
+            <a:extLst>
+              <a:ext uri="{FF2B5EF4-FFF2-40B4-BE49-F238E27FC236}">
+                <a16:creationId xmlns:a16="http://schemas.microsoft.com/office/drawing/2014/main" id="{276A02AB-0B71-0CAD-53B2-4673D2A0023A}"/>
+              </a:ext>
+            </a:extLst>
+          </p:cNvPr>
+          <p:cNvCxnSpPr>
+            <a:cxnSpLocks/>
+            <a:stCxn id="3" idx="5"/>
+            <a:endCxn id="44" idx="1"/>
+          </p:cNvCxnSpPr>
+          <p:nvPr/>
+        </p:nvCxnSpPr>
+        <p:spPr>
+          <a:xfrm>
+            <a:off x="7794470" y="2234901"/>
+            <a:ext cx="1299332" cy="914400"/>
           </a:xfrm>
           <a:prstGeom prst="straightConnector1">
             <a:avLst/>
@@ -5108,55 +7784,12 @@
           </a:fontRef>
         </p:style>
       </p:cxnSp>
-      <p:cxnSp>
-        <p:nvCxnSpPr>
-          <p:cNvPr id="41" name="Straight Arrow Connector 40">
-            <a:extLst>
-              <a:ext uri="{FF2B5EF4-FFF2-40B4-BE49-F238E27FC236}">
-                <a16:creationId xmlns:a16="http://schemas.microsoft.com/office/drawing/2014/main" id="{1A04D4BB-2213-3CF8-6BDD-06BF5FAB1EDE}"/>
-              </a:ext>
-            </a:extLst>
-          </p:cNvPr>
-          <p:cNvCxnSpPr>
-            <a:cxnSpLocks/>
-            <a:stCxn id="3" idx="5"/>
-            <a:endCxn id="44" idx="1"/>
-          </p:cNvCxnSpPr>
-          <p:nvPr/>
-        </p:nvCxnSpPr>
-        <p:spPr>
-          <a:xfrm>
-            <a:off x="7794470" y="2234901"/>
-            <a:ext cx="1299332" cy="914400"/>
-          </a:xfrm>
-          <a:prstGeom prst="straightConnector1">
-            <a:avLst/>
-          </a:prstGeom>
-          <a:ln>
-            <a:tailEnd type="triangle"/>
-          </a:ln>
-        </p:spPr>
-        <p:style>
-          <a:lnRef idx="2">
-            <a:schemeClr val="dk1"/>
-          </a:lnRef>
-          <a:fillRef idx="0">
-            <a:schemeClr val="dk1"/>
-          </a:fillRef>
-          <a:effectRef idx="1">
-            <a:schemeClr val="dk1"/>
-          </a:effectRef>
-          <a:fontRef idx="minor">
-            <a:schemeClr val="tx1"/>
-          </a:fontRef>
-        </p:style>
-      </p:cxnSp>
       <p:sp>
         <p:nvSpPr>
           <p:cNvPr id="44" name="Rectangle 43">
             <a:extLst>
               <a:ext uri="{FF2B5EF4-FFF2-40B4-BE49-F238E27FC236}">
-                <a16:creationId xmlns:a16="http://schemas.microsoft.com/office/drawing/2014/main" id="{958CA984-5288-4CE3-93E0-5512C45EB3A7}"/>
+                <a16:creationId xmlns:a16="http://schemas.microsoft.com/office/drawing/2014/main" id="{83DC150C-D99D-C59F-CFB5-595BC6C6CE40}"/>
               </a:ext>
             </a:extLst>
           </p:cNvPr>
@@ -5205,7 +7838,7 @@
           <p:cNvPr id="45" name="Straight Arrow Connector 44">
             <a:extLst>
               <a:ext uri="{FF2B5EF4-FFF2-40B4-BE49-F238E27FC236}">
-                <a16:creationId xmlns:a16="http://schemas.microsoft.com/office/drawing/2014/main" id="{62F5C1D7-D834-7EA0-8C0A-87E72A768A33}"/>
+                <a16:creationId xmlns:a16="http://schemas.microsoft.com/office/drawing/2014/main" id="{947FF02F-2513-D022-1F87-7B74D4C24D0E}"/>
               </a:ext>
             </a:extLst>
           </p:cNvPr>
@@ -5220,6 +7853,571 @@
           <a:xfrm flipV="1">
             <a:off x="7794470" y="3149301"/>
             <a:ext cx="1299332" cy="912673"/>
+          </a:xfrm>
+          <a:prstGeom prst="straightConnector1">
+            <a:avLst/>
+          </a:prstGeom>
+          <a:ln>
+            <a:tailEnd type="triangle"/>
+          </a:ln>
+        </p:spPr>
+        <p:style>
+          <a:lnRef idx="2">
+            <a:schemeClr val="dk1"/>
+          </a:lnRef>
+          <a:fillRef idx="0">
+            <a:schemeClr val="dk1"/>
+          </a:fillRef>
+          <a:effectRef idx="1">
+            <a:schemeClr val="dk1"/>
+          </a:effectRef>
+          <a:fontRef idx="minor">
+            <a:schemeClr val="tx1"/>
+          </a:fontRef>
+        </p:style>
+      </p:cxnSp>
+      <p:cxnSp>
+        <p:nvCxnSpPr>
+          <p:cNvPr id="4" name="Straight Arrow Connector 3">
+            <a:extLst>
+              <a:ext uri="{FF2B5EF4-FFF2-40B4-BE49-F238E27FC236}">
+                <a16:creationId xmlns:a16="http://schemas.microsoft.com/office/drawing/2014/main" id="{069D99DC-0863-7558-5C9A-55E714CA033E}"/>
+              </a:ext>
+            </a:extLst>
+          </p:cNvPr>
+          <p:cNvCxnSpPr>
+            <a:cxnSpLocks/>
+          </p:cNvCxnSpPr>
+          <p:nvPr/>
+        </p:nvCxnSpPr>
+        <p:spPr>
+          <a:xfrm flipV="1">
+            <a:off x="4511592" y="2037124"/>
+            <a:ext cx="1123002" cy="501470"/>
+          </a:xfrm>
+          <a:prstGeom prst="straightConnector1">
+            <a:avLst/>
+          </a:prstGeom>
+          <a:ln>
+            <a:tailEnd type="triangle"/>
+          </a:ln>
+        </p:spPr>
+        <p:style>
+          <a:lnRef idx="2">
+            <a:schemeClr val="dk1"/>
+          </a:lnRef>
+          <a:fillRef idx="0">
+            <a:schemeClr val="dk1"/>
+          </a:fillRef>
+          <a:effectRef idx="1">
+            <a:schemeClr val="dk1"/>
+          </a:effectRef>
+          <a:fontRef idx="minor">
+            <a:schemeClr val="tx1"/>
+          </a:fontRef>
+        </p:style>
+      </p:cxnSp>
+      <p:sp>
+        <p:nvSpPr>
+          <p:cNvPr id="6" name="Rectangle 5">
+            <a:extLst>
+              <a:ext uri="{FF2B5EF4-FFF2-40B4-BE49-F238E27FC236}">
+                <a16:creationId xmlns:a16="http://schemas.microsoft.com/office/drawing/2014/main" id="{3B03D0A0-A702-820C-0116-B2A6E4B1D957}"/>
+              </a:ext>
+            </a:extLst>
+          </p:cNvPr>
+          <p:cNvSpPr/>
+          <p:nvPr/>
+        </p:nvSpPr>
+        <p:spPr>
+          <a:xfrm>
+            <a:off x="5634594" y="1757425"/>
+            <a:ext cx="559398" cy="559398"/>
+          </a:xfrm>
+          <a:prstGeom prst="rect">
+            <a:avLst/>
+          </a:prstGeom>
+        </p:spPr>
+        <p:style>
+          <a:lnRef idx="2">
+            <a:schemeClr val="accent2">
+              <a:shade val="15000"/>
+            </a:schemeClr>
+          </a:lnRef>
+          <a:fillRef idx="1">
+            <a:schemeClr val="accent2"/>
+          </a:fillRef>
+          <a:effectRef idx="0">
+            <a:schemeClr val="accent2"/>
+          </a:effectRef>
+          <a:fontRef idx="minor">
+            <a:schemeClr val="lt1"/>
+          </a:fontRef>
+        </p:style>
+        <p:txBody>
+          <a:bodyPr rtlCol="0" anchor="ctr"/>
+          <a:lstStyle/>
+          <a:p>
+            <a:pPr algn="ctr"/>
+            <a:r>
+              <a:rPr lang="en-US" dirty="0"/>
+              <a:t>2</a:t>
+            </a:r>
+          </a:p>
+        </p:txBody>
+      </p:sp>
+    </p:spTree>
+    <p:extLst>
+      <p:ext uri="{BB962C8B-B14F-4D97-AF65-F5344CB8AC3E}">
+        <p14:creationId xmlns:p14="http://schemas.microsoft.com/office/powerpoint/2010/main" val="1216451940"/>
+      </p:ext>
+    </p:extLst>
+  </p:cSld>
+  <p:clrMapOvr>
+    <a:masterClrMapping/>
+  </p:clrMapOvr>
+</p:sld>
+</file>
+
+<file path=ppt/slides/slide6.xml><?xml version="1.0" encoding="utf-8"?>
+<p:sld xmlns:a="http://schemas.openxmlformats.org/drawingml/2006/main" xmlns:r="http://schemas.openxmlformats.org/officeDocument/2006/relationships" xmlns:p="http://schemas.openxmlformats.org/presentationml/2006/main">
+  <p:cSld>
+    <p:spTree>
+      <p:nvGrpSpPr>
+        <p:cNvPr id="1" name="">
+          <a:extLst>
+            <a:ext uri="{FF2B5EF4-FFF2-40B4-BE49-F238E27FC236}">
+              <a16:creationId xmlns:a16="http://schemas.microsoft.com/office/drawing/2014/main" id="{0012DC5D-6BDF-AE4F-9AA5-6E77AAC53E0A}"/>
+            </a:ext>
+          </a:extLst>
+        </p:cNvPr>
+        <p:cNvGrpSpPr/>
+        <p:nvPr/>
+      </p:nvGrpSpPr>
+      <p:grpSpPr>
+        <a:xfrm>
+          <a:off x="0" y="0"/>
+          <a:ext cx="0" cy="0"/>
+          <a:chOff x="0" y="0"/>
+          <a:chExt cx="0" cy="0"/>
+        </a:xfrm>
+      </p:grpSpPr>
+      <p:sp>
+        <p:nvSpPr>
+          <p:cNvPr id="3" name="Oval 2">
+            <a:extLst>
+              <a:ext uri="{FF2B5EF4-FFF2-40B4-BE49-F238E27FC236}">
+                <a16:creationId xmlns:a16="http://schemas.microsoft.com/office/drawing/2014/main" id="{05694EA1-5783-E8B5-BCF1-78B8AD7AAD2F}"/>
+              </a:ext>
+            </a:extLst>
+          </p:cNvPr>
+          <p:cNvSpPr/>
+          <p:nvPr/>
+        </p:nvSpPr>
+        <p:spPr>
+          <a:xfrm>
+            <a:off x="7316994" y="1757425"/>
+            <a:ext cx="559398" cy="559398"/>
+          </a:xfrm>
+          <a:prstGeom prst="ellipse">
+            <a:avLst/>
+          </a:prstGeom>
+        </p:spPr>
+        <p:style>
+          <a:lnRef idx="2">
+            <a:schemeClr val="accent1">
+              <a:shade val="15000"/>
+            </a:schemeClr>
+          </a:lnRef>
+          <a:fillRef idx="1">
+            <a:schemeClr val="accent1"/>
+          </a:fillRef>
+          <a:effectRef idx="0">
+            <a:schemeClr val="accent1"/>
+          </a:effectRef>
+          <a:fontRef idx="minor">
+            <a:schemeClr val="lt1"/>
+          </a:fontRef>
+        </p:style>
+        <p:txBody>
+          <a:bodyPr rtlCol="0" anchor="ctr"/>
+          <a:lstStyle/>
+          <a:p>
+            <a:pPr algn="ctr"/>
+            <a:r>
+              <a:rPr lang="en-US" dirty="0"/>
+              <a:t>2</a:t>
+            </a:r>
+          </a:p>
+        </p:txBody>
+      </p:sp>
+      <p:sp>
+        <p:nvSpPr>
+          <p:cNvPr id="5" name="Rectangle 4">
+            <a:extLst>
+              <a:ext uri="{FF2B5EF4-FFF2-40B4-BE49-F238E27FC236}">
+                <a16:creationId xmlns:a16="http://schemas.microsoft.com/office/drawing/2014/main" id="{8F2D5341-6346-CB29-D968-0A53B8B414BD}"/>
+              </a:ext>
+            </a:extLst>
+          </p:cNvPr>
+          <p:cNvSpPr/>
+          <p:nvPr/>
+        </p:nvSpPr>
+        <p:spPr>
+          <a:xfrm>
+            <a:off x="2369093" y="2456672"/>
+            <a:ext cx="559398" cy="559398"/>
+          </a:xfrm>
+          <a:prstGeom prst="rect">
+            <a:avLst/>
+          </a:prstGeom>
+        </p:spPr>
+        <p:style>
+          <a:lnRef idx="2">
+            <a:schemeClr val="accent2">
+              <a:shade val="15000"/>
+            </a:schemeClr>
+          </a:lnRef>
+          <a:fillRef idx="1">
+            <a:schemeClr val="accent2"/>
+          </a:fillRef>
+          <a:effectRef idx="0">
+            <a:schemeClr val="accent2"/>
+          </a:effectRef>
+          <a:fontRef idx="minor">
+            <a:schemeClr val="lt1"/>
+          </a:fontRef>
+        </p:style>
+        <p:txBody>
+          <a:bodyPr rtlCol="0" anchor="ctr"/>
+          <a:lstStyle/>
+          <a:p>
+            <a:pPr algn="ctr"/>
+            <a:r>
+              <a:rPr lang="en-US" dirty="0"/>
+              <a:t>1</a:t>
+            </a:r>
+          </a:p>
+        </p:txBody>
+      </p:sp>
+      <p:cxnSp>
+        <p:nvCxnSpPr>
+          <p:cNvPr id="10" name="Straight Arrow Connector 9">
+            <a:extLst>
+              <a:ext uri="{FF2B5EF4-FFF2-40B4-BE49-F238E27FC236}">
+                <a16:creationId xmlns:a16="http://schemas.microsoft.com/office/drawing/2014/main" id="{165E6EFE-53F6-1446-A189-565F59425EB6}"/>
+              </a:ext>
+            </a:extLst>
+          </p:cNvPr>
+          <p:cNvCxnSpPr>
+            <a:stCxn id="5" idx="3"/>
+            <a:endCxn id="2" idx="2"/>
+          </p:cNvCxnSpPr>
+          <p:nvPr/>
+        </p:nvCxnSpPr>
+        <p:spPr>
+          <a:xfrm>
+            <a:off x="2928491" y="2736371"/>
+            <a:ext cx="1105625" cy="0"/>
+          </a:xfrm>
+          <a:prstGeom prst="straightConnector1">
+            <a:avLst/>
+          </a:prstGeom>
+          <a:ln>
+            <a:tailEnd type="triangle"/>
+          </a:ln>
+        </p:spPr>
+        <p:style>
+          <a:lnRef idx="2">
+            <a:schemeClr val="dk1"/>
+          </a:lnRef>
+          <a:fillRef idx="0">
+            <a:schemeClr val="dk1"/>
+          </a:fillRef>
+          <a:effectRef idx="1">
+            <a:schemeClr val="dk1"/>
+          </a:effectRef>
+          <a:fontRef idx="minor">
+            <a:schemeClr val="tx1"/>
+          </a:fontRef>
+        </p:style>
+      </p:cxnSp>
+      <p:cxnSp>
+        <p:nvCxnSpPr>
+          <p:cNvPr id="11" name="Straight Arrow Connector 10">
+            <a:extLst>
+              <a:ext uri="{FF2B5EF4-FFF2-40B4-BE49-F238E27FC236}">
+                <a16:creationId xmlns:a16="http://schemas.microsoft.com/office/drawing/2014/main" id="{43147CC0-0BCD-5FB0-0851-97F32B5CD813}"/>
+              </a:ext>
+            </a:extLst>
+          </p:cNvPr>
+          <p:cNvCxnSpPr>
+            <a:cxnSpLocks/>
+            <a:stCxn id="2" idx="7"/>
+          </p:cNvCxnSpPr>
+          <p:nvPr/>
+        </p:nvCxnSpPr>
+        <p:spPr>
+          <a:xfrm flipV="1">
+            <a:off x="4511592" y="2037124"/>
+            <a:ext cx="1123002" cy="501470"/>
+          </a:xfrm>
+          <a:prstGeom prst="straightConnector1">
+            <a:avLst/>
+          </a:prstGeom>
+          <a:ln>
+            <a:tailEnd type="triangle"/>
+          </a:ln>
+        </p:spPr>
+        <p:style>
+          <a:lnRef idx="2">
+            <a:schemeClr val="dk1"/>
+          </a:lnRef>
+          <a:fillRef idx="0">
+            <a:schemeClr val="dk1"/>
+          </a:fillRef>
+          <a:effectRef idx="1">
+            <a:schemeClr val="dk1"/>
+          </a:effectRef>
+          <a:fontRef idx="minor">
+            <a:schemeClr val="tx1"/>
+          </a:fontRef>
+        </p:style>
+      </p:cxnSp>
+      <p:sp>
+        <p:nvSpPr>
+          <p:cNvPr id="19" name="Oval 18">
+            <a:extLst>
+              <a:ext uri="{FF2B5EF4-FFF2-40B4-BE49-F238E27FC236}">
+                <a16:creationId xmlns:a16="http://schemas.microsoft.com/office/drawing/2014/main" id="{D6CC843C-6270-88B4-1CE8-A059C11003F9}"/>
+              </a:ext>
+            </a:extLst>
+          </p:cNvPr>
+          <p:cNvSpPr/>
+          <p:nvPr/>
+        </p:nvSpPr>
+        <p:spPr>
+          <a:xfrm>
+            <a:off x="7316994" y="3980052"/>
+            <a:ext cx="559398" cy="559398"/>
+          </a:xfrm>
+          <a:prstGeom prst="ellipse">
+            <a:avLst/>
+          </a:prstGeom>
+          <a:solidFill>
+            <a:schemeClr val="bg1">
+              <a:lumMod val="75000"/>
+            </a:schemeClr>
+          </a:solidFill>
+          <a:ln>
+            <a:solidFill>
+              <a:schemeClr val="bg1">
+                <a:lumMod val="65000"/>
+              </a:schemeClr>
+            </a:solidFill>
+          </a:ln>
+        </p:spPr>
+        <p:style>
+          <a:lnRef idx="2">
+            <a:schemeClr val="accent1">
+              <a:shade val="15000"/>
+            </a:schemeClr>
+          </a:lnRef>
+          <a:fillRef idx="1">
+            <a:schemeClr val="accent1"/>
+          </a:fillRef>
+          <a:effectRef idx="0">
+            <a:schemeClr val="accent1"/>
+          </a:effectRef>
+          <a:fontRef idx="minor">
+            <a:schemeClr val="lt1"/>
+          </a:fontRef>
+        </p:style>
+        <p:txBody>
+          <a:bodyPr rtlCol="0" anchor="ctr"/>
+          <a:lstStyle/>
+          <a:p>
+            <a:pPr algn="ctr"/>
+            <a:r>
+              <a:rPr lang="en-US" dirty="0"/>
+              <a:t>3</a:t>
+            </a:r>
+          </a:p>
+        </p:txBody>
+      </p:sp>
+      <p:sp>
+        <p:nvSpPr>
+          <p:cNvPr id="20" name="Rectangle 19">
+            <a:extLst>
+              <a:ext uri="{FF2B5EF4-FFF2-40B4-BE49-F238E27FC236}">
+                <a16:creationId xmlns:a16="http://schemas.microsoft.com/office/drawing/2014/main" id="{BF24470F-C89F-AAB8-5921-003C405BC90E}"/>
+              </a:ext>
+            </a:extLst>
+          </p:cNvPr>
+          <p:cNvSpPr/>
+          <p:nvPr/>
+        </p:nvSpPr>
+        <p:spPr>
+          <a:xfrm>
+            <a:off x="5634594" y="1757425"/>
+            <a:ext cx="559398" cy="559398"/>
+          </a:xfrm>
+          <a:prstGeom prst="rect">
+            <a:avLst/>
+          </a:prstGeom>
+        </p:spPr>
+        <p:style>
+          <a:lnRef idx="2">
+            <a:schemeClr val="accent2">
+              <a:shade val="15000"/>
+            </a:schemeClr>
+          </a:lnRef>
+          <a:fillRef idx="1">
+            <a:schemeClr val="accent2"/>
+          </a:fillRef>
+          <a:effectRef idx="0">
+            <a:schemeClr val="accent2"/>
+          </a:effectRef>
+          <a:fontRef idx="minor">
+            <a:schemeClr val="lt1"/>
+          </a:fontRef>
+        </p:style>
+        <p:txBody>
+          <a:bodyPr rtlCol="0" anchor="ctr"/>
+          <a:lstStyle/>
+          <a:p>
+            <a:pPr algn="ctr"/>
+            <a:r>
+              <a:rPr lang="en-US" dirty="0"/>
+              <a:t>2</a:t>
+            </a:r>
+          </a:p>
+        </p:txBody>
+      </p:sp>
+      <p:sp>
+        <p:nvSpPr>
+          <p:cNvPr id="27" name="Rectangle 26">
+            <a:extLst>
+              <a:ext uri="{FF2B5EF4-FFF2-40B4-BE49-F238E27FC236}">
+                <a16:creationId xmlns:a16="http://schemas.microsoft.com/office/drawing/2014/main" id="{DB39EAA1-EA46-0123-1125-29CD057292BC}"/>
+              </a:ext>
+            </a:extLst>
+          </p:cNvPr>
+          <p:cNvSpPr/>
+          <p:nvPr/>
+        </p:nvSpPr>
+        <p:spPr>
+          <a:xfrm>
+            <a:off x="5634594" y="4758811"/>
+            <a:ext cx="559398" cy="559398"/>
+          </a:xfrm>
+          <a:prstGeom prst="rect">
+            <a:avLst/>
+          </a:prstGeom>
+          <a:solidFill>
+            <a:schemeClr val="bg1">
+              <a:lumMod val="75000"/>
+            </a:schemeClr>
+          </a:solidFill>
+          <a:ln>
+            <a:solidFill>
+              <a:schemeClr val="bg1">
+                <a:lumMod val="65000"/>
+              </a:schemeClr>
+            </a:solidFill>
+          </a:ln>
+        </p:spPr>
+        <p:style>
+          <a:lnRef idx="2">
+            <a:schemeClr val="accent2">
+              <a:shade val="15000"/>
+            </a:schemeClr>
+          </a:lnRef>
+          <a:fillRef idx="1">
+            <a:schemeClr val="accent2"/>
+          </a:fillRef>
+          <a:effectRef idx="0">
+            <a:schemeClr val="accent2"/>
+          </a:effectRef>
+          <a:fontRef idx="minor">
+            <a:schemeClr val="lt1"/>
+          </a:fontRef>
+        </p:style>
+        <p:txBody>
+          <a:bodyPr rtlCol="0" anchor="ctr"/>
+          <a:lstStyle/>
+          <a:p>
+            <a:pPr algn="ctr"/>
+            <a:r>
+              <a:rPr lang="en-US" dirty="0"/>
+              <a:t>4</a:t>
+            </a:r>
+          </a:p>
+        </p:txBody>
+      </p:sp>
+      <p:cxnSp>
+        <p:nvCxnSpPr>
+          <p:cNvPr id="28" name="Straight Arrow Connector 27">
+            <a:extLst>
+              <a:ext uri="{FF2B5EF4-FFF2-40B4-BE49-F238E27FC236}">
+                <a16:creationId xmlns:a16="http://schemas.microsoft.com/office/drawing/2014/main" id="{116A7474-8722-FE8D-E634-9F8A847AC686}"/>
+              </a:ext>
+            </a:extLst>
+          </p:cNvPr>
+          <p:cNvCxnSpPr>
+            <a:cxnSpLocks/>
+            <a:stCxn id="20" idx="3"/>
+            <a:endCxn id="3" idx="2"/>
+          </p:cNvCxnSpPr>
+          <p:nvPr/>
+        </p:nvCxnSpPr>
+        <p:spPr>
+          <a:xfrm>
+            <a:off x="6193992" y="2037124"/>
+            <a:ext cx="1123002" cy="0"/>
+          </a:xfrm>
+          <a:prstGeom prst="straightConnector1">
+            <a:avLst/>
+          </a:prstGeom>
+          <a:ln>
+            <a:tailEnd type="triangle"/>
+          </a:ln>
+        </p:spPr>
+        <p:style>
+          <a:lnRef idx="2">
+            <a:schemeClr val="dk1"/>
+          </a:lnRef>
+          <a:fillRef idx="0">
+            <a:schemeClr val="dk1"/>
+          </a:fillRef>
+          <a:effectRef idx="1">
+            <a:schemeClr val="dk1"/>
+          </a:effectRef>
+          <a:fontRef idx="minor">
+            <a:schemeClr val="tx1"/>
+          </a:fontRef>
+        </p:style>
+      </p:cxnSp>
+      <p:cxnSp>
+        <p:nvCxnSpPr>
+          <p:cNvPr id="33" name="Straight Arrow Connector 32">
+            <a:extLst>
+              <a:ext uri="{FF2B5EF4-FFF2-40B4-BE49-F238E27FC236}">
+                <a16:creationId xmlns:a16="http://schemas.microsoft.com/office/drawing/2014/main" id="{F404A053-E6D0-C600-FEBE-1110F7C32DD6}"/>
+              </a:ext>
+            </a:extLst>
+          </p:cNvPr>
+          <p:cNvCxnSpPr>
+            <a:cxnSpLocks/>
+            <a:stCxn id="27" idx="3"/>
+            <a:endCxn id="19" idx="3"/>
+          </p:cNvCxnSpPr>
+          <p:nvPr/>
+        </p:nvCxnSpPr>
+        <p:spPr>
+          <a:xfrm flipV="1">
+            <a:off x="6193992" y="4457528"/>
+            <a:ext cx="1204924" cy="580982"/>
           </a:xfrm>
           <a:prstGeom prst="straightConnector1">
             <a:avLst/>
@@ -5248,10 +8446,2157 @@
           </a:fontRef>
         </p:style>
       </p:cxnSp>
+      <p:cxnSp>
+        <p:nvCxnSpPr>
+          <p:cNvPr id="36" name="Straight Arrow Connector 35">
+            <a:extLst>
+              <a:ext uri="{FF2B5EF4-FFF2-40B4-BE49-F238E27FC236}">
+                <a16:creationId xmlns:a16="http://schemas.microsoft.com/office/drawing/2014/main" id="{B5C9F261-1CA1-B84F-AD76-CFD77DA6B804}"/>
+              </a:ext>
+            </a:extLst>
+          </p:cNvPr>
+          <p:cNvCxnSpPr>
+            <a:cxnSpLocks/>
+            <a:endCxn id="19" idx="1"/>
+          </p:cNvCxnSpPr>
+          <p:nvPr/>
+        </p:nvCxnSpPr>
+        <p:spPr>
+          <a:xfrm>
+            <a:off x="6193992" y="3537817"/>
+            <a:ext cx="1204924" cy="524157"/>
+          </a:xfrm>
+          <a:prstGeom prst="straightConnector1">
+            <a:avLst/>
+          </a:prstGeom>
+          <a:ln>
+            <a:solidFill>
+              <a:schemeClr val="bg1">
+                <a:lumMod val="65000"/>
+              </a:schemeClr>
+            </a:solidFill>
+            <a:tailEnd type="triangle"/>
+          </a:ln>
+        </p:spPr>
+        <p:style>
+          <a:lnRef idx="2">
+            <a:schemeClr val="dk1"/>
+          </a:lnRef>
+          <a:fillRef idx="0">
+            <a:schemeClr val="dk1"/>
+          </a:fillRef>
+          <a:effectRef idx="1">
+            <a:schemeClr val="dk1"/>
+          </a:effectRef>
+          <a:fontRef idx="minor">
+            <a:schemeClr val="tx1"/>
+          </a:fontRef>
+        </p:style>
+      </p:cxnSp>
+      <p:cxnSp>
+        <p:nvCxnSpPr>
+          <p:cNvPr id="41" name="Straight Arrow Connector 40">
+            <a:extLst>
+              <a:ext uri="{FF2B5EF4-FFF2-40B4-BE49-F238E27FC236}">
+                <a16:creationId xmlns:a16="http://schemas.microsoft.com/office/drawing/2014/main" id="{54B7E342-37F9-A9F6-F16A-F1EEAD7D59E8}"/>
+              </a:ext>
+            </a:extLst>
+          </p:cNvPr>
+          <p:cNvCxnSpPr>
+            <a:cxnSpLocks/>
+            <a:stCxn id="3" idx="5"/>
+            <a:endCxn id="44" idx="1"/>
+          </p:cNvCxnSpPr>
+          <p:nvPr/>
+        </p:nvCxnSpPr>
+        <p:spPr>
+          <a:xfrm>
+            <a:off x="7794470" y="2234901"/>
+            <a:ext cx="1299332" cy="914400"/>
+          </a:xfrm>
+          <a:prstGeom prst="straightConnector1">
+            <a:avLst/>
+          </a:prstGeom>
+          <a:ln>
+            <a:tailEnd type="triangle"/>
+          </a:ln>
+        </p:spPr>
+        <p:style>
+          <a:lnRef idx="2">
+            <a:schemeClr val="dk1"/>
+          </a:lnRef>
+          <a:fillRef idx="0">
+            <a:schemeClr val="dk1"/>
+          </a:fillRef>
+          <a:effectRef idx="1">
+            <a:schemeClr val="dk1"/>
+          </a:effectRef>
+          <a:fontRef idx="minor">
+            <a:schemeClr val="tx1"/>
+          </a:fontRef>
+        </p:style>
+      </p:cxnSp>
+      <p:cxnSp>
+        <p:nvCxnSpPr>
+          <p:cNvPr id="45" name="Straight Arrow Connector 44">
+            <a:extLst>
+              <a:ext uri="{FF2B5EF4-FFF2-40B4-BE49-F238E27FC236}">
+                <a16:creationId xmlns:a16="http://schemas.microsoft.com/office/drawing/2014/main" id="{8BFE0F32-B3FE-E297-33AC-AE7D127B5B9B}"/>
+              </a:ext>
+            </a:extLst>
+          </p:cNvPr>
+          <p:cNvCxnSpPr>
+            <a:cxnSpLocks/>
+            <a:stCxn id="19" idx="7"/>
+            <a:endCxn id="44" idx="1"/>
+          </p:cNvCxnSpPr>
+          <p:nvPr/>
+        </p:nvCxnSpPr>
+        <p:spPr>
+          <a:xfrm flipV="1">
+            <a:off x="7794470" y="3149301"/>
+            <a:ext cx="1299332" cy="912673"/>
+          </a:xfrm>
+          <a:prstGeom prst="straightConnector1">
+            <a:avLst/>
+          </a:prstGeom>
+          <a:ln>
+            <a:solidFill>
+              <a:schemeClr val="bg1">
+                <a:lumMod val="65000"/>
+              </a:schemeClr>
+            </a:solidFill>
+            <a:tailEnd type="triangle"/>
+          </a:ln>
+        </p:spPr>
+        <p:style>
+          <a:lnRef idx="2">
+            <a:schemeClr val="dk1"/>
+          </a:lnRef>
+          <a:fillRef idx="0">
+            <a:schemeClr val="dk1"/>
+          </a:fillRef>
+          <a:effectRef idx="1">
+            <a:schemeClr val="dk1"/>
+          </a:effectRef>
+          <a:fontRef idx="minor">
+            <a:schemeClr val="tx1"/>
+          </a:fontRef>
+        </p:style>
+      </p:cxnSp>
+      <p:sp>
+        <p:nvSpPr>
+          <p:cNvPr id="2" name="Oval 1">
+            <a:extLst>
+              <a:ext uri="{FF2B5EF4-FFF2-40B4-BE49-F238E27FC236}">
+                <a16:creationId xmlns:a16="http://schemas.microsoft.com/office/drawing/2014/main" id="{2155D390-FD92-4923-0AB0-2DB78EC21E15}"/>
+              </a:ext>
+            </a:extLst>
+          </p:cNvPr>
+          <p:cNvSpPr/>
+          <p:nvPr/>
+        </p:nvSpPr>
+        <p:spPr>
+          <a:xfrm>
+            <a:off x="4034116" y="2456672"/>
+            <a:ext cx="559398" cy="559398"/>
+          </a:xfrm>
+          <a:prstGeom prst="ellipse">
+            <a:avLst/>
+          </a:prstGeom>
+        </p:spPr>
+        <p:style>
+          <a:lnRef idx="2">
+            <a:schemeClr val="accent1">
+              <a:shade val="15000"/>
+            </a:schemeClr>
+          </a:lnRef>
+          <a:fillRef idx="1">
+            <a:schemeClr val="accent1"/>
+          </a:fillRef>
+          <a:effectRef idx="0">
+            <a:schemeClr val="accent1"/>
+          </a:effectRef>
+          <a:fontRef idx="minor">
+            <a:schemeClr val="lt1"/>
+          </a:fontRef>
+        </p:style>
+        <p:txBody>
+          <a:bodyPr rtlCol="0" anchor="ctr"/>
+          <a:lstStyle/>
+          <a:p>
+            <a:pPr algn="ctr"/>
+            <a:r>
+              <a:rPr lang="en-US" dirty="0"/>
+              <a:t>1</a:t>
+            </a:r>
+          </a:p>
+        </p:txBody>
+      </p:sp>
+      <p:sp>
+        <p:nvSpPr>
+          <p:cNvPr id="44" name="Rectangle 43">
+            <a:extLst>
+              <a:ext uri="{FF2B5EF4-FFF2-40B4-BE49-F238E27FC236}">
+                <a16:creationId xmlns:a16="http://schemas.microsoft.com/office/drawing/2014/main" id="{163A7D3A-0A9A-1AC4-2021-CCDA958D52CF}"/>
+              </a:ext>
+            </a:extLst>
+          </p:cNvPr>
+          <p:cNvSpPr/>
+          <p:nvPr/>
+        </p:nvSpPr>
+        <p:spPr>
+          <a:xfrm>
+            <a:off x="9093802" y="2869602"/>
+            <a:ext cx="559398" cy="559398"/>
+          </a:xfrm>
+          <a:prstGeom prst="rect">
+            <a:avLst/>
+          </a:prstGeom>
+        </p:spPr>
+        <p:style>
+          <a:lnRef idx="2">
+            <a:schemeClr val="accent2">
+              <a:shade val="15000"/>
+            </a:schemeClr>
+          </a:lnRef>
+          <a:fillRef idx="1">
+            <a:schemeClr val="accent2"/>
+          </a:fillRef>
+          <a:effectRef idx="0">
+            <a:schemeClr val="accent2"/>
+          </a:effectRef>
+          <a:fontRef idx="minor">
+            <a:schemeClr val="lt1"/>
+          </a:fontRef>
+        </p:style>
+        <p:txBody>
+          <a:bodyPr rtlCol="0" anchor="ctr"/>
+          <a:lstStyle/>
+          <a:p>
+            <a:pPr algn="ctr"/>
+            <a:r>
+              <a:rPr lang="en-US" dirty="0"/>
+              <a:t>5</a:t>
+            </a:r>
+          </a:p>
+        </p:txBody>
+      </p:sp>
+      <p:sp>
+        <p:nvSpPr>
+          <p:cNvPr id="4" name="Oval 3">
+            <a:extLst>
+              <a:ext uri="{FF2B5EF4-FFF2-40B4-BE49-F238E27FC236}">
+                <a16:creationId xmlns:a16="http://schemas.microsoft.com/office/drawing/2014/main" id="{9A8C939F-89B2-8D70-981F-86E458FA5191}"/>
+              </a:ext>
+            </a:extLst>
+          </p:cNvPr>
+          <p:cNvSpPr/>
+          <p:nvPr/>
+        </p:nvSpPr>
+        <p:spPr>
+          <a:xfrm>
+            <a:off x="1761286" y="1848865"/>
+            <a:ext cx="1775012" cy="1775012"/>
+          </a:xfrm>
+          <a:prstGeom prst="ellipse">
+            <a:avLst/>
+          </a:prstGeom>
+          <a:noFill/>
+          <a:ln>
+            <a:solidFill>
+              <a:srgbClr val="FF0000"/>
+            </a:solidFill>
+          </a:ln>
+        </p:spPr>
+        <p:style>
+          <a:lnRef idx="2">
+            <a:schemeClr val="accent1">
+              <a:shade val="15000"/>
+            </a:schemeClr>
+          </a:lnRef>
+          <a:fillRef idx="1">
+            <a:schemeClr val="accent1"/>
+          </a:fillRef>
+          <a:effectRef idx="0">
+            <a:schemeClr val="accent1"/>
+          </a:effectRef>
+          <a:fontRef idx="minor">
+            <a:schemeClr val="lt1"/>
+          </a:fontRef>
+        </p:style>
+        <p:txBody>
+          <a:bodyPr rtlCol="0" anchor="ctr"/>
+          <a:lstStyle/>
+          <a:p>
+            <a:pPr algn="ctr"/>
+            <a:endParaRPr lang="en-US" dirty="0"/>
+          </a:p>
+        </p:txBody>
+      </p:sp>
+      <p:sp>
+        <p:nvSpPr>
+          <p:cNvPr id="6" name="Rectangle 5">
+            <a:extLst>
+              <a:ext uri="{FF2B5EF4-FFF2-40B4-BE49-F238E27FC236}">
+                <a16:creationId xmlns:a16="http://schemas.microsoft.com/office/drawing/2014/main" id="{96D4C5BB-F12C-3A64-E7A3-63D2957F98DC}"/>
+              </a:ext>
+            </a:extLst>
+          </p:cNvPr>
+          <p:cNvSpPr/>
+          <p:nvPr/>
+        </p:nvSpPr>
+        <p:spPr>
+          <a:xfrm>
+            <a:off x="5634594" y="3258118"/>
+            <a:ext cx="559398" cy="559398"/>
+          </a:xfrm>
+          <a:prstGeom prst="rect">
+            <a:avLst/>
+          </a:prstGeom>
+        </p:spPr>
+        <p:style>
+          <a:lnRef idx="2">
+            <a:schemeClr val="accent2">
+              <a:shade val="15000"/>
+            </a:schemeClr>
+          </a:lnRef>
+          <a:fillRef idx="1">
+            <a:schemeClr val="accent2"/>
+          </a:fillRef>
+          <a:effectRef idx="0">
+            <a:schemeClr val="accent2"/>
+          </a:effectRef>
+          <a:fontRef idx="minor">
+            <a:schemeClr val="lt1"/>
+          </a:fontRef>
+        </p:style>
+        <p:txBody>
+          <a:bodyPr rtlCol="0" anchor="ctr"/>
+          <a:lstStyle/>
+          <a:p>
+            <a:pPr algn="ctr"/>
+            <a:r>
+              <a:rPr lang="en-US" dirty="0"/>
+              <a:t>3</a:t>
+            </a:r>
+          </a:p>
+        </p:txBody>
+      </p:sp>
+      <p:cxnSp>
+        <p:nvCxnSpPr>
+          <p:cNvPr id="7" name="Straight Arrow Connector 6">
+            <a:extLst>
+              <a:ext uri="{FF2B5EF4-FFF2-40B4-BE49-F238E27FC236}">
+                <a16:creationId xmlns:a16="http://schemas.microsoft.com/office/drawing/2014/main" id="{D9CE023D-3E90-8270-7074-3EBDB20E2D76}"/>
+              </a:ext>
+            </a:extLst>
+          </p:cNvPr>
+          <p:cNvCxnSpPr>
+            <a:cxnSpLocks/>
+            <a:endCxn id="6" idx="1"/>
+          </p:cNvCxnSpPr>
+          <p:nvPr/>
+        </p:nvCxnSpPr>
+        <p:spPr>
+          <a:xfrm>
+            <a:off x="4511592" y="2934148"/>
+            <a:ext cx="1123002" cy="603669"/>
+          </a:xfrm>
+          <a:prstGeom prst="straightConnector1">
+            <a:avLst/>
+          </a:prstGeom>
+          <a:ln>
+            <a:tailEnd type="triangle"/>
+          </a:ln>
+        </p:spPr>
+        <p:style>
+          <a:lnRef idx="2">
+            <a:schemeClr val="dk1"/>
+          </a:lnRef>
+          <a:fillRef idx="0">
+            <a:schemeClr val="dk1"/>
+          </a:fillRef>
+          <a:effectRef idx="1">
+            <a:schemeClr val="dk1"/>
+          </a:effectRef>
+          <a:fontRef idx="minor">
+            <a:schemeClr val="tx1"/>
+          </a:fontRef>
+        </p:style>
+      </p:cxnSp>
     </p:spTree>
     <p:extLst>
       <p:ext uri="{BB962C8B-B14F-4D97-AF65-F5344CB8AC3E}">
-        <p14:creationId xmlns:p14="http://schemas.microsoft.com/office/powerpoint/2010/main" val="3967485050"/>
+        <p14:creationId xmlns:p14="http://schemas.microsoft.com/office/powerpoint/2010/main" val="1685703449"/>
+      </p:ext>
+    </p:extLst>
+  </p:cSld>
+  <p:clrMapOvr>
+    <a:masterClrMapping/>
+  </p:clrMapOvr>
+</p:sld>
+</file>
+
+<file path=ppt/slides/slide7.xml><?xml version="1.0" encoding="utf-8"?>
+<p:sld xmlns:a="http://schemas.openxmlformats.org/drawingml/2006/main" xmlns:r="http://schemas.openxmlformats.org/officeDocument/2006/relationships" xmlns:p="http://schemas.openxmlformats.org/presentationml/2006/main">
+  <p:cSld>
+    <p:spTree>
+      <p:nvGrpSpPr>
+        <p:cNvPr id="1" name="">
+          <a:extLst>
+            <a:ext uri="{FF2B5EF4-FFF2-40B4-BE49-F238E27FC236}">
+              <a16:creationId xmlns:a16="http://schemas.microsoft.com/office/drawing/2014/main" id="{03E26E58-1986-6A2B-99AB-F9BE62A2869F}"/>
+            </a:ext>
+          </a:extLst>
+        </p:cNvPr>
+        <p:cNvGrpSpPr/>
+        <p:nvPr/>
+      </p:nvGrpSpPr>
+      <p:grpSpPr>
+        <a:xfrm>
+          <a:off x="0" y="0"/>
+          <a:ext cx="0" cy="0"/>
+          <a:chOff x="0" y="0"/>
+          <a:chExt cx="0" cy="0"/>
+        </a:xfrm>
+      </p:grpSpPr>
+      <p:sp>
+        <p:nvSpPr>
+          <p:cNvPr id="2" name="Oval 1">
+            <a:extLst>
+              <a:ext uri="{FF2B5EF4-FFF2-40B4-BE49-F238E27FC236}">
+                <a16:creationId xmlns:a16="http://schemas.microsoft.com/office/drawing/2014/main" id="{BCAD12DF-0DDC-A9F8-6462-C49C9A73629E}"/>
+              </a:ext>
+            </a:extLst>
+          </p:cNvPr>
+          <p:cNvSpPr/>
+          <p:nvPr/>
+        </p:nvSpPr>
+        <p:spPr>
+          <a:xfrm>
+            <a:off x="4034116" y="2456672"/>
+            <a:ext cx="559398" cy="559398"/>
+          </a:xfrm>
+          <a:prstGeom prst="ellipse">
+            <a:avLst/>
+          </a:prstGeom>
+        </p:spPr>
+        <p:style>
+          <a:lnRef idx="2">
+            <a:schemeClr val="accent1">
+              <a:shade val="15000"/>
+            </a:schemeClr>
+          </a:lnRef>
+          <a:fillRef idx="1">
+            <a:schemeClr val="accent1"/>
+          </a:fillRef>
+          <a:effectRef idx="0">
+            <a:schemeClr val="accent1"/>
+          </a:effectRef>
+          <a:fontRef idx="minor">
+            <a:schemeClr val="lt1"/>
+          </a:fontRef>
+        </p:style>
+        <p:txBody>
+          <a:bodyPr rtlCol="0" anchor="ctr"/>
+          <a:lstStyle/>
+          <a:p>
+            <a:pPr algn="ctr"/>
+            <a:r>
+              <a:rPr lang="en-US" dirty="0"/>
+              <a:t>1</a:t>
+            </a:r>
+          </a:p>
+        </p:txBody>
+      </p:sp>
+      <p:sp>
+        <p:nvSpPr>
+          <p:cNvPr id="3" name="Oval 2">
+            <a:extLst>
+              <a:ext uri="{FF2B5EF4-FFF2-40B4-BE49-F238E27FC236}">
+                <a16:creationId xmlns:a16="http://schemas.microsoft.com/office/drawing/2014/main" id="{D3859991-4534-512A-6540-C76E37EF22C2}"/>
+              </a:ext>
+            </a:extLst>
+          </p:cNvPr>
+          <p:cNvSpPr/>
+          <p:nvPr/>
+        </p:nvSpPr>
+        <p:spPr>
+          <a:xfrm>
+            <a:off x="7316994" y="1757425"/>
+            <a:ext cx="559398" cy="559398"/>
+          </a:xfrm>
+          <a:prstGeom prst="ellipse">
+            <a:avLst/>
+          </a:prstGeom>
+          <a:solidFill>
+            <a:schemeClr val="bg1">
+              <a:lumMod val="75000"/>
+            </a:schemeClr>
+          </a:solidFill>
+          <a:ln>
+            <a:solidFill>
+              <a:schemeClr val="bg1">
+                <a:lumMod val="65000"/>
+              </a:schemeClr>
+            </a:solidFill>
+          </a:ln>
+        </p:spPr>
+        <p:style>
+          <a:lnRef idx="2">
+            <a:schemeClr val="accent1">
+              <a:shade val="15000"/>
+            </a:schemeClr>
+          </a:lnRef>
+          <a:fillRef idx="1">
+            <a:schemeClr val="accent1"/>
+          </a:fillRef>
+          <a:effectRef idx="0">
+            <a:schemeClr val="accent1"/>
+          </a:effectRef>
+          <a:fontRef idx="minor">
+            <a:schemeClr val="lt1"/>
+          </a:fontRef>
+        </p:style>
+        <p:txBody>
+          <a:bodyPr rtlCol="0" anchor="ctr"/>
+          <a:lstStyle/>
+          <a:p>
+            <a:pPr algn="ctr"/>
+            <a:r>
+              <a:rPr lang="en-US" dirty="0"/>
+              <a:t>2</a:t>
+            </a:r>
+          </a:p>
+        </p:txBody>
+      </p:sp>
+      <p:sp>
+        <p:nvSpPr>
+          <p:cNvPr id="5" name="Rectangle 4">
+            <a:extLst>
+              <a:ext uri="{FF2B5EF4-FFF2-40B4-BE49-F238E27FC236}">
+                <a16:creationId xmlns:a16="http://schemas.microsoft.com/office/drawing/2014/main" id="{8CD01DA4-4B67-C36F-A9BD-DE915C121BE6}"/>
+              </a:ext>
+            </a:extLst>
+          </p:cNvPr>
+          <p:cNvSpPr/>
+          <p:nvPr/>
+        </p:nvSpPr>
+        <p:spPr>
+          <a:xfrm>
+            <a:off x="2369093" y="2456672"/>
+            <a:ext cx="559398" cy="559398"/>
+          </a:xfrm>
+          <a:prstGeom prst="rect">
+            <a:avLst/>
+          </a:prstGeom>
+        </p:spPr>
+        <p:style>
+          <a:lnRef idx="2">
+            <a:schemeClr val="accent2">
+              <a:shade val="15000"/>
+            </a:schemeClr>
+          </a:lnRef>
+          <a:fillRef idx="1">
+            <a:schemeClr val="accent2"/>
+          </a:fillRef>
+          <a:effectRef idx="0">
+            <a:schemeClr val="accent2"/>
+          </a:effectRef>
+          <a:fontRef idx="minor">
+            <a:schemeClr val="lt1"/>
+          </a:fontRef>
+        </p:style>
+        <p:txBody>
+          <a:bodyPr rtlCol="0" anchor="ctr"/>
+          <a:lstStyle/>
+          <a:p>
+            <a:pPr algn="ctr"/>
+            <a:r>
+              <a:rPr lang="en-US" dirty="0"/>
+              <a:t>1</a:t>
+            </a:r>
+          </a:p>
+        </p:txBody>
+      </p:sp>
+      <p:cxnSp>
+        <p:nvCxnSpPr>
+          <p:cNvPr id="10" name="Straight Arrow Connector 9">
+            <a:extLst>
+              <a:ext uri="{FF2B5EF4-FFF2-40B4-BE49-F238E27FC236}">
+                <a16:creationId xmlns:a16="http://schemas.microsoft.com/office/drawing/2014/main" id="{0B2EA392-B58A-9237-A78F-9261D528262D}"/>
+              </a:ext>
+            </a:extLst>
+          </p:cNvPr>
+          <p:cNvCxnSpPr>
+            <a:stCxn id="5" idx="3"/>
+            <a:endCxn id="2" idx="2"/>
+          </p:cNvCxnSpPr>
+          <p:nvPr/>
+        </p:nvCxnSpPr>
+        <p:spPr>
+          <a:xfrm>
+            <a:off x="2928491" y="2736371"/>
+            <a:ext cx="1105625" cy="0"/>
+          </a:xfrm>
+          <a:prstGeom prst="straightConnector1">
+            <a:avLst/>
+          </a:prstGeom>
+          <a:ln>
+            <a:tailEnd type="triangle"/>
+          </a:ln>
+        </p:spPr>
+        <p:style>
+          <a:lnRef idx="2">
+            <a:schemeClr val="dk1"/>
+          </a:lnRef>
+          <a:fillRef idx="0">
+            <a:schemeClr val="dk1"/>
+          </a:fillRef>
+          <a:effectRef idx="1">
+            <a:schemeClr val="dk1"/>
+          </a:effectRef>
+          <a:fontRef idx="minor">
+            <a:schemeClr val="tx1"/>
+          </a:fontRef>
+        </p:style>
+      </p:cxnSp>
+      <p:sp>
+        <p:nvSpPr>
+          <p:cNvPr id="19" name="Oval 18">
+            <a:extLst>
+              <a:ext uri="{FF2B5EF4-FFF2-40B4-BE49-F238E27FC236}">
+                <a16:creationId xmlns:a16="http://schemas.microsoft.com/office/drawing/2014/main" id="{612CF2DC-4012-A463-A8A1-C730EB204303}"/>
+              </a:ext>
+            </a:extLst>
+          </p:cNvPr>
+          <p:cNvSpPr/>
+          <p:nvPr/>
+        </p:nvSpPr>
+        <p:spPr>
+          <a:xfrm>
+            <a:off x="7316994" y="3980052"/>
+            <a:ext cx="559398" cy="559398"/>
+          </a:xfrm>
+          <a:prstGeom prst="ellipse">
+            <a:avLst/>
+          </a:prstGeom>
+        </p:spPr>
+        <p:style>
+          <a:lnRef idx="2">
+            <a:schemeClr val="accent1">
+              <a:shade val="15000"/>
+            </a:schemeClr>
+          </a:lnRef>
+          <a:fillRef idx="1">
+            <a:schemeClr val="accent1"/>
+          </a:fillRef>
+          <a:effectRef idx="0">
+            <a:schemeClr val="accent1"/>
+          </a:effectRef>
+          <a:fontRef idx="minor">
+            <a:schemeClr val="lt1"/>
+          </a:fontRef>
+        </p:style>
+        <p:txBody>
+          <a:bodyPr rtlCol="0" anchor="ctr"/>
+          <a:lstStyle/>
+          <a:p>
+            <a:pPr algn="ctr"/>
+            <a:r>
+              <a:rPr lang="en-US" dirty="0"/>
+              <a:t>3</a:t>
+            </a:r>
+          </a:p>
+        </p:txBody>
+      </p:sp>
+      <p:sp>
+        <p:nvSpPr>
+          <p:cNvPr id="21" name="Rectangle 20">
+            <a:extLst>
+              <a:ext uri="{FF2B5EF4-FFF2-40B4-BE49-F238E27FC236}">
+                <a16:creationId xmlns:a16="http://schemas.microsoft.com/office/drawing/2014/main" id="{3F26C4D6-8057-C237-890B-AA1819C1DAB7}"/>
+              </a:ext>
+            </a:extLst>
+          </p:cNvPr>
+          <p:cNvSpPr/>
+          <p:nvPr/>
+        </p:nvSpPr>
+        <p:spPr>
+          <a:xfrm>
+            <a:off x="5634594" y="3258118"/>
+            <a:ext cx="559398" cy="559398"/>
+          </a:xfrm>
+          <a:prstGeom prst="rect">
+            <a:avLst/>
+          </a:prstGeom>
+        </p:spPr>
+        <p:style>
+          <a:lnRef idx="2">
+            <a:schemeClr val="accent2">
+              <a:shade val="15000"/>
+            </a:schemeClr>
+          </a:lnRef>
+          <a:fillRef idx="1">
+            <a:schemeClr val="accent2"/>
+          </a:fillRef>
+          <a:effectRef idx="0">
+            <a:schemeClr val="accent2"/>
+          </a:effectRef>
+          <a:fontRef idx="minor">
+            <a:schemeClr val="lt1"/>
+          </a:fontRef>
+        </p:style>
+        <p:txBody>
+          <a:bodyPr rtlCol="0" anchor="ctr"/>
+          <a:lstStyle/>
+          <a:p>
+            <a:pPr algn="ctr"/>
+            <a:r>
+              <a:rPr lang="en-US" dirty="0"/>
+              <a:t>3</a:t>
+            </a:r>
+          </a:p>
+        </p:txBody>
+      </p:sp>
+      <p:cxnSp>
+        <p:nvCxnSpPr>
+          <p:cNvPr id="22" name="Straight Arrow Connector 21">
+            <a:extLst>
+              <a:ext uri="{FF2B5EF4-FFF2-40B4-BE49-F238E27FC236}">
+                <a16:creationId xmlns:a16="http://schemas.microsoft.com/office/drawing/2014/main" id="{AAC25F16-DD76-DC39-E781-F2143DC63457}"/>
+              </a:ext>
+            </a:extLst>
+          </p:cNvPr>
+          <p:cNvCxnSpPr>
+            <a:cxnSpLocks/>
+            <a:stCxn id="2" idx="5"/>
+            <a:endCxn id="21" idx="1"/>
+          </p:cNvCxnSpPr>
+          <p:nvPr/>
+        </p:nvCxnSpPr>
+        <p:spPr>
+          <a:xfrm>
+            <a:off x="4511592" y="2934148"/>
+            <a:ext cx="1123002" cy="603669"/>
+          </a:xfrm>
+          <a:prstGeom prst="straightConnector1">
+            <a:avLst/>
+          </a:prstGeom>
+          <a:ln>
+            <a:tailEnd type="triangle"/>
+          </a:ln>
+        </p:spPr>
+        <p:style>
+          <a:lnRef idx="2">
+            <a:schemeClr val="dk1"/>
+          </a:lnRef>
+          <a:fillRef idx="0">
+            <a:schemeClr val="dk1"/>
+          </a:fillRef>
+          <a:effectRef idx="1">
+            <a:schemeClr val="dk1"/>
+          </a:effectRef>
+          <a:fontRef idx="minor">
+            <a:schemeClr val="tx1"/>
+          </a:fontRef>
+        </p:style>
+      </p:cxnSp>
+      <p:sp>
+        <p:nvSpPr>
+          <p:cNvPr id="27" name="Rectangle 26">
+            <a:extLst>
+              <a:ext uri="{FF2B5EF4-FFF2-40B4-BE49-F238E27FC236}">
+                <a16:creationId xmlns:a16="http://schemas.microsoft.com/office/drawing/2014/main" id="{48EF7CB6-4F4C-2522-5107-BE39216755DF}"/>
+              </a:ext>
+            </a:extLst>
+          </p:cNvPr>
+          <p:cNvSpPr/>
+          <p:nvPr/>
+        </p:nvSpPr>
+        <p:spPr>
+          <a:xfrm>
+            <a:off x="5634594" y="4758811"/>
+            <a:ext cx="559398" cy="559398"/>
+          </a:xfrm>
+          <a:prstGeom prst="rect">
+            <a:avLst/>
+          </a:prstGeom>
+        </p:spPr>
+        <p:style>
+          <a:lnRef idx="2">
+            <a:schemeClr val="accent2">
+              <a:shade val="15000"/>
+            </a:schemeClr>
+          </a:lnRef>
+          <a:fillRef idx="1">
+            <a:schemeClr val="accent2"/>
+          </a:fillRef>
+          <a:effectRef idx="0">
+            <a:schemeClr val="accent2"/>
+          </a:effectRef>
+          <a:fontRef idx="minor">
+            <a:schemeClr val="lt1"/>
+          </a:fontRef>
+        </p:style>
+        <p:txBody>
+          <a:bodyPr rtlCol="0" anchor="ctr"/>
+          <a:lstStyle/>
+          <a:p>
+            <a:pPr algn="ctr"/>
+            <a:r>
+              <a:rPr lang="en-US" dirty="0"/>
+              <a:t>4</a:t>
+            </a:r>
+          </a:p>
+        </p:txBody>
+      </p:sp>
+      <p:cxnSp>
+        <p:nvCxnSpPr>
+          <p:cNvPr id="28" name="Straight Arrow Connector 27">
+            <a:extLst>
+              <a:ext uri="{FF2B5EF4-FFF2-40B4-BE49-F238E27FC236}">
+                <a16:creationId xmlns:a16="http://schemas.microsoft.com/office/drawing/2014/main" id="{7D96C854-4818-FB1C-51F8-153D8BA5C244}"/>
+              </a:ext>
+            </a:extLst>
+          </p:cNvPr>
+          <p:cNvCxnSpPr>
+            <a:cxnSpLocks/>
+            <a:endCxn id="3" idx="2"/>
+          </p:cNvCxnSpPr>
+          <p:nvPr/>
+        </p:nvCxnSpPr>
+        <p:spPr>
+          <a:xfrm>
+            <a:off x="6193992" y="2037124"/>
+            <a:ext cx="1123002" cy="0"/>
+          </a:xfrm>
+          <a:prstGeom prst="straightConnector1">
+            <a:avLst/>
+          </a:prstGeom>
+          <a:ln>
+            <a:solidFill>
+              <a:schemeClr val="bg1">
+                <a:lumMod val="65000"/>
+              </a:schemeClr>
+            </a:solidFill>
+            <a:tailEnd type="triangle"/>
+          </a:ln>
+        </p:spPr>
+        <p:style>
+          <a:lnRef idx="2">
+            <a:schemeClr val="dk1"/>
+          </a:lnRef>
+          <a:fillRef idx="0">
+            <a:schemeClr val="dk1"/>
+          </a:fillRef>
+          <a:effectRef idx="1">
+            <a:schemeClr val="dk1"/>
+          </a:effectRef>
+          <a:fontRef idx="minor">
+            <a:schemeClr val="tx1"/>
+          </a:fontRef>
+        </p:style>
+      </p:cxnSp>
+      <p:cxnSp>
+        <p:nvCxnSpPr>
+          <p:cNvPr id="33" name="Straight Arrow Connector 32">
+            <a:extLst>
+              <a:ext uri="{FF2B5EF4-FFF2-40B4-BE49-F238E27FC236}">
+                <a16:creationId xmlns:a16="http://schemas.microsoft.com/office/drawing/2014/main" id="{57184C95-EC83-3ADE-CC1F-21E55870AF6B}"/>
+              </a:ext>
+            </a:extLst>
+          </p:cNvPr>
+          <p:cNvCxnSpPr>
+            <a:cxnSpLocks/>
+            <a:stCxn id="27" idx="3"/>
+            <a:endCxn id="19" idx="3"/>
+          </p:cNvCxnSpPr>
+          <p:nvPr/>
+        </p:nvCxnSpPr>
+        <p:spPr>
+          <a:xfrm flipV="1">
+            <a:off x="6193992" y="4457528"/>
+            <a:ext cx="1204924" cy="580982"/>
+          </a:xfrm>
+          <a:prstGeom prst="straightConnector1">
+            <a:avLst/>
+          </a:prstGeom>
+          <a:ln>
+            <a:tailEnd type="triangle"/>
+          </a:ln>
+        </p:spPr>
+        <p:style>
+          <a:lnRef idx="2">
+            <a:schemeClr val="dk1"/>
+          </a:lnRef>
+          <a:fillRef idx="0">
+            <a:schemeClr val="dk1"/>
+          </a:fillRef>
+          <a:effectRef idx="1">
+            <a:schemeClr val="dk1"/>
+          </a:effectRef>
+          <a:fontRef idx="minor">
+            <a:schemeClr val="tx1"/>
+          </a:fontRef>
+        </p:style>
+      </p:cxnSp>
+      <p:cxnSp>
+        <p:nvCxnSpPr>
+          <p:cNvPr id="36" name="Straight Arrow Connector 35">
+            <a:extLst>
+              <a:ext uri="{FF2B5EF4-FFF2-40B4-BE49-F238E27FC236}">
+                <a16:creationId xmlns:a16="http://schemas.microsoft.com/office/drawing/2014/main" id="{1D223608-B63B-49D5-522E-4A356FE8C850}"/>
+              </a:ext>
+            </a:extLst>
+          </p:cNvPr>
+          <p:cNvCxnSpPr>
+            <a:cxnSpLocks/>
+            <a:stCxn id="21" idx="3"/>
+            <a:endCxn id="19" idx="1"/>
+          </p:cNvCxnSpPr>
+          <p:nvPr/>
+        </p:nvCxnSpPr>
+        <p:spPr>
+          <a:xfrm>
+            <a:off x="6193992" y="3537817"/>
+            <a:ext cx="1204924" cy="524157"/>
+          </a:xfrm>
+          <a:prstGeom prst="straightConnector1">
+            <a:avLst/>
+          </a:prstGeom>
+          <a:ln>
+            <a:tailEnd type="triangle"/>
+          </a:ln>
+        </p:spPr>
+        <p:style>
+          <a:lnRef idx="2">
+            <a:schemeClr val="dk1"/>
+          </a:lnRef>
+          <a:fillRef idx="0">
+            <a:schemeClr val="dk1"/>
+          </a:fillRef>
+          <a:effectRef idx="1">
+            <a:schemeClr val="dk1"/>
+          </a:effectRef>
+          <a:fontRef idx="minor">
+            <a:schemeClr val="tx1"/>
+          </a:fontRef>
+        </p:style>
+      </p:cxnSp>
+      <p:cxnSp>
+        <p:nvCxnSpPr>
+          <p:cNvPr id="41" name="Straight Arrow Connector 40">
+            <a:extLst>
+              <a:ext uri="{FF2B5EF4-FFF2-40B4-BE49-F238E27FC236}">
+                <a16:creationId xmlns:a16="http://schemas.microsoft.com/office/drawing/2014/main" id="{FB2E85BF-DF34-C5D5-F560-FAB3F64ABFB5}"/>
+              </a:ext>
+            </a:extLst>
+          </p:cNvPr>
+          <p:cNvCxnSpPr>
+            <a:cxnSpLocks/>
+            <a:stCxn id="3" idx="5"/>
+            <a:endCxn id="44" idx="1"/>
+          </p:cNvCxnSpPr>
+          <p:nvPr/>
+        </p:nvCxnSpPr>
+        <p:spPr>
+          <a:xfrm>
+            <a:off x="7794470" y="2234901"/>
+            <a:ext cx="1299332" cy="914400"/>
+          </a:xfrm>
+          <a:prstGeom prst="straightConnector1">
+            <a:avLst/>
+          </a:prstGeom>
+          <a:ln>
+            <a:solidFill>
+              <a:schemeClr val="bg1">
+                <a:lumMod val="65000"/>
+              </a:schemeClr>
+            </a:solidFill>
+            <a:tailEnd type="triangle"/>
+          </a:ln>
+        </p:spPr>
+        <p:style>
+          <a:lnRef idx="2">
+            <a:schemeClr val="dk1"/>
+          </a:lnRef>
+          <a:fillRef idx="0">
+            <a:schemeClr val="dk1"/>
+          </a:fillRef>
+          <a:effectRef idx="1">
+            <a:schemeClr val="dk1"/>
+          </a:effectRef>
+          <a:fontRef idx="minor">
+            <a:schemeClr val="tx1"/>
+          </a:fontRef>
+        </p:style>
+      </p:cxnSp>
+      <p:sp>
+        <p:nvSpPr>
+          <p:cNvPr id="44" name="Rectangle 43">
+            <a:extLst>
+              <a:ext uri="{FF2B5EF4-FFF2-40B4-BE49-F238E27FC236}">
+                <a16:creationId xmlns:a16="http://schemas.microsoft.com/office/drawing/2014/main" id="{8E525258-2275-3B4C-5DBC-DBEEECB07E88}"/>
+              </a:ext>
+            </a:extLst>
+          </p:cNvPr>
+          <p:cNvSpPr/>
+          <p:nvPr/>
+        </p:nvSpPr>
+        <p:spPr>
+          <a:xfrm>
+            <a:off x="9093802" y="2869602"/>
+            <a:ext cx="559398" cy="559398"/>
+          </a:xfrm>
+          <a:prstGeom prst="rect">
+            <a:avLst/>
+          </a:prstGeom>
+        </p:spPr>
+        <p:style>
+          <a:lnRef idx="2">
+            <a:schemeClr val="accent2">
+              <a:shade val="15000"/>
+            </a:schemeClr>
+          </a:lnRef>
+          <a:fillRef idx="1">
+            <a:schemeClr val="accent2"/>
+          </a:fillRef>
+          <a:effectRef idx="0">
+            <a:schemeClr val="accent2"/>
+          </a:effectRef>
+          <a:fontRef idx="minor">
+            <a:schemeClr val="lt1"/>
+          </a:fontRef>
+        </p:style>
+        <p:txBody>
+          <a:bodyPr rtlCol="0" anchor="ctr"/>
+          <a:lstStyle/>
+          <a:p>
+            <a:pPr algn="ctr"/>
+            <a:r>
+              <a:rPr lang="en-US" dirty="0"/>
+              <a:t>5</a:t>
+            </a:r>
+          </a:p>
+        </p:txBody>
+      </p:sp>
+      <p:cxnSp>
+        <p:nvCxnSpPr>
+          <p:cNvPr id="45" name="Straight Arrow Connector 44">
+            <a:extLst>
+              <a:ext uri="{FF2B5EF4-FFF2-40B4-BE49-F238E27FC236}">
+                <a16:creationId xmlns:a16="http://schemas.microsoft.com/office/drawing/2014/main" id="{30D1AE85-6BF9-FDB3-5AD7-B41F858106BB}"/>
+              </a:ext>
+            </a:extLst>
+          </p:cNvPr>
+          <p:cNvCxnSpPr>
+            <a:cxnSpLocks/>
+            <a:stCxn id="19" idx="7"/>
+            <a:endCxn id="44" idx="1"/>
+          </p:cNvCxnSpPr>
+          <p:nvPr/>
+        </p:nvCxnSpPr>
+        <p:spPr>
+          <a:xfrm flipV="1">
+            <a:off x="7794470" y="3149301"/>
+            <a:ext cx="1299332" cy="912673"/>
+          </a:xfrm>
+          <a:prstGeom prst="straightConnector1">
+            <a:avLst/>
+          </a:prstGeom>
+          <a:ln>
+            <a:tailEnd type="triangle"/>
+          </a:ln>
+        </p:spPr>
+        <p:style>
+          <a:lnRef idx="2">
+            <a:schemeClr val="dk1"/>
+          </a:lnRef>
+          <a:fillRef idx="0">
+            <a:schemeClr val="dk1"/>
+          </a:fillRef>
+          <a:effectRef idx="1">
+            <a:schemeClr val="dk1"/>
+          </a:effectRef>
+          <a:fontRef idx="minor">
+            <a:schemeClr val="tx1"/>
+          </a:fontRef>
+        </p:style>
+      </p:cxnSp>
+      <p:sp>
+        <p:nvSpPr>
+          <p:cNvPr id="4" name="Oval 3">
+            <a:extLst>
+              <a:ext uri="{FF2B5EF4-FFF2-40B4-BE49-F238E27FC236}">
+                <a16:creationId xmlns:a16="http://schemas.microsoft.com/office/drawing/2014/main" id="{061AC4C4-52F0-900B-3439-811D5E79438B}"/>
+              </a:ext>
+            </a:extLst>
+          </p:cNvPr>
+          <p:cNvSpPr/>
+          <p:nvPr/>
+        </p:nvSpPr>
+        <p:spPr>
+          <a:xfrm>
+            <a:off x="1761286" y="1848865"/>
+            <a:ext cx="1775012" cy="1775012"/>
+          </a:xfrm>
+          <a:prstGeom prst="ellipse">
+            <a:avLst/>
+          </a:prstGeom>
+          <a:noFill/>
+          <a:ln>
+            <a:solidFill>
+              <a:srgbClr val="FF0000"/>
+            </a:solidFill>
+          </a:ln>
+        </p:spPr>
+        <p:style>
+          <a:lnRef idx="2">
+            <a:schemeClr val="accent1">
+              <a:shade val="15000"/>
+            </a:schemeClr>
+          </a:lnRef>
+          <a:fillRef idx="1">
+            <a:schemeClr val="accent1"/>
+          </a:fillRef>
+          <a:effectRef idx="0">
+            <a:schemeClr val="accent1"/>
+          </a:effectRef>
+          <a:fontRef idx="minor">
+            <a:schemeClr val="lt1"/>
+          </a:fontRef>
+        </p:style>
+        <p:txBody>
+          <a:bodyPr rtlCol="0" anchor="ctr"/>
+          <a:lstStyle/>
+          <a:p>
+            <a:pPr algn="ctr"/>
+            <a:endParaRPr lang="en-US"/>
+          </a:p>
+        </p:txBody>
+      </p:sp>
+      <p:sp>
+        <p:nvSpPr>
+          <p:cNvPr id="6" name="Oval 5">
+            <a:extLst>
+              <a:ext uri="{FF2B5EF4-FFF2-40B4-BE49-F238E27FC236}">
+                <a16:creationId xmlns:a16="http://schemas.microsoft.com/office/drawing/2014/main" id="{7ED21C47-E51B-4F42-6276-5BD5554DE5BB}"/>
+              </a:ext>
+            </a:extLst>
+          </p:cNvPr>
+          <p:cNvSpPr/>
+          <p:nvPr/>
+        </p:nvSpPr>
+        <p:spPr>
+          <a:xfrm>
+            <a:off x="5021442" y="4151003"/>
+            <a:ext cx="1775012" cy="1775012"/>
+          </a:xfrm>
+          <a:prstGeom prst="ellipse">
+            <a:avLst/>
+          </a:prstGeom>
+          <a:noFill/>
+          <a:ln>
+            <a:solidFill>
+              <a:srgbClr val="FF0000"/>
+            </a:solidFill>
+          </a:ln>
+        </p:spPr>
+        <p:style>
+          <a:lnRef idx="2">
+            <a:schemeClr val="accent1">
+              <a:shade val="15000"/>
+            </a:schemeClr>
+          </a:lnRef>
+          <a:fillRef idx="1">
+            <a:schemeClr val="accent1"/>
+          </a:fillRef>
+          <a:effectRef idx="0">
+            <a:schemeClr val="accent1"/>
+          </a:effectRef>
+          <a:fontRef idx="minor">
+            <a:schemeClr val="lt1"/>
+          </a:fontRef>
+        </p:style>
+        <p:txBody>
+          <a:bodyPr rtlCol="0" anchor="ctr"/>
+          <a:lstStyle/>
+          <a:p>
+            <a:pPr algn="ctr"/>
+            <a:endParaRPr lang="en-US"/>
+          </a:p>
+        </p:txBody>
+      </p:sp>
+      <p:cxnSp>
+        <p:nvCxnSpPr>
+          <p:cNvPr id="7" name="Straight Arrow Connector 6">
+            <a:extLst>
+              <a:ext uri="{FF2B5EF4-FFF2-40B4-BE49-F238E27FC236}">
+                <a16:creationId xmlns:a16="http://schemas.microsoft.com/office/drawing/2014/main" id="{784F7516-72F1-1F6C-A5BF-960CC00383D9}"/>
+              </a:ext>
+            </a:extLst>
+          </p:cNvPr>
+          <p:cNvCxnSpPr>
+            <a:cxnSpLocks/>
+          </p:cNvCxnSpPr>
+          <p:nvPr/>
+        </p:nvCxnSpPr>
+        <p:spPr>
+          <a:xfrm flipV="1">
+            <a:off x="4511592" y="2037124"/>
+            <a:ext cx="1123002" cy="501470"/>
+          </a:xfrm>
+          <a:prstGeom prst="straightConnector1">
+            <a:avLst/>
+          </a:prstGeom>
+          <a:ln>
+            <a:tailEnd type="triangle"/>
+          </a:ln>
+        </p:spPr>
+        <p:style>
+          <a:lnRef idx="2">
+            <a:schemeClr val="dk1"/>
+          </a:lnRef>
+          <a:fillRef idx="0">
+            <a:schemeClr val="dk1"/>
+          </a:fillRef>
+          <a:effectRef idx="1">
+            <a:schemeClr val="dk1"/>
+          </a:effectRef>
+          <a:fontRef idx="minor">
+            <a:schemeClr val="tx1"/>
+          </a:fontRef>
+        </p:style>
+      </p:cxnSp>
+      <p:sp>
+        <p:nvSpPr>
+          <p:cNvPr id="8" name="Rectangle 7">
+            <a:extLst>
+              <a:ext uri="{FF2B5EF4-FFF2-40B4-BE49-F238E27FC236}">
+                <a16:creationId xmlns:a16="http://schemas.microsoft.com/office/drawing/2014/main" id="{465800FA-A420-1D0D-DE02-1756B7CF3926}"/>
+              </a:ext>
+            </a:extLst>
+          </p:cNvPr>
+          <p:cNvSpPr/>
+          <p:nvPr/>
+        </p:nvSpPr>
+        <p:spPr>
+          <a:xfrm>
+            <a:off x="5634594" y="1757425"/>
+            <a:ext cx="559398" cy="559398"/>
+          </a:xfrm>
+          <a:prstGeom prst="rect">
+            <a:avLst/>
+          </a:prstGeom>
+        </p:spPr>
+        <p:style>
+          <a:lnRef idx="2">
+            <a:schemeClr val="accent2">
+              <a:shade val="15000"/>
+            </a:schemeClr>
+          </a:lnRef>
+          <a:fillRef idx="1">
+            <a:schemeClr val="accent2"/>
+          </a:fillRef>
+          <a:effectRef idx="0">
+            <a:schemeClr val="accent2"/>
+          </a:effectRef>
+          <a:fontRef idx="minor">
+            <a:schemeClr val="lt1"/>
+          </a:fontRef>
+        </p:style>
+        <p:txBody>
+          <a:bodyPr rtlCol="0" anchor="ctr"/>
+          <a:lstStyle/>
+          <a:p>
+            <a:pPr algn="ctr"/>
+            <a:r>
+              <a:rPr lang="en-US" dirty="0"/>
+              <a:t>2</a:t>
+            </a:r>
+          </a:p>
+        </p:txBody>
+      </p:sp>
+    </p:spTree>
+    <p:extLst>
+      <p:ext uri="{BB962C8B-B14F-4D97-AF65-F5344CB8AC3E}">
+        <p14:creationId xmlns:p14="http://schemas.microsoft.com/office/powerpoint/2010/main" val="4129319100"/>
+      </p:ext>
+    </p:extLst>
+  </p:cSld>
+  <p:clrMapOvr>
+    <a:masterClrMapping/>
+  </p:clrMapOvr>
+</p:sld>
+</file>
+
+<file path=ppt/slides/slide8.xml><?xml version="1.0" encoding="utf-8"?>
+<p:sld xmlns:a="http://schemas.openxmlformats.org/drawingml/2006/main" xmlns:r="http://schemas.openxmlformats.org/officeDocument/2006/relationships" xmlns:p="http://schemas.openxmlformats.org/presentationml/2006/main">
+  <p:cSld>
+    <p:spTree>
+      <p:nvGrpSpPr>
+        <p:cNvPr id="1" name="">
+          <a:extLst>
+            <a:ext uri="{FF2B5EF4-FFF2-40B4-BE49-F238E27FC236}">
+              <a16:creationId xmlns:a16="http://schemas.microsoft.com/office/drawing/2014/main" id="{9A7CB0A5-923A-9EB8-A1A2-4B60F5D82F05}"/>
+            </a:ext>
+          </a:extLst>
+        </p:cNvPr>
+        <p:cNvGrpSpPr/>
+        <p:nvPr/>
+      </p:nvGrpSpPr>
+      <p:grpSpPr>
+        <a:xfrm>
+          <a:off x="0" y="0"/>
+          <a:ext cx="0" cy="0"/>
+          <a:chOff x="0" y="0"/>
+          <a:chExt cx="0" cy="0"/>
+        </a:xfrm>
+      </p:grpSpPr>
+      <p:sp>
+        <p:nvSpPr>
+          <p:cNvPr id="2" name="Oval 1">
+            <a:extLst>
+              <a:ext uri="{FF2B5EF4-FFF2-40B4-BE49-F238E27FC236}">
+                <a16:creationId xmlns:a16="http://schemas.microsoft.com/office/drawing/2014/main" id="{19064C36-7A09-F98B-8E1E-DCE9FE7CD023}"/>
+              </a:ext>
+            </a:extLst>
+          </p:cNvPr>
+          <p:cNvSpPr/>
+          <p:nvPr/>
+        </p:nvSpPr>
+        <p:spPr>
+          <a:xfrm>
+            <a:off x="4034116" y="2456672"/>
+            <a:ext cx="559398" cy="559398"/>
+          </a:xfrm>
+          <a:prstGeom prst="ellipse">
+            <a:avLst/>
+          </a:prstGeom>
+        </p:spPr>
+        <p:style>
+          <a:lnRef idx="2">
+            <a:schemeClr val="accent1">
+              <a:shade val="15000"/>
+            </a:schemeClr>
+          </a:lnRef>
+          <a:fillRef idx="1">
+            <a:schemeClr val="accent1"/>
+          </a:fillRef>
+          <a:effectRef idx="0">
+            <a:schemeClr val="accent1"/>
+          </a:effectRef>
+          <a:fontRef idx="minor">
+            <a:schemeClr val="lt1"/>
+          </a:fontRef>
+        </p:style>
+        <p:txBody>
+          <a:bodyPr rtlCol="0" anchor="ctr"/>
+          <a:lstStyle/>
+          <a:p>
+            <a:pPr algn="ctr"/>
+            <a:r>
+              <a:rPr lang="en-US" dirty="0"/>
+              <a:t>1</a:t>
+            </a:r>
+          </a:p>
+        </p:txBody>
+      </p:sp>
+      <p:sp>
+        <p:nvSpPr>
+          <p:cNvPr id="3" name="Oval 2">
+            <a:extLst>
+              <a:ext uri="{FF2B5EF4-FFF2-40B4-BE49-F238E27FC236}">
+                <a16:creationId xmlns:a16="http://schemas.microsoft.com/office/drawing/2014/main" id="{BD135A6D-2696-D41C-74B6-81FD8C32091B}"/>
+              </a:ext>
+            </a:extLst>
+          </p:cNvPr>
+          <p:cNvSpPr/>
+          <p:nvPr/>
+        </p:nvSpPr>
+        <p:spPr>
+          <a:xfrm>
+            <a:off x="7316994" y="1757425"/>
+            <a:ext cx="559398" cy="559398"/>
+          </a:xfrm>
+          <a:prstGeom prst="ellipse">
+            <a:avLst/>
+          </a:prstGeom>
+        </p:spPr>
+        <p:style>
+          <a:lnRef idx="2">
+            <a:schemeClr val="accent1">
+              <a:shade val="15000"/>
+            </a:schemeClr>
+          </a:lnRef>
+          <a:fillRef idx="1">
+            <a:schemeClr val="accent1"/>
+          </a:fillRef>
+          <a:effectRef idx="0">
+            <a:schemeClr val="accent1"/>
+          </a:effectRef>
+          <a:fontRef idx="minor">
+            <a:schemeClr val="lt1"/>
+          </a:fontRef>
+        </p:style>
+        <p:txBody>
+          <a:bodyPr rtlCol="0" anchor="ctr"/>
+          <a:lstStyle/>
+          <a:p>
+            <a:pPr algn="ctr"/>
+            <a:r>
+              <a:rPr lang="en-US" dirty="0"/>
+              <a:t>2</a:t>
+            </a:r>
+          </a:p>
+        </p:txBody>
+      </p:sp>
+      <p:sp>
+        <p:nvSpPr>
+          <p:cNvPr id="5" name="Rectangle 4">
+            <a:extLst>
+              <a:ext uri="{FF2B5EF4-FFF2-40B4-BE49-F238E27FC236}">
+                <a16:creationId xmlns:a16="http://schemas.microsoft.com/office/drawing/2014/main" id="{B47A0255-EFD1-3FF3-DE9F-E08E135FD2CF}"/>
+              </a:ext>
+            </a:extLst>
+          </p:cNvPr>
+          <p:cNvSpPr/>
+          <p:nvPr/>
+        </p:nvSpPr>
+        <p:spPr>
+          <a:xfrm>
+            <a:off x="2369093" y="2456672"/>
+            <a:ext cx="559398" cy="559398"/>
+          </a:xfrm>
+          <a:prstGeom prst="rect">
+            <a:avLst/>
+          </a:prstGeom>
+        </p:spPr>
+        <p:style>
+          <a:lnRef idx="2">
+            <a:schemeClr val="accent2">
+              <a:shade val="15000"/>
+            </a:schemeClr>
+          </a:lnRef>
+          <a:fillRef idx="1">
+            <a:schemeClr val="accent2"/>
+          </a:fillRef>
+          <a:effectRef idx="0">
+            <a:schemeClr val="accent2"/>
+          </a:effectRef>
+          <a:fontRef idx="minor">
+            <a:schemeClr val="lt1"/>
+          </a:fontRef>
+        </p:style>
+        <p:txBody>
+          <a:bodyPr rtlCol="0" anchor="ctr"/>
+          <a:lstStyle/>
+          <a:p>
+            <a:pPr algn="ctr"/>
+            <a:r>
+              <a:rPr lang="en-US" dirty="0"/>
+              <a:t>1</a:t>
+            </a:r>
+          </a:p>
+        </p:txBody>
+      </p:sp>
+      <p:cxnSp>
+        <p:nvCxnSpPr>
+          <p:cNvPr id="10" name="Straight Arrow Connector 9">
+            <a:extLst>
+              <a:ext uri="{FF2B5EF4-FFF2-40B4-BE49-F238E27FC236}">
+                <a16:creationId xmlns:a16="http://schemas.microsoft.com/office/drawing/2014/main" id="{7A846AAE-D5E5-5E8D-09E3-9262B2A08B4A}"/>
+              </a:ext>
+            </a:extLst>
+          </p:cNvPr>
+          <p:cNvCxnSpPr>
+            <a:stCxn id="5" idx="3"/>
+            <a:endCxn id="2" idx="2"/>
+          </p:cNvCxnSpPr>
+          <p:nvPr/>
+        </p:nvCxnSpPr>
+        <p:spPr>
+          <a:xfrm>
+            <a:off x="2928491" y="2736371"/>
+            <a:ext cx="1105625" cy="0"/>
+          </a:xfrm>
+          <a:prstGeom prst="straightConnector1">
+            <a:avLst/>
+          </a:prstGeom>
+          <a:ln>
+            <a:tailEnd type="triangle"/>
+          </a:ln>
+        </p:spPr>
+        <p:style>
+          <a:lnRef idx="2">
+            <a:schemeClr val="dk1"/>
+          </a:lnRef>
+          <a:fillRef idx="0">
+            <a:schemeClr val="dk1"/>
+          </a:fillRef>
+          <a:effectRef idx="1">
+            <a:schemeClr val="dk1"/>
+          </a:effectRef>
+          <a:fontRef idx="minor">
+            <a:schemeClr val="tx1"/>
+          </a:fontRef>
+        </p:style>
+      </p:cxnSp>
+      <p:cxnSp>
+        <p:nvCxnSpPr>
+          <p:cNvPr id="11" name="Straight Arrow Connector 10">
+            <a:extLst>
+              <a:ext uri="{FF2B5EF4-FFF2-40B4-BE49-F238E27FC236}">
+                <a16:creationId xmlns:a16="http://schemas.microsoft.com/office/drawing/2014/main" id="{4B8A579B-10CA-798F-F92A-4E52304A2406}"/>
+              </a:ext>
+            </a:extLst>
+          </p:cNvPr>
+          <p:cNvCxnSpPr>
+            <a:cxnSpLocks/>
+            <a:stCxn id="2" idx="7"/>
+          </p:cNvCxnSpPr>
+          <p:nvPr/>
+        </p:nvCxnSpPr>
+        <p:spPr>
+          <a:xfrm flipV="1">
+            <a:off x="4511592" y="2037124"/>
+            <a:ext cx="1123002" cy="501470"/>
+          </a:xfrm>
+          <a:prstGeom prst="straightConnector1">
+            <a:avLst/>
+          </a:prstGeom>
+          <a:ln>
+            <a:tailEnd type="triangle"/>
+          </a:ln>
+        </p:spPr>
+        <p:style>
+          <a:lnRef idx="2">
+            <a:schemeClr val="dk1"/>
+          </a:lnRef>
+          <a:fillRef idx="0">
+            <a:schemeClr val="dk1"/>
+          </a:fillRef>
+          <a:effectRef idx="1">
+            <a:schemeClr val="dk1"/>
+          </a:effectRef>
+          <a:fontRef idx="minor">
+            <a:schemeClr val="tx1"/>
+          </a:fontRef>
+        </p:style>
+      </p:cxnSp>
+      <p:sp>
+        <p:nvSpPr>
+          <p:cNvPr id="19" name="Oval 18">
+            <a:extLst>
+              <a:ext uri="{FF2B5EF4-FFF2-40B4-BE49-F238E27FC236}">
+                <a16:creationId xmlns:a16="http://schemas.microsoft.com/office/drawing/2014/main" id="{50CBB82C-0075-99C6-2DA3-1DB3630B86C1}"/>
+              </a:ext>
+            </a:extLst>
+          </p:cNvPr>
+          <p:cNvSpPr/>
+          <p:nvPr/>
+        </p:nvSpPr>
+        <p:spPr>
+          <a:xfrm>
+            <a:off x="7316994" y="3980052"/>
+            <a:ext cx="559398" cy="559398"/>
+          </a:xfrm>
+          <a:prstGeom prst="ellipse">
+            <a:avLst/>
+          </a:prstGeom>
+        </p:spPr>
+        <p:style>
+          <a:lnRef idx="2">
+            <a:schemeClr val="accent1">
+              <a:shade val="15000"/>
+            </a:schemeClr>
+          </a:lnRef>
+          <a:fillRef idx="1">
+            <a:schemeClr val="accent1"/>
+          </a:fillRef>
+          <a:effectRef idx="0">
+            <a:schemeClr val="accent1"/>
+          </a:effectRef>
+          <a:fontRef idx="minor">
+            <a:schemeClr val="lt1"/>
+          </a:fontRef>
+        </p:style>
+        <p:txBody>
+          <a:bodyPr rtlCol="0" anchor="ctr"/>
+          <a:lstStyle/>
+          <a:p>
+            <a:pPr algn="ctr"/>
+            <a:r>
+              <a:rPr lang="en-US" dirty="0"/>
+              <a:t>3</a:t>
+            </a:r>
+          </a:p>
+        </p:txBody>
+      </p:sp>
+      <p:sp>
+        <p:nvSpPr>
+          <p:cNvPr id="20" name="Rectangle 19">
+            <a:extLst>
+              <a:ext uri="{FF2B5EF4-FFF2-40B4-BE49-F238E27FC236}">
+                <a16:creationId xmlns:a16="http://schemas.microsoft.com/office/drawing/2014/main" id="{F8FE37F7-C6E2-C761-A85D-B11E3DCF16BF}"/>
+              </a:ext>
+            </a:extLst>
+          </p:cNvPr>
+          <p:cNvSpPr/>
+          <p:nvPr/>
+        </p:nvSpPr>
+        <p:spPr>
+          <a:xfrm>
+            <a:off x="5634594" y="1757425"/>
+            <a:ext cx="559398" cy="559398"/>
+          </a:xfrm>
+          <a:prstGeom prst="rect">
+            <a:avLst/>
+          </a:prstGeom>
+        </p:spPr>
+        <p:style>
+          <a:lnRef idx="2">
+            <a:schemeClr val="accent2">
+              <a:shade val="15000"/>
+            </a:schemeClr>
+          </a:lnRef>
+          <a:fillRef idx="1">
+            <a:schemeClr val="accent2"/>
+          </a:fillRef>
+          <a:effectRef idx="0">
+            <a:schemeClr val="accent2"/>
+          </a:effectRef>
+          <a:fontRef idx="minor">
+            <a:schemeClr val="lt1"/>
+          </a:fontRef>
+        </p:style>
+        <p:txBody>
+          <a:bodyPr rtlCol="0" anchor="ctr"/>
+          <a:lstStyle/>
+          <a:p>
+            <a:pPr algn="ctr"/>
+            <a:r>
+              <a:rPr lang="en-US" dirty="0"/>
+              <a:t>2</a:t>
+            </a:r>
+          </a:p>
+        </p:txBody>
+      </p:sp>
+      <p:sp>
+        <p:nvSpPr>
+          <p:cNvPr id="21" name="Rectangle 20">
+            <a:extLst>
+              <a:ext uri="{FF2B5EF4-FFF2-40B4-BE49-F238E27FC236}">
+                <a16:creationId xmlns:a16="http://schemas.microsoft.com/office/drawing/2014/main" id="{5D466D57-E4A3-3EDB-8C9E-95F635E5FCDE}"/>
+              </a:ext>
+            </a:extLst>
+          </p:cNvPr>
+          <p:cNvSpPr/>
+          <p:nvPr/>
+        </p:nvSpPr>
+        <p:spPr>
+          <a:xfrm>
+            <a:off x="5634594" y="3258118"/>
+            <a:ext cx="559398" cy="559398"/>
+          </a:xfrm>
+          <a:prstGeom prst="rect">
+            <a:avLst/>
+          </a:prstGeom>
+        </p:spPr>
+        <p:style>
+          <a:lnRef idx="2">
+            <a:schemeClr val="accent2">
+              <a:shade val="15000"/>
+            </a:schemeClr>
+          </a:lnRef>
+          <a:fillRef idx="1">
+            <a:schemeClr val="accent2"/>
+          </a:fillRef>
+          <a:effectRef idx="0">
+            <a:schemeClr val="accent2"/>
+          </a:effectRef>
+          <a:fontRef idx="minor">
+            <a:schemeClr val="lt1"/>
+          </a:fontRef>
+        </p:style>
+        <p:txBody>
+          <a:bodyPr rtlCol="0" anchor="ctr"/>
+          <a:lstStyle/>
+          <a:p>
+            <a:pPr algn="ctr"/>
+            <a:r>
+              <a:rPr lang="en-US" dirty="0"/>
+              <a:t>3</a:t>
+            </a:r>
+          </a:p>
+        </p:txBody>
+      </p:sp>
+      <p:cxnSp>
+        <p:nvCxnSpPr>
+          <p:cNvPr id="22" name="Straight Arrow Connector 21">
+            <a:extLst>
+              <a:ext uri="{FF2B5EF4-FFF2-40B4-BE49-F238E27FC236}">
+                <a16:creationId xmlns:a16="http://schemas.microsoft.com/office/drawing/2014/main" id="{D2FB3EE9-4313-53D2-1339-9EF6EC78BEC2}"/>
+              </a:ext>
+            </a:extLst>
+          </p:cNvPr>
+          <p:cNvCxnSpPr>
+            <a:cxnSpLocks/>
+            <a:stCxn id="2" idx="5"/>
+            <a:endCxn id="21" idx="1"/>
+          </p:cNvCxnSpPr>
+          <p:nvPr/>
+        </p:nvCxnSpPr>
+        <p:spPr>
+          <a:xfrm>
+            <a:off x="4511592" y="2934148"/>
+            <a:ext cx="1123002" cy="603669"/>
+          </a:xfrm>
+          <a:prstGeom prst="straightConnector1">
+            <a:avLst/>
+          </a:prstGeom>
+          <a:ln>
+            <a:tailEnd type="triangle"/>
+          </a:ln>
+        </p:spPr>
+        <p:style>
+          <a:lnRef idx="2">
+            <a:schemeClr val="dk1"/>
+          </a:lnRef>
+          <a:fillRef idx="0">
+            <a:schemeClr val="dk1"/>
+          </a:fillRef>
+          <a:effectRef idx="1">
+            <a:schemeClr val="dk1"/>
+          </a:effectRef>
+          <a:fontRef idx="minor">
+            <a:schemeClr val="tx1"/>
+          </a:fontRef>
+        </p:style>
+      </p:cxnSp>
+      <p:sp>
+        <p:nvSpPr>
+          <p:cNvPr id="27" name="Rectangle 26">
+            <a:extLst>
+              <a:ext uri="{FF2B5EF4-FFF2-40B4-BE49-F238E27FC236}">
+                <a16:creationId xmlns:a16="http://schemas.microsoft.com/office/drawing/2014/main" id="{E223E57E-DA31-2C95-D7F2-0B3A3D850A8A}"/>
+              </a:ext>
+            </a:extLst>
+          </p:cNvPr>
+          <p:cNvSpPr/>
+          <p:nvPr/>
+        </p:nvSpPr>
+        <p:spPr>
+          <a:xfrm>
+            <a:off x="5634594" y="4758811"/>
+            <a:ext cx="559398" cy="559398"/>
+          </a:xfrm>
+          <a:prstGeom prst="rect">
+            <a:avLst/>
+          </a:prstGeom>
+        </p:spPr>
+        <p:style>
+          <a:lnRef idx="2">
+            <a:schemeClr val="accent2">
+              <a:shade val="15000"/>
+            </a:schemeClr>
+          </a:lnRef>
+          <a:fillRef idx="1">
+            <a:schemeClr val="accent2"/>
+          </a:fillRef>
+          <a:effectRef idx="0">
+            <a:schemeClr val="accent2"/>
+          </a:effectRef>
+          <a:fontRef idx="minor">
+            <a:schemeClr val="lt1"/>
+          </a:fontRef>
+        </p:style>
+        <p:txBody>
+          <a:bodyPr rtlCol="0" anchor="ctr"/>
+          <a:lstStyle/>
+          <a:p>
+            <a:pPr algn="ctr"/>
+            <a:r>
+              <a:rPr lang="en-US" dirty="0"/>
+              <a:t>4</a:t>
+            </a:r>
+          </a:p>
+        </p:txBody>
+      </p:sp>
+      <p:cxnSp>
+        <p:nvCxnSpPr>
+          <p:cNvPr id="28" name="Straight Arrow Connector 27">
+            <a:extLst>
+              <a:ext uri="{FF2B5EF4-FFF2-40B4-BE49-F238E27FC236}">
+                <a16:creationId xmlns:a16="http://schemas.microsoft.com/office/drawing/2014/main" id="{D6EB7DF9-703E-FC20-D199-EC525AF2F780}"/>
+              </a:ext>
+            </a:extLst>
+          </p:cNvPr>
+          <p:cNvCxnSpPr>
+            <a:cxnSpLocks/>
+            <a:stCxn id="20" idx="3"/>
+            <a:endCxn id="3" idx="2"/>
+          </p:cNvCxnSpPr>
+          <p:nvPr/>
+        </p:nvCxnSpPr>
+        <p:spPr>
+          <a:xfrm>
+            <a:off x="6193992" y="2037124"/>
+            <a:ext cx="1123002" cy="0"/>
+          </a:xfrm>
+          <a:prstGeom prst="straightConnector1">
+            <a:avLst/>
+          </a:prstGeom>
+          <a:ln>
+            <a:tailEnd type="triangle"/>
+          </a:ln>
+        </p:spPr>
+        <p:style>
+          <a:lnRef idx="2">
+            <a:schemeClr val="dk1"/>
+          </a:lnRef>
+          <a:fillRef idx="0">
+            <a:schemeClr val="dk1"/>
+          </a:fillRef>
+          <a:effectRef idx="1">
+            <a:schemeClr val="dk1"/>
+          </a:effectRef>
+          <a:fontRef idx="minor">
+            <a:schemeClr val="tx1"/>
+          </a:fontRef>
+        </p:style>
+      </p:cxnSp>
+      <p:cxnSp>
+        <p:nvCxnSpPr>
+          <p:cNvPr id="33" name="Straight Arrow Connector 32">
+            <a:extLst>
+              <a:ext uri="{FF2B5EF4-FFF2-40B4-BE49-F238E27FC236}">
+                <a16:creationId xmlns:a16="http://schemas.microsoft.com/office/drawing/2014/main" id="{02A8043A-AAED-5F4E-738D-AB50A6E138E4}"/>
+              </a:ext>
+            </a:extLst>
+          </p:cNvPr>
+          <p:cNvCxnSpPr>
+            <a:cxnSpLocks/>
+            <a:stCxn id="27" idx="3"/>
+            <a:endCxn id="19" idx="3"/>
+          </p:cNvCxnSpPr>
+          <p:nvPr/>
+        </p:nvCxnSpPr>
+        <p:spPr>
+          <a:xfrm flipV="1">
+            <a:off x="6193992" y="4457528"/>
+            <a:ext cx="1204924" cy="580982"/>
+          </a:xfrm>
+          <a:prstGeom prst="straightConnector1">
+            <a:avLst/>
+          </a:prstGeom>
+          <a:ln>
+            <a:tailEnd type="triangle"/>
+          </a:ln>
+        </p:spPr>
+        <p:style>
+          <a:lnRef idx="2">
+            <a:schemeClr val="dk1"/>
+          </a:lnRef>
+          <a:fillRef idx="0">
+            <a:schemeClr val="dk1"/>
+          </a:fillRef>
+          <a:effectRef idx="1">
+            <a:schemeClr val="dk1"/>
+          </a:effectRef>
+          <a:fontRef idx="minor">
+            <a:schemeClr val="tx1"/>
+          </a:fontRef>
+        </p:style>
+      </p:cxnSp>
+      <p:cxnSp>
+        <p:nvCxnSpPr>
+          <p:cNvPr id="36" name="Straight Arrow Connector 35">
+            <a:extLst>
+              <a:ext uri="{FF2B5EF4-FFF2-40B4-BE49-F238E27FC236}">
+                <a16:creationId xmlns:a16="http://schemas.microsoft.com/office/drawing/2014/main" id="{2DA5C246-303B-A9DF-91CD-606EEF76FD77}"/>
+              </a:ext>
+            </a:extLst>
+          </p:cNvPr>
+          <p:cNvCxnSpPr>
+            <a:cxnSpLocks/>
+            <a:stCxn id="21" idx="3"/>
+            <a:endCxn id="19" idx="1"/>
+          </p:cNvCxnSpPr>
+          <p:nvPr/>
+        </p:nvCxnSpPr>
+        <p:spPr>
+          <a:xfrm>
+            <a:off x="6193992" y="3537817"/>
+            <a:ext cx="1204924" cy="524157"/>
+          </a:xfrm>
+          <a:prstGeom prst="straightConnector1">
+            <a:avLst/>
+          </a:prstGeom>
+          <a:ln>
+            <a:tailEnd type="triangle"/>
+          </a:ln>
+        </p:spPr>
+        <p:style>
+          <a:lnRef idx="2">
+            <a:schemeClr val="dk1"/>
+          </a:lnRef>
+          <a:fillRef idx="0">
+            <a:schemeClr val="dk1"/>
+          </a:fillRef>
+          <a:effectRef idx="1">
+            <a:schemeClr val="dk1"/>
+          </a:effectRef>
+          <a:fontRef idx="minor">
+            <a:schemeClr val="tx1"/>
+          </a:fontRef>
+        </p:style>
+      </p:cxnSp>
+      <p:cxnSp>
+        <p:nvCxnSpPr>
+          <p:cNvPr id="41" name="Straight Arrow Connector 40">
+            <a:extLst>
+              <a:ext uri="{FF2B5EF4-FFF2-40B4-BE49-F238E27FC236}">
+                <a16:creationId xmlns:a16="http://schemas.microsoft.com/office/drawing/2014/main" id="{FEEBD58C-BF53-72FD-2EDC-FAE2B3050A08}"/>
+              </a:ext>
+            </a:extLst>
+          </p:cNvPr>
+          <p:cNvCxnSpPr>
+            <a:cxnSpLocks/>
+            <a:stCxn id="3" idx="5"/>
+            <a:endCxn id="44" idx="1"/>
+          </p:cNvCxnSpPr>
+          <p:nvPr/>
+        </p:nvCxnSpPr>
+        <p:spPr>
+          <a:xfrm>
+            <a:off x="7794470" y="2234901"/>
+            <a:ext cx="1299332" cy="914400"/>
+          </a:xfrm>
+          <a:prstGeom prst="straightConnector1">
+            <a:avLst/>
+          </a:prstGeom>
+          <a:ln>
+            <a:tailEnd type="triangle"/>
+          </a:ln>
+        </p:spPr>
+        <p:style>
+          <a:lnRef idx="2">
+            <a:schemeClr val="dk1"/>
+          </a:lnRef>
+          <a:fillRef idx="0">
+            <a:schemeClr val="dk1"/>
+          </a:fillRef>
+          <a:effectRef idx="1">
+            <a:schemeClr val="dk1"/>
+          </a:effectRef>
+          <a:fontRef idx="minor">
+            <a:schemeClr val="tx1"/>
+          </a:fontRef>
+        </p:style>
+      </p:cxnSp>
+      <p:sp>
+        <p:nvSpPr>
+          <p:cNvPr id="44" name="Rectangle 43">
+            <a:extLst>
+              <a:ext uri="{FF2B5EF4-FFF2-40B4-BE49-F238E27FC236}">
+                <a16:creationId xmlns:a16="http://schemas.microsoft.com/office/drawing/2014/main" id="{C89D87B8-1169-B2EE-CF74-3261C5ABC97B}"/>
+              </a:ext>
+            </a:extLst>
+          </p:cNvPr>
+          <p:cNvSpPr/>
+          <p:nvPr/>
+        </p:nvSpPr>
+        <p:spPr>
+          <a:xfrm>
+            <a:off x="9093802" y="2869602"/>
+            <a:ext cx="559398" cy="559398"/>
+          </a:xfrm>
+          <a:prstGeom prst="rect">
+            <a:avLst/>
+          </a:prstGeom>
+        </p:spPr>
+        <p:style>
+          <a:lnRef idx="2">
+            <a:schemeClr val="accent2">
+              <a:shade val="15000"/>
+            </a:schemeClr>
+          </a:lnRef>
+          <a:fillRef idx="1">
+            <a:schemeClr val="accent2"/>
+          </a:fillRef>
+          <a:effectRef idx="0">
+            <a:schemeClr val="accent2"/>
+          </a:effectRef>
+          <a:fontRef idx="minor">
+            <a:schemeClr val="lt1"/>
+          </a:fontRef>
+        </p:style>
+        <p:txBody>
+          <a:bodyPr rtlCol="0" anchor="ctr"/>
+          <a:lstStyle/>
+          <a:p>
+            <a:pPr algn="ctr"/>
+            <a:r>
+              <a:rPr lang="en-US" dirty="0"/>
+              <a:t>5</a:t>
+            </a:r>
+          </a:p>
+        </p:txBody>
+      </p:sp>
+      <p:cxnSp>
+        <p:nvCxnSpPr>
+          <p:cNvPr id="45" name="Straight Arrow Connector 44">
+            <a:extLst>
+              <a:ext uri="{FF2B5EF4-FFF2-40B4-BE49-F238E27FC236}">
+                <a16:creationId xmlns:a16="http://schemas.microsoft.com/office/drawing/2014/main" id="{67439C30-E4CA-F323-0D17-9AE9FC6EF881}"/>
+              </a:ext>
+            </a:extLst>
+          </p:cNvPr>
+          <p:cNvCxnSpPr>
+            <a:cxnSpLocks/>
+            <a:stCxn id="19" idx="7"/>
+            <a:endCxn id="44" idx="1"/>
+          </p:cNvCxnSpPr>
+          <p:nvPr/>
+        </p:nvCxnSpPr>
+        <p:spPr>
+          <a:xfrm flipV="1">
+            <a:off x="7794470" y="3149301"/>
+            <a:ext cx="1299332" cy="912673"/>
+          </a:xfrm>
+          <a:prstGeom prst="straightConnector1">
+            <a:avLst/>
+          </a:prstGeom>
+          <a:ln>
+            <a:tailEnd type="triangle"/>
+          </a:ln>
+        </p:spPr>
+        <p:style>
+          <a:lnRef idx="2">
+            <a:schemeClr val="dk1"/>
+          </a:lnRef>
+          <a:fillRef idx="0">
+            <a:schemeClr val="dk1"/>
+          </a:fillRef>
+          <a:effectRef idx="1">
+            <a:schemeClr val="dk1"/>
+          </a:effectRef>
+          <a:fontRef idx="minor">
+            <a:schemeClr val="tx1"/>
+          </a:fontRef>
+        </p:style>
+      </p:cxnSp>
+      <p:sp>
+        <p:nvSpPr>
+          <p:cNvPr id="4" name="Oval 3">
+            <a:extLst>
+              <a:ext uri="{FF2B5EF4-FFF2-40B4-BE49-F238E27FC236}">
+                <a16:creationId xmlns:a16="http://schemas.microsoft.com/office/drawing/2014/main" id="{A8F83A04-61BF-D40D-E9C2-F330B8265D8C}"/>
+              </a:ext>
+            </a:extLst>
+          </p:cNvPr>
+          <p:cNvSpPr/>
+          <p:nvPr/>
+        </p:nvSpPr>
+        <p:spPr>
+          <a:xfrm>
+            <a:off x="1761286" y="1848865"/>
+            <a:ext cx="1775012" cy="1775012"/>
+          </a:xfrm>
+          <a:prstGeom prst="ellipse">
+            <a:avLst/>
+          </a:prstGeom>
+          <a:noFill/>
+          <a:ln>
+            <a:solidFill>
+              <a:srgbClr val="FF0000"/>
+            </a:solidFill>
+          </a:ln>
+        </p:spPr>
+        <p:style>
+          <a:lnRef idx="2">
+            <a:schemeClr val="accent1">
+              <a:shade val="15000"/>
+            </a:schemeClr>
+          </a:lnRef>
+          <a:fillRef idx="1">
+            <a:schemeClr val="accent1"/>
+          </a:fillRef>
+          <a:effectRef idx="0">
+            <a:schemeClr val="accent1"/>
+          </a:effectRef>
+          <a:fontRef idx="minor">
+            <a:schemeClr val="lt1"/>
+          </a:fontRef>
+        </p:style>
+        <p:txBody>
+          <a:bodyPr rtlCol="0" anchor="ctr"/>
+          <a:lstStyle/>
+          <a:p>
+            <a:pPr algn="ctr"/>
+            <a:endParaRPr lang="en-US" dirty="0"/>
+          </a:p>
+        </p:txBody>
+      </p:sp>
+      <p:sp>
+        <p:nvSpPr>
+          <p:cNvPr id="6" name="Oval 5">
+            <a:extLst>
+              <a:ext uri="{FF2B5EF4-FFF2-40B4-BE49-F238E27FC236}">
+                <a16:creationId xmlns:a16="http://schemas.microsoft.com/office/drawing/2014/main" id="{4865DCA0-D16C-B399-6715-6AA55673BC6C}"/>
+              </a:ext>
+            </a:extLst>
+          </p:cNvPr>
+          <p:cNvSpPr/>
+          <p:nvPr/>
+        </p:nvSpPr>
+        <p:spPr>
+          <a:xfrm>
+            <a:off x="5026787" y="4151003"/>
+            <a:ext cx="1775012" cy="1775012"/>
+          </a:xfrm>
+          <a:prstGeom prst="ellipse">
+            <a:avLst/>
+          </a:prstGeom>
+          <a:noFill/>
+          <a:ln>
+            <a:solidFill>
+              <a:srgbClr val="00B050"/>
+            </a:solidFill>
+          </a:ln>
+        </p:spPr>
+        <p:style>
+          <a:lnRef idx="2">
+            <a:schemeClr val="accent1">
+              <a:shade val="15000"/>
+            </a:schemeClr>
+          </a:lnRef>
+          <a:fillRef idx="1">
+            <a:schemeClr val="accent1"/>
+          </a:fillRef>
+          <a:effectRef idx="0">
+            <a:schemeClr val="accent1"/>
+          </a:effectRef>
+          <a:fontRef idx="minor">
+            <a:schemeClr val="lt1"/>
+          </a:fontRef>
+        </p:style>
+        <p:txBody>
+          <a:bodyPr rtlCol="0" anchor="ctr"/>
+          <a:lstStyle/>
+          <a:p>
+            <a:pPr algn="ctr"/>
+            <a:endParaRPr lang="en-US" dirty="0"/>
+          </a:p>
+        </p:txBody>
+      </p:sp>
+    </p:spTree>
+    <p:extLst>
+      <p:ext uri="{BB962C8B-B14F-4D97-AF65-F5344CB8AC3E}">
+        <p14:creationId xmlns:p14="http://schemas.microsoft.com/office/powerpoint/2010/main" val="3069116991"/>
       </p:ext>
     </p:extLst>
   </p:cSld>
@@ -5574,4 +10919,319 @@
     </a:ext>
   </a:extLst>
 </a:theme>
+</file>
+
+<file path=ppt/theme/theme2.xml><?xml version="1.0" encoding="utf-8"?>
+<a:theme xmlns:a="http://schemas.openxmlformats.org/drawingml/2006/main" name="Office Theme">
+  <a:themeElements>
+    <a:clrScheme name="Office">
+      <a:dk1>
+        <a:sysClr val="windowText" lastClr="000000"/>
+      </a:dk1>
+      <a:lt1>
+        <a:sysClr val="window" lastClr="FFFFFF"/>
+      </a:lt1>
+      <a:dk2>
+        <a:srgbClr val="0E2841"/>
+      </a:dk2>
+      <a:lt2>
+        <a:srgbClr val="E8E8E8"/>
+      </a:lt2>
+      <a:accent1>
+        <a:srgbClr val="156082"/>
+      </a:accent1>
+      <a:accent2>
+        <a:srgbClr val="E97132"/>
+      </a:accent2>
+      <a:accent3>
+        <a:srgbClr val="196B24"/>
+      </a:accent3>
+      <a:accent4>
+        <a:srgbClr val="0F9ED5"/>
+      </a:accent4>
+      <a:accent5>
+        <a:srgbClr val="A02B93"/>
+      </a:accent5>
+      <a:accent6>
+        <a:srgbClr val="4EA72E"/>
+      </a:accent6>
+      <a:hlink>
+        <a:srgbClr val="467886"/>
+      </a:hlink>
+      <a:folHlink>
+        <a:srgbClr val="96607D"/>
+      </a:folHlink>
+    </a:clrScheme>
+    <a:fontScheme name="Office">
+      <a:majorFont>
+        <a:latin typeface="Aptos Display" panose="02110004020202020204"/>
+        <a:ea typeface=""/>
+        <a:cs typeface=""/>
+        <a:font script="Jpan" typeface="游ゴシック Light"/>
+        <a:font script="Hang" typeface="맑은 고딕"/>
+        <a:font script="Hans" typeface="等线 Light"/>
+        <a:font script="Hant" typeface="新細明體"/>
+        <a:font script="Arab" typeface="Times New Roman"/>
+        <a:font script="Hebr" typeface="Times New Roman"/>
+        <a:font script="Thai" typeface="Angsana New"/>
+        <a:font script="Ethi" typeface="Nyala"/>
+        <a:font script="Beng" typeface="Vrinda"/>
+        <a:font script="Gujr" typeface="Shruti"/>
+        <a:font script="Khmr" typeface="MoolBoran"/>
+        <a:font script="Knda" typeface="Tunga"/>
+        <a:font script="Guru" typeface="Raavi"/>
+        <a:font script="Cans" typeface="Euphemia"/>
+        <a:font script="Cher" typeface="Plantagenet Cherokee"/>
+        <a:font script="Yiii" typeface="Microsoft Yi Baiti"/>
+        <a:font script="Tibt" typeface="Microsoft Himalaya"/>
+        <a:font script="Thaa" typeface="MV Boli"/>
+        <a:font script="Deva" typeface="Mangal"/>
+        <a:font script="Telu" typeface="Gautami"/>
+        <a:font script="Taml" typeface="Latha"/>
+        <a:font script="Syrc" typeface="Estrangelo Edessa"/>
+        <a:font script="Orya" typeface="Kalinga"/>
+        <a:font script="Mlym" typeface="Kartika"/>
+        <a:font script="Laoo" typeface="DokChampa"/>
+        <a:font script="Sinh" typeface="Iskoola Pota"/>
+        <a:font script="Mong" typeface="Mongolian Baiti"/>
+        <a:font script="Viet" typeface="Times New Roman"/>
+        <a:font script="Uigh" typeface="Microsoft Uighur"/>
+        <a:font script="Geor" typeface="Sylfaen"/>
+        <a:font script="Armn" typeface="Arial"/>
+        <a:font script="Bugi" typeface="Leelawadee UI"/>
+        <a:font script="Bopo" typeface="Microsoft JhengHei"/>
+        <a:font script="Java" typeface="Javanese Text"/>
+        <a:font script="Lisu" typeface="Segoe UI"/>
+        <a:font script="Mymr" typeface="Myanmar Text"/>
+        <a:font script="Nkoo" typeface="Ebrima"/>
+        <a:font script="Olck" typeface="Nirmala UI"/>
+        <a:font script="Osma" typeface="Ebrima"/>
+        <a:font script="Phag" typeface="Phagspa"/>
+        <a:font script="Syrn" typeface="Estrangelo Edessa"/>
+        <a:font script="Syrj" typeface="Estrangelo Edessa"/>
+        <a:font script="Syre" typeface="Estrangelo Edessa"/>
+        <a:font script="Sora" typeface="Nirmala UI"/>
+        <a:font script="Tale" typeface="Microsoft Tai Le"/>
+        <a:font script="Talu" typeface="Microsoft New Tai Lue"/>
+        <a:font script="Tfng" typeface="Ebrima"/>
+      </a:majorFont>
+      <a:minorFont>
+        <a:latin typeface="Aptos" panose="02110004020202020204"/>
+        <a:ea typeface=""/>
+        <a:cs typeface=""/>
+        <a:font script="Jpan" typeface="游ゴシック"/>
+        <a:font script="Hang" typeface="맑은 고딕"/>
+        <a:font script="Hans" typeface="等线"/>
+        <a:font script="Hant" typeface="新細明體"/>
+        <a:font script="Arab" typeface="Arial"/>
+        <a:font script="Hebr" typeface="Arial"/>
+        <a:font script="Thai" typeface="Cordia New"/>
+        <a:font script="Ethi" typeface="Nyala"/>
+        <a:font script="Beng" typeface="Vrinda"/>
+        <a:font script="Gujr" typeface="Shruti"/>
+        <a:font script="Khmr" typeface="DaunPenh"/>
+        <a:font script="Knda" typeface="Tunga"/>
+        <a:font script="Guru" typeface="Raavi"/>
+        <a:font script="Cans" typeface="Euphemia"/>
+        <a:font script="Cher" typeface="Plantagenet Cherokee"/>
+        <a:font script="Yiii" typeface="Microsoft Yi Baiti"/>
+        <a:font script="Tibt" typeface="Microsoft Himalaya"/>
+        <a:font script="Thaa" typeface="MV Boli"/>
+        <a:font script="Deva" typeface="Mangal"/>
+        <a:font script="Telu" typeface="Gautami"/>
+        <a:font script="Taml" typeface="Latha"/>
+        <a:font script="Syrc" typeface="Estrangelo Edessa"/>
+        <a:font script="Orya" typeface="Kalinga"/>
+        <a:font script="Mlym" typeface="Kartika"/>
+        <a:font script="Laoo" typeface="DokChampa"/>
+        <a:font script="Sinh" typeface="Iskoola Pota"/>
+        <a:font script="Mong" typeface="Mongolian Baiti"/>
+        <a:font script="Viet" typeface="Arial"/>
+        <a:font script="Uigh" typeface="Microsoft Uighur"/>
+        <a:font script="Geor" typeface="Sylfaen"/>
+        <a:font script="Armn" typeface="Arial"/>
+        <a:font script="Bugi" typeface="Leelawadee UI"/>
+        <a:font script="Bopo" typeface="Microsoft JhengHei"/>
+        <a:font script="Java" typeface="Javanese Text"/>
+        <a:font script="Lisu" typeface="Segoe UI"/>
+        <a:font script="Mymr" typeface="Myanmar Text"/>
+        <a:font script="Nkoo" typeface="Ebrima"/>
+        <a:font script="Olck" typeface="Nirmala UI"/>
+        <a:font script="Osma" typeface="Ebrima"/>
+        <a:font script="Phag" typeface="Phagspa"/>
+        <a:font script="Syrn" typeface="Estrangelo Edessa"/>
+        <a:font script="Syrj" typeface="Estrangelo Edessa"/>
+        <a:font script="Syre" typeface="Estrangelo Edessa"/>
+        <a:font script="Sora" typeface="Nirmala UI"/>
+        <a:font script="Tale" typeface="Microsoft Tai Le"/>
+        <a:font script="Talu" typeface="Microsoft New Tai Lue"/>
+        <a:font script="Tfng" typeface="Ebrima"/>
+      </a:minorFont>
+    </a:fontScheme>
+    <a:fmtScheme name="Office">
+      <a:fillStyleLst>
+        <a:solidFill>
+          <a:schemeClr val="phClr"/>
+        </a:solidFill>
+        <a:gradFill rotWithShape="1">
+          <a:gsLst>
+            <a:gs pos="0">
+              <a:schemeClr val="phClr">
+                <a:lumMod val="110000"/>
+                <a:satMod val="105000"/>
+                <a:tint val="67000"/>
+              </a:schemeClr>
+            </a:gs>
+            <a:gs pos="50000">
+              <a:schemeClr val="phClr">
+                <a:lumMod val="105000"/>
+                <a:satMod val="103000"/>
+                <a:tint val="73000"/>
+              </a:schemeClr>
+            </a:gs>
+            <a:gs pos="100000">
+              <a:schemeClr val="phClr">
+                <a:lumMod val="105000"/>
+                <a:satMod val="109000"/>
+                <a:tint val="81000"/>
+              </a:schemeClr>
+            </a:gs>
+          </a:gsLst>
+          <a:lin ang="5400000" scaled="0"/>
+        </a:gradFill>
+        <a:gradFill rotWithShape="1">
+          <a:gsLst>
+            <a:gs pos="0">
+              <a:schemeClr val="phClr">
+                <a:satMod val="103000"/>
+                <a:lumMod val="102000"/>
+                <a:tint val="94000"/>
+              </a:schemeClr>
+            </a:gs>
+            <a:gs pos="50000">
+              <a:schemeClr val="phClr">
+                <a:satMod val="110000"/>
+                <a:lumMod val="100000"/>
+                <a:shade val="100000"/>
+              </a:schemeClr>
+            </a:gs>
+            <a:gs pos="100000">
+              <a:schemeClr val="phClr">
+                <a:lumMod val="99000"/>
+                <a:satMod val="120000"/>
+                <a:shade val="78000"/>
+              </a:schemeClr>
+            </a:gs>
+          </a:gsLst>
+          <a:lin ang="5400000" scaled="0"/>
+        </a:gradFill>
+      </a:fillStyleLst>
+      <a:lnStyleLst>
+        <a:ln w="12700" cap="flat" cmpd="sng" algn="ctr">
+          <a:solidFill>
+            <a:schemeClr val="phClr"/>
+          </a:solidFill>
+          <a:prstDash val="solid"/>
+          <a:miter lim="800000"/>
+        </a:ln>
+        <a:ln w="19050" cap="flat" cmpd="sng" algn="ctr">
+          <a:solidFill>
+            <a:schemeClr val="phClr"/>
+          </a:solidFill>
+          <a:prstDash val="solid"/>
+          <a:miter lim="800000"/>
+        </a:ln>
+        <a:ln w="25400" cap="flat" cmpd="sng" algn="ctr">
+          <a:solidFill>
+            <a:schemeClr val="phClr"/>
+          </a:solidFill>
+          <a:prstDash val="solid"/>
+          <a:miter lim="800000"/>
+        </a:ln>
+      </a:lnStyleLst>
+      <a:effectStyleLst>
+        <a:effectStyle>
+          <a:effectLst/>
+        </a:effectStyle>
+        <a:effectStyle>
+          <a:effectLst/>
+        </a:effectStyle>
+        <a:effectStyle>
+          <a:effectLst>
+            <a:outerShdw blurRad="57150" dist="19050" dir="5400000" algn="ctr" rotWithShape="0">
+              <a:srgbClr val="000000">
+                <a:alpha val="63000"/>
+              </a:srgbClr>
+            </a:outerShdw>
+          </a:effectLst>
+        </a:effectStyle>
+      </a:effectStyleLst>
+      <a:bgFillStyleLst>
+        <a:solidFill>
+          <a:schemeClr val="phClr"/>
+        </a:solidFill>
+        <a:solidFill>
+          <a:schemeClr val="phClr">
+            <a:tint val="95000"/>
+            <a:satMod val="170000"/>
+          </a:schemeClr>
+        </a:solidFill>
+        <a:gradFill rotWithShape="1">
+          <a:gsLst>
+            <a:gs pos="0">
+              <a:schemeClr val="phClr">
+                <a:tint val="93000"/>
+                <a:satMod val="150000"/>
+                <a:shade val="98000"/>
+                <a:lumMod val="102000"/>
+              </a:schemeClr>
+            </a:gs>
+            <a:gs pos="50000">
+              <a:schemeClr val="phClr">
+                <a:tint val="98000"/>
+                <a:satMod val="130000"/>
+                <a:shade val="90000"/>
+                <a:lumMod val="103000"/>
+              </a:schemeClr>
+            </a:gs>
+            <a:gs pos="100000">
+              <a:schemeClr val="phClr">
+                <a:shade val="63000"/>
+                <a:satMod val="120000"/>
+              </a:schemeClr>
+            </a:gs>
+          </a:gsLst>
+          <a:lin ang="5400000" scaled="0"/>
+        </a:gradFill>
+      </a:bgFillStyleLst>
+    </a:fmtScheme>
+  </a:themeElements>
+  <a:objectDefaults>
+    <a:lnDef>
+      <a:spPr/>
+      <a:bodyPr/>
+      <a:lstStyle/>
+      <a:style>
+        <a:lnRef idx="2">
+          <a:schemeClr val="accent1"/>
+        </a:lnRef>
+        <a:fillRef idx="0">
+          <a:schemeClr val="accent1"/>
+        </a:fillRef>
+        <a:effectRef idx="1">
+          <a:schemeClr val="accent1"/>
+        </a:effectRef>
+        <a:fontRef idx="minor">
+          <a:schemeClr val="tx1"/>
+        </a:fontRef>
+      </a:style>
+    </a:lnDef>
+  </a:objectDefaults>
+  <a:extraClrSchemeLst/>
+  <a:extLst>
+    <a:ext uri="{05A4C25C-085E-4340-85A3-A5531E510DB2}">
+      <thm15:themeFamily xmlns:thm15="http://schemas.microsoft.com/office/thememl/2012/main" name="Office Theme" id="{2E142A2C-CD16-42D6-873A-C26D2A0506FA}" vid="{1BDDFF52-6CD6-40A5-AB3C-68EB2F1E4D0A}"/>
+    </a:ext>
+  </a:extLst>
+</a:theme>
 </file>